--- a/teaching/NS_3.pptx
+++ b/teaching/NS_3.pptx
@@ -5,7 +5,7 @@
     <p:sldMasterId id="2147483750" r:id="rId1"/>
   </p:sldMasterIdLst>
   <p:notesMasterIdLst>
-    <p:notesMasterId r:id="rId14"/>
+    <p:notesMasterId r:id="rId25"/>
   </p:notesMasterIdLst>
   <p:sldIdLst>
     <p:sldId id="256" r:id="rId2"/>
@@ -20,6 +20,17 @@
     <p:sldId id="304" r:id="rId11"/>
     <p:sldId id="305" r:id="rId12"/>
     <p:sldId id="303" r:id="rId13"/>
+    <p:sldId id="308" r:id="rId14"/>
+    <p:sldId id="257" r:id="rId15"/>
+    <p:sldId id="258" r:id="rId16"/>
+    <p:sldId id="309" r:id="rId17"/>
+    <p:sldId id="310" r:id="rId18"/>
+    <p:sldId id="311" r:id="rId19"/>
+    <p:sldId id="312" r:id="rId20"/>
+    <p:sldId id="313" r:id="rId21"/>
+    <p:sldId id="317" r:id="rId22"/>
+    <p:sldId id="316" r:id="rId23"/>
+    <p:sldId id="315" r:id="rId24"/>
   </p:sldIdLst>
   <p:sldSz cx="12192000" cy="6858000"/>
   <p:notesSz cx="6858000" cy="9144000"/>
@@ -208,7 +219,7 @@
           <a:p>
             <a:fld id="{C59A27D3-0CC7-934B-85C6-96FBF84258AF}" type="datetimeFigureOut">
               <a:rPr lang="en-US" smtClean="0"/>
-              <a:t>1/11/25</a:t>
+              <a:t>1/13/26</a:t>
             </a:fld>
             <a:endParaRPr lang="en-US"/>
           </a:p>
@@ -631,7 +642,7 @@
           <a:p>
             <a:fld id="{02AC24A9-CCB6-4F8D-B8DB-C2F3692CFA5A}" type="datetimeFigureOut">
               <a:rPr lang="en-US" smtClean="0"/>
-              <a:t>1/11/25</a:t>
+              <a:t>1/13/26</a:t>
             </a:fld>
             <a:endParaRPr lang="en-US" dirty="0"/>
           </a:p>
@@ -1001,7 +1012,7 @@
           <a:p>
             <a:fld id="{02AC24A9-CCB6-4F8D-B8DB-C2F3692CFA5A}" type="datetimeFigureOut">
               <a:rPr lang="en-US" smtClean="0"/>
-              <a:t>1/11/25</a:t>
+              <a:t>1/13/26</a:t>
             </a:fld>
             <a:endParaRPr lang="en-US"/>
           </a:p>
@@ -1210,7 +1221,7 @@
           <a:p>
             <a:fld id="{02AC24A9-CCB6-4F8D-B8DB-C2F3692CFA5A}" type="datetimeFigureOut">
               <a:rPr lang="en-US" smtClean="0"/>
-              <a:t>1/11/25</a:t>
+              <a:t>1/13/26</a:t>
             </a:fld>
             <a:endParaRPr lang="en-US"/>
           </a:p>
@@ -1680,7 +1691,7 @@
           <a:p>
             <a:fld id="{02AC24A9-CCB6-4F8D-B8DB-C2F3692CFA5A}" type="datetimeFigureOut">
               <a:rPr lang="en-US" smtClean="0"/>
-              <a:t>1/11/25</a:t>
+              <a:t>1/13/26</a:t>
             </a:fld>
             <a:endParaRPr lang="en-US"/>
           </a:p>
@@ -2134,7 +2145,7 @@
           <a:p>
             <a:fld id="{02AC24A9-CCB6-4F8D-B8DB-C2F3692CFA5A}" type="datetimeFigureOut">
               <a:rPr lang="en-US" smtClean="0"/>
-              <a:t>1/11/25</a:t>
+              <a:t>1/13/26</a:t>
             </a:fld>
             <a:endParaRPr lang="en-US"/>
           </a:p>
@@ -2666,7 +2677,7 @@
           <a:p>
             <a:fld id="{02AC24A9-CCB6-4F8D-B8DB-C2F3692CFA5A}" type="datetimeFigureOut">
               <a:rPr lang="en-US" smtClean="0"/>
-              <a:t>1/11/25</a:t>
+              <a:t>1/13/26</a:t>
             </a:fld>
             <a:endParaRPr lang="en-US"/>
           </a:p>
@@ -3365,7 +3376,7 @@
           <a:p>
             <a:fld id="{02AC24A9-CCB6-4F8D-B8DB-C2F3692CFA5A}" type="datetimeFigureOut">
               <a:rPr lang="en-US" smtClean="0"/>
-              <a:t>1/11/25</a:t>
+              <a:t>1/13/26</a:t>
             </a:fld>
             <a:endParaRPr lang="en-US"/>
           </a:p>
@@ -3694,7 +3705,7 @@
           <a:p>
             <a:fld id="{02AC24A9-CCB6-4F8D-B8DB-C2F3692CFA5A}" type="datetimeFigureOut">
               <a:rPr lang="en-US" smtClean="0"/>
-              <a:t>1/11/25</a:t>
+              <a:t>1/13/26</a:t>
             </a:fld>
             <a:endParaRPr lang="en-US"/>
           </a:p>
@@ -3807,7 +3818,7 @@
           <a:p>
             <a:fld id="{02AC24A9-CCB6-4F8D-B8DB-C2F3692CFA5A}" type="datetimeFigureOut">
               <a:rPr lang="en-US" smtClean="0"/>
-              <a:t>1/11/25</a:t>
+              <a:t>1/13/26</a:t>
             </a:fld>
             <a:endParaRPr lang="en-US"/>
           </a:p>
@@ -4302,7 +4313,7 @@
           <a:p>
             <a:fld id="{02AC24A9-CCB6-4F8D-B8DB-C2F3692CFA5A}" type="datetimeFigureOut">
               <a:rPr lang="en-US" smtClean="0"/>
-              <a:t>1/11/25</a:t>
+              <a:t>1/13/26</a:t>
             </a:fld>
             <a:endParaRPr lang="en-US" dirty="0"/>
           </a:p>
@@ -4779,7 +4790,7 @@
           <a:p>
             <a:fld id="{02AC24A9-CCB6-4F8D-B8DB-C2F3692CFA5A}" type="datetimeFigureOut">
               <a:rPr lang="en-US" smtClean="0"/>
-              <a:t>1/11/25</a:t>
+              <a:t>1/13/26</a:t>
             </a:fld>
             <a:endParaRPr lang="en-US"/>
           </a:p>
@@ -5022,7 +5033,7 @@
           <a:p>
             <a:fld id="{02AC24A9-CCB6-4F8D-B8DB-C2F3692CFA5A}" type="datetimeFigureOut">
               <a:rPr lang="en-US" smtClean="0"/>
-              <a:t>1/11/25</a:t>
+              <a:t>1/13/26</a:t>
             </a:fld>
             <a:endParaRPr lang="en-US"/>
           </a:p>
@@ -7720,6 +7731,3959 @@
 </p:sld>
 </file>
 
+<file path=ppt/slides/slide13.xml><?xml version="1.0" encoding="utf-8"?>
+<p:sld xmlns:a="http://schemas.openxmlformats.org/drawingml/2006/main" xmlns:r="http://schemas.openxmlformats.org/officeDocument/2006/relationships" xmlns:p="http://schemas.openxmlformats.org/presentationml/2006/main">
+  <p:cSld>
+    <p:spTree>
+      <p:nvGrpSpPr>
+        <p:cNvPr id="1" name=""/>
+        <p:cNvGrpSpPr/>
+        <p:nvPr/>
+      </p:nvGrpSpPr>
+      <p:grpSpPr>
+        <a:xfrm>
+          <a:off x="0" y="0"/>
+          <a:ext cx="0" cy="0"/>
+          <a:chOff x="0" y="0"/>
+          <a:chExt cx="0" cy="0"/>
+        </a:xfrm>
+      </p:grpSpPr>
+      <p:sp>
+        <p:nvSpPr>
+          <p:cNvPr id="2" name="Title 1"/>
+          <p:cNvSpPr>
+            <a:spLocks noGrp="1"/>
+          </p:cNvSpPr>
+          <p:nvPr>
+            <p:ph type="ctrTitle"/>
+          </p:nvPr>
+        </p:nvSpPr>
+        <p:spPr/>
+        <p:txBody>
+          <a:bodyPr>
+            <a:normAutofit fontScale="90000"/>
+          </a:bodyPr>
+          <a:lstStyle/>
+          <a:p>
+            <a:r>
+              <a:t>Global Quantification of Mammalian Gene Expression Control</a:t>
+            </a:r>
+          </a:p>
+        </p:txBody>
+      </p:sp>
+      <p:sp>
+        <p:nvSpPr>
+          <p:cNvPr id="3" name="Subtitle 2"/>
+          <p:cNvSpPr>
+            <a:spLocks noGrp="1"/>
+          </p:cNvSpPr>
+          <p:nvPr>
+            <p:ph type="subTitle" idx="1"/>
+          </p:nvPr>
+        </p:nvSpPr>
+        <p:spPr/>
+        <p:txBody>
+          <a:bodyPr/>
+          <a:lstStyle/>
+          <a:p>
+            <a:r>
+              <a:t>Schwanhäusser et al., Nature 2011</a:t>
+            </a:r>
+          </a:p>
+          <a:p>
+            <a:r>
+              <a:t>Journal Club – Critical Discussion</a:t>
+            </a:r>
+          </a:p>
+        </p:txBody>
+      </p:sp>
+    </p:spTree>
+  </p:cSld>
+  <p:clrMapOvr>
+    <a:masterClrMapping/>
+  </p:clrMapOvr>
+</p:sld>
+</file>
+
+<file path=ppt/slides/slide14.xml><?xml version="1.0" encoding="utf-8"?>
+<p:sld xmlns:a="http://schemas.openxmlformats.org/drawingml/2006/main" xmlns:r="http://schemas.openxmlformats.org/officeDocument/2006/relationships" xmlns:p="http://schemas.openxmlformats.org/presentationml/2006/main">
+  <p:cSld>
+    <p:spTree>
+      <p:nvGrpSpPr>
+        <p:cNvPr id="1" name=""/>
+        <p:cNvGrpSpPr/>
+        <p:nvPr/>
+      </p:nvGrpSpPr>
+      <p:grpSpPr>
+        <a:xfrm>
+          <a:off x="0" y="0"/>
+          <a:ext cx="0" cy="0"/>
+          <a:chOff x="0" y="0"/>
+          <a:chExt cx="0" cy="0"/>
+        </a:xfrm>
+      </p:grpSpPr>
+      <p:sp>
+        <p:nvSpPr>
+          <p:cNvPr id="2" name="Title 1"/>
+          <p:cNvSpPr>
+            <a:spLocks noGrp="1"/>
+          </p:cNvSpPr>
+          <p:nvPr>
+            <p:ph type="title"/>
+          </p:nvPr>
+        </p:nvSpPr>
+        <p:spPr/>
+        <p:txBody>
+          <a:bodyPr/>
+          <a:lstStyle/>
+          <a:p>
+            <a:r>
+              <a:t>Motivation</a:t>
+            </a:r>
+          </a:p>
+        </p:txBody>
+      </p:sp>
+      <p:sp>
+        <p:nvSpPr>
+          <p:cNvPr id="3" name="Content Placeholder 2"/>
+          <p:cNvSpPr>
+            <a:spLocks noGrp="1"/>
+          </p:cNvSpPr>
+          <p:nvPr>
+            <p:ph idx="1"/>
+          </p:nvPr>
+        </p:nvSpPr>
+        <p:spPr/>
+        <p:txBody>
+          <a:bodyPr/>
+          <a:lstStyle/>
+          <a:p>
+            <a:pPr marL="0" indent="0">
+              <a:buNone/>
+            </a:pPr>
+            <a:r>
+              <a:rPr dirty="0"/>
+              <a:t>• </a:t>
+            </a:r>
+            <a:r>
+              <a:rPr lang="en-US" dirty="0"/>
+              <a:t>Fundamental questions ?</a:t>
+            </a:r>
+          </a:p>
+          <a:p>
+            <a:pPr marL="0" indent="0">
+              <a:buNone/>
+            </a:pPr>
+            <a:endParaRPr dirty="0"/>
+          </a:p>
+          <a:p>
+            <a:pPr marL="0" indent="0">
+              <a:buNone/>
+            </a:pPr>
+            <a:r>
+              <a:rPr dirty="0"/>
+              <a:t>• </a:t>
+            </a:r>
+            <a:r>
+              <a:rPr lang="en-US" dirty="0"/>
+              <a:t>Practical questions ?</a:t>
+            </a:r>
+          </a:p>
+          <a:p>
+            <a:pPr marL="0" indent="0">
+              <a:buNone/>
+            </a:pPr>
+            <a:endParaRPr dirty="0"/>
+          </a:p>
+        </p:txBody>
+      </p:sp>
+    </p:spTree>
+  </p:cSld>
+  <p:clrMapOvr>
+    <a:masterClrMapping/>
+  </p:clrMapOvr>
+</p:sld>
+</file>
+
+<file path=ppt/slides/slide15.xml><?xml version="1.0" encoding="utf-8"?>
+<p:sld xmlns:a="http://schemas.openxmlformats.org/drawingml/2006/main" xmlns:r="http://schemas.openxmlformats.org/officeDocument/2006/relationships" xmlns:p="http://schemas.openxmlformats.org/presentationml/2006/main">
+  <p:cSld>
+    <p:bg>
+      <p:bgPr>
+        <a:solidFill>
+          <a:schemeClr val="bg1"/>
+        </a:solidFill>
+        <a:effectLst/>
+      </p:bgPr>
+    </p:bg>
+    <p:spTree>
+      <p:nvGrpSpPr>
+        <p:cNvPr id="1" name=""/>
+        <p:cNvGrpSpPr/>
+        <p:nvPr/>
+      </p:nvGrpSpPr>
+      <p:grpSpPr>
+        <a:xfrm>
+          <a:off x="0" y="0"/>
+          <a:ext cx="0" cy="0"/>
+          <a:chOff x="0" y="0"/>
+          <a:chExt cx="0" cy="0"/>
+        </a:xfrm>
+      </p:grpSpPr>
+      <p:sp>
+        <p:nvSpPr>
+          <p:cNvPr id="24" name="Rectangle 23">
+            <a:extLst>
+              <a:ext uri="{FF2B5EF4-FFF2-40B4-BE49-F238E27FC236}">
+                <a16:creationId xmlns:a16="http://schemas.microsoft.com/office/drawing/2014/main" id="{8D06CE56-3881-4ADA-8CEF-D18B02C242A3}"/>
+              </a:ext>
+              <a:ext uri="{C183D7F6-B498-43B3-948B-1728B52AA6E4}">
+                <adec:decorative xmlns:adec="http://schemas.microsoft.com/office/drawing/2017/decorative" val="1"/>
+              </a:ext>
+            </a:extLst>
+          </p:cNvPr>
+          <p:cNvSpPr>
+            <a:spLocks noGrp="1" noRot="1" noChangeAspect="1" noMove="1" noResize="1" noEditPoints="1" noAdjustHandles="1" noChangeArrowheads="1" noChangeShapeType="1" noTextEdit="1"/>
+          </p:cNvSpPr>
+          <p:nvPr>
+            <p:extLst>
+              <p:ext uri="{386F3935-93C4-4BCD-93E2-E3B085C9AB24}">
+                <p16:designElem xmlns:p16="http://schemas.microsoft.com/office/powerpoint/2015/main" val="1"/>
+              </p:ext>
+            </p:extLst>
+          </p:nvPr>
+        </p:nvSpPr>
+        <p:spPr>
+          <a:xfrm rot="5400000">
+            <a:off x="857544" y="346791"/>
+            <a:ext cx="146304" cy="704088"/>
+          </a:xfrm>
+          <a:prstGeom prst="rect">
+            <a:avLst/>
+          </a:prstGeom>
+          <a:solidFill>
+            <a:schemeClr val="accent1"/>
+          </a:solidFill>
+          <a:ln>
+            <a:noFill/>
+          </a:ln>
+        </p:spPr>
+        <p:style>
+          <a:lnRef idx="2">
+            <a:schemeClr val="accent1">
+              <a:shade val="50000"/>
+            </a:schemeClr>
+          </a:lnRef>
+          <a:fillRef idx="1">
+            <a:schemeClr val="accent1"/>
+          </a:fillRef>
+          <a:effectRef idx="0">
+            <a:schemeClr val="accent1"/>
+          </a:effectRef>
+          <a:fontRef idx="minor">
+            <a:schemeClr val="lt1"/>
+          </a:fontRef>
+        </p:style>
+        <p:txBody>
+          <a:bodyPr rtlCol="0" anchor="ctr"/>
+          <a:lstStyle/>
+          <a:p>
+            <a:pPr marL="0" marR="0" lvl="0" indent="0" algn="ctr" defTabSz="914400" rtl="0" eaLnBrk="1" fontAlgn="auto" latinLnBrk="0" hangingPunct="1">
+              <a:lnSpc>
+                <a:spcPct val="100000"/>
+              </a:lnSpc>
+              <a:spcBef>
+                <a:spcPts val="0"/>
+              </a:spcBef>
+              <a:spcAft>
+                <a:spcPts val="0"/>
+              </a:spcAft>
+              <a:buClrTx/>
+              <a:buSzTx/>
+              <a:buFontTx/>
+              <a:buNone/>
+              <a:tabLst/>
+              <a:defRPr/>
+            </a:pPr>
+            <a:endParaRPr kumimoji="0" lang="en-US" sz="1800" b="0" i="0" u="none" strike="noStrike" kern="1200" cap="none" spc="0" normalizeH="0" baseline="0" noProof="0">
+              <a:ln>
+                <a:noFill/>
+              </a:ln>
+              <a:solidFill>
+                <a:prstClr val="white"/>
+              </a:solidFill>
+              <a:effectLst/>
+              <a:uLnTx/>
+              <a:uFillTx/>
+              <a:latin typeface="Calibri" panose="020F0502020204030204"/>
+              <a:ea typeface="+mn-ea"/>
+              <a:cs typeface="+mn-cs"/>
+            </a:endParaRPr>
+          </a:p>
+        </p:txBody>
+      </p:sp>
+      <p:sp>
+        <p:nvSpPr>
+          <p:cNvPr id="26" name="Rectangle 25">
+            <a:extLst>
+              <a:ext uri="{FF2B5EF4-FFF2-40B4-BE49-F238E27FC236}">
+                <a16:creationId xmlns:a16="http://schemas.microsoft.com/office/drawing/2014/main" id="{79F3C543-62EC-4433-9C93-A2CD8764E9B4}"/>
+              </a:ext>
+              <a:ext uri="{C183D7F6-B498-43B3-948B-1728B52AA6E4}">
+                <adec:decorative xmlns:adec="http://schemas.microsoft.com/office/drawing/2017/decorative" val="1"/>
+              </a:ext>
+            </a:extLst>
+          </p:cNvPr>
+          <p:cNvSpPr>
+            <a:spLocks noGrp="1" noRot="1" noChangeAspect="1" noMove="1" noResize="1" noEditPoints="1" noAdjustHandles="1" noChangeArrowheads="1" noChangeShapeType="1" noTextEdit="1"/>
+          </p:cNvSpPr>
+          <p:nvPr>
+            <p:extLst>
+              <p:ext uri="{386F3935-93C4-4BCD-93E2-E3B085C9AB24}">
+                <p16:designElem xmlns:p16="http://schemas.microsoft.com/office/powerpoint/2015/main" val="1"/>
+              </p:ext>
+            </p:extLst>
+          </p:nvPr>
+        </p:nvSpPr>
+        <p:spPr>
+          <a:xfrm flipV="1">
+            <a:off x="578652" y="4501201"/>
+            <a:ext cx="11034696" cy="18288"/>
+          </a:xfrm>
+          <a:prstGeom prst="rect">
+            <a:avLst/>
+          </a:prstGeom>
+          <a:solidFill>
+            <a:schemeClr val="tx2">
+              <a:lumMod val="25000"/>
+              <a:lumOff val="75000"/>
+            </a:schemeClr>
+          </a:solidFill>
+          <a:ln w="3175">
+            <a:noFill/>
+          </a:ln>
+          <a:effectLst/>
+        </p:spPr>
+        <p:style>
+          <a:lnRef idx="2">
+            <a:schemeClr val="accent1">
+              <a:shade val="50000"/>
+            </a:schemeClr>
+          </a:lnRef>
+          <a:fillRef idx="1">
+            <a:schemeClr val="accent1"/>
+          </a:fillRef>
+          <a:effectRef idx="0">
+            <a:schemeClr val="accent1"/>
+          </a:effectRef>
+          <a:fontRef idx="minor">
+            <a:schemeClr val="lt1"/>
+          </a:fontRef>
+        </p:style>
+        <p:txBody>
+          <a:bodyPr rtlCol="0" anchor="ctr"/>
+          <a:lstStyle/>
+          <a:p>
+            <a:pPr marL="0" marR="0" lvl="0" indent="0" algn="ctr" defTabSz="914400" rtl="0" eaLnBrk="1" fontAlgn="auto" latinLnBrk="0" hangingPunct="1">
+              <a:lnSpc>
+                <a:spcPct val="100000"/>
+              </a:lnSpc>
+              <a:spcBef>
+                <a:spcPts val="0"/>
+              </a:spcBef>
+              <a:spcAft>
+                <a:spcPts val="0"/>
+              </a:spcAft>
+              <a:buClrTx/>
+              <a:buSzTx/>
+              <a:buFontTx/>
+              <a:buNone/>
+              <a:tabLst/>
+              <a:defRPr/>
+            </a:pPr>
+            <a:endParaRPr kumimoji="0" lang="en-US" sz="1800" b="0" i="0" u="none" strike="noStrike" kern="1200" cap="none" spc="0" normalizeH="0" baseline="0" noProof="0">
+              <a:ln>
+                <a:noFill/>
+              </a:ln>
+              <a:solidFill>
+                <a:prstClr val="white"/>
+              </a:solidFill>
+              <a:effectLst/>
+              <a:uLnTx/>
+              <a:uFillTx/>
+              <a:latin typeface="Calibri" panose="020F0502020204030204"/>
+              <a:ea typeface="+mn-ea"/>
+              <a:cs typeface="+mn-cs"/>
+            </a:endParaRPr>
+          </a:p>
+        </p:txBody>
+      </p:sp>
+      <p:sp useBgFill="1">
+        <p:nvSpPr>
+          <p:cNvPr id="28" name="Rectangle 27">
+            <a:extLst>
+              <a:ext uri="{FF2B5EF4-FFF2-40B4-BE49-F238E27FC236}">
+                <a16:creationId xmlns:a16="http://schemas.microsoft.com/office/drawing/2014/main" id="{5DCB5928-DC7D-4612-9922-441966E15627}"/>
+              </a:ext>
+              <a:ext uri="{C183D7F6-B498-43B3-948B-1728B52AA6E4}">
+                <adec:decorative xmlns:adec="http://schemas.microsoft.com/office/drawing/2017/decorative" val="1"/>
+              </a:ext>
+            </a:extLst>
+          </p:cNvPr>
+          <p:cNvSpPr>
+            <a:spLocks noGrp="1" noRot="1" noChangeAspect="1" noMove="1" noResize="1" noEditPoints="1" noAdjustHandles="1" noChangeArrowheads="1" noChangeShapeType="1" noTextEdit="1"/>
+          </p:cNvSpPr>
+          <p:nvPr>
+            <p:extLst>
+              <p:ext uri="{386F3935-93C4-4BCD-93E2-E3B085C9AB24}">
+                <p16:designElem xmlns:p16="http://schemas.microsoft.com/office/powerpoint/2015/main" val="1"/>
+              </p:ext>
+            </p:extLst>
+          </p:nvPr>
+        </p:nvSpPr>
+        <p:spPr>
+          <a:xfrm>
+            <a:off x="0" y="0"/>
+            <a:ext cx="12192000" cy="6858000"/>
+          </a:xfrm>
+          <a:prstGeom prst="rect">
+            <a:avLst/>
+          </a:prstGeom>
+          <a:ln>
+            <a:noFill/>
+          </a:ln>
+        </p:spPr>
+        <p:style>
+          <a:lnRef idx="2">
+            <a:schemeClr val="accent1">
+              <a:shade val="50000"/>
+            </a:schemeClr>
+          </a:lnRef>
+          <a:fillRef idx="1">
+            <a:schemeClr val="accent1"/>
+          </a:fillRef>
+          <a:effectRef idx="0">
+            <a:schemeClr val="accent1"/>
+          </a:effectRef>
+          <a:fontRef idx="minor">
+            <a:schemeClr val="lt1"/>
+          </a:fontRef>
+        </p:style>
+        <p:txBody>
+          <a:bodyPr rtlCol="0" anchor="ctr"/>
+          <a:lstStyle/>
+          <a:p>
+            <a:pPr algn="ctr"/>
+            <a:endParaRPr lang="en-US"/>
+          </a:p>
+        </p:txBody>
+      </p:sp>
+      <p:sp useBgFill="1">
+        <p:nvSpPr>
+          <p:cNvPr id="30" name="Freeform: Shape 29">
+            <a:extLst>
+              <a:ext uri="{FF2B5EF4-FFF2-40B4-BE49-F238E27FC236}">
+                <a16:creationId xmlns:a16="http://schemas.microsoft.com/office/drawing/2014/main" id="{682C1161-1736-45EC-99B7-33F3CAE9D517}"/>
+              </a:ext>
+              <a:ext uri="{C183D7F6-B498-43B3-948B-1728B52AA6E4}">
+                <adec:decorative xmlns:adec="http://schemas.microsoft.com/office/drawing/2017/decorative" val="1"/>
+              </a:ext>
+            </a:extLst>
+          </p:cNvPr>
+          <p:cNvSpPr>
+            <a:spLocks noGrp="1" noRot="1" noChangeAspect="1" noMove="1" noResize="1" noEditPoints="1" noAdjustHandles="1" noChangeArrowheads="1" noChangeShapeType="1" noTextEdit="1"/>
+          </p:cNvSpPr>
+          <p:nvPr>
+            <p:extLst>
+              <p:ext uri="{386F3935-93C4-4BCD-93E2-E3B085C9AB24}">
+                <p16:designElem xmlns:p16="http://schemas.microsoft.com/office/powerpoint/2015/main" val="1"/>
+              </p:ext>
+            </p:extLst>
+          </p:nvPr>
+        </p:nvSpPr>
+        <p:spPr>
+          <a:xfrm>
+            <a:off x="0" y="0"/>
+            <a:ext cx="4959047" cy="6858000"/>
+          </a:xfrm>
+          <a:custGeom>
+            <a:avLst/>
+            <a:gdLst>
+              <a:gd name="connsiteX0" fmla="*/ 0 w 4959047"/>
+              <a:gd name="connsiteY0" fmla="*/ 0 h 6858000"/>
+              <a:gd name="connsiteX1" fmla="*/ 4110127 w 4959047"/>
+              <a:gd name="connsiteY1" fmla="*/ 0 h 6858000"/>
+              <a:gd name="connsiteX2" fmla="*/ 4179024 w 4959047"/>
+              <a:gd name="connsiteY2" fmla="*/ 123368 h 6858000"/>
+              <a:gd name="connsiteX3" fmla="*/ 4959047 w 4959047"/>
+              <a:gd name="connsiteY3" fmla="*/ 3429000 h 6858000"/>
+              <a:gd name="connsiteX4" fmla="*/ 4179024 w 4959047"/>
+              <a:gd name="connsiteY4" fmla="*/ 6734633 h 6858000"/>
+              <a:gd name="connsiteX5" fmla="*/ 4110127 w 4959047"/>
+              <a:gd name="connsiteY5" fmla="*/ 6858000 h 6858000"/>
+              <a:gd name="connsiteX6" fmla="*/ 0 w 4959047"/>
+              <a:gd name="connsiteY6" fmla="*/ 6858000 h 6858000"/>
+            </a:gdLst>
+            <a:ahLst/>
+            <a:cxnLst>
+              <a:cxn ang="0">
+                <a:pos x="connsiteX0" y="connsiteY0"/>
+              </a:cxn>
+              <a:cxn ang="0">
+                <a:pos x="connsiteX1" y="connsiteY1"/>
+              </a:cxn>
+              <a:cxn ang="0">
+                <a:pos x="connsiteX2" y="connsiteY2"/>
+              </a:cxn>
+              <a:cxn ang="0">
+                <a:pos x="connsiteX3" y="connsiteY3"/>
+              </a:cxn>
+              <a:cxn ang="0">
+                <a:pos x="connsiteX4" y="connsiteY4"/>
+              </a:cxn>
+              <a:cxn ang="0">
+                <a:pos x="connsiteX5" y="connsiteY5"/>
+              </a:cxn>
+              <a:cxn ang="0">
+                <a:pos x="connsiteX6" y="connsiteY6"/>
+              </a:cxn>
+            </a:cxnLst>
+            <a:rect l="l" t="t" r="r" b="b"/>
+            <a:pathLst>
+              <a:path w="4959047" h="6858000">
+                <a:moveTo>
+                  <a:pt x="0" y="0"/>
+                </a:moveTo>
+                <a:lnTo>
+                  <a:pt x="4110127" y="0"/>
+                </a:lnTo>
+                <a:lnTo>
+                  <a:pt x="4179024" y="123368"/>
+                </a:lnTo>
+                <a:cubicBezTo>
+                  <a:pt x="4668929" y="1045156"/>
+                  <a:pt x="4959047" y="2189404"/>
+                  <a:pt x="4959047" y="3429000"/>
+                </a:cubicBezTo>
+                <a:cubicBezTo>
+                  <a:pt x="4959047" y="4668597"/>
+                  <a:pt x="4668929" y="5812845"/>
+                  <a:pt x="4179024" y="6734633"/>
+                </a:cubicBezTo>
+                <a:lnTo>
+                  <a:pt x="4110127" y="6858000"/>
+                </a:lnTo>
+                <a:lnTo>
+                  <a:pt x="0" y="6858000"/>
+                </a:lnTo>
+                <a:close/>
+              </a:path>
+            </a:pathLst>
+          </a:custGeom>
+          <a:ln w="9525">
+            <a:solidFill>
+              <a:schemeClr val="tx2">
+                <a:lumMod val="10000"/>
+                <a:lumOff val="90000"/>
+              </a:schemeClr>
+            </a:solidFill>
+          </a:ln>
+          <a:effectLst>
+            <a:outerShdw blurRad="50800" dist="38100" algn="l" rotWithShape="0">
+              <a:schemeClr val="bg1">
+                <a:lumMod val="85000"/>
+                <a:alpha val="30000"/>
+              </a:schemeClr>
+            </a:outerShdw>
+          </a:effectLst>
+        </p:spPr>
+        <p:style>
+          <a:lnRef idx="2">
+            <a:schemeClr val="accent1">
+              <a:shade val="50000"/>
+            </a:schemeClr>
+          </a:lnRef>
+          <a:fillRef idx="1">
+            <a:schemeClr val="accent1"/>
+          </a:fillRef>
+          <a:effectRef idx="0">
+            <a:schemeClr val="accent1"/>
+          </a:effectRef>
+          <a:fontRef idx="minor">
+            <a:schemeClr val="lt1"/>
+          </a:fontRef>
+        </p:style>
+        <p:txBody>
+          <a:bodyPr wrap="square" rtlCol="0" anchor="ctr">
+            <a:noAutofit/>
+          </a:bodyPr>
+          <a:lstStyle/>
+          <a:p>
+            <a:pPr marL="0" marR="0" lvl="0" indent="0" algn="ctr" defTabSz="914400" rtl="0" eaLnBrk="1" fontAlgn="auto" latinLnBrk="0" hangingPunct="1">
+              <a:lnSpc>
+                <a:spcPct val="100000"/>
+              </a:lnSpc>
+              <a:spcBef>
+                <a:spcPts val="0"/>
+              </a:spcBef>
+              <a:spcAft>
+                <a:spcPts val="0"/>
+              </a:spcAft>
+              <a:buClrTx/>
+              <a:buSzTx/>
+              <a:buFontTx/>
+              <a:buNone/>
+              <a:tabLst/>
+              <a:defRPr/>
+            </a:pPr>
+            <a:endParaRPr kumimoji="0" lang="en-US" sz="1800" b="0" i="0" u="none" strike="noStrike" kern="1200" cap="none" spc="0" normalizeH="0" baseline="0" noProof="0">
+              <a:ln>
+                <a:noFill/>
+              </a:ln>
+              <a:solidFill>
+                <a:prstClr val="white"/>
+              </a:solidFill>
+              <a:effectLst/>
+              <a:uLnTx/>
+              <a:uFillTx/>
+              <a:latin typeface="Calibri" panose="020F0502020204030204"/>
+              <a:ea typeface="+mn-ea"/>
+              <a:cs typeface="+mn-cs"/>
+            </a:endParaRPr>
+          </a:p>
+        </p:txBody>
+      </p:sp>
+      <p:sp useBgFill="1">
+        <p:nvSpPr>
+          <p:cNvPr id="32" name="Freeform: Shape 31">
+            <a:extLst>
+              <a:ext uri="{FF2B5EF4-FFF2-40B4-BE49-F238E27FC236}">
+                <a16:creationId xmlns:a16="http://schemas.microsoft.com/office/drawing/2014/main" id="{84D4DDB8-B68F-45B0-9F62-C4279996F672}"/>
+              </a:ext>
+              <a:ext uri="{C183D7F6-B498-43B3-948B-1728B52AA6E4}">
+                <adec:decorative xmlns:adec="http://schemas.microsoft.com/office/drawing/2017/decorative" val="1"/>
+              </a:ext>
+            </a:extLst>
+          </p:cNvPr>
+          <p:cNvSpPr>
+            <a:spLocks noGrp="1" noRot="1" noChangeAspect="1" noMove="1" noResize="1" noEditPoints="1" noAdjustHandles="1" noChangeArrowheads="1" noChangeShapeType="1" noTextEdit="1"/>
+          </p:cNvSpPr>
+          <p:nvPr>
+            <p:extLst>
+              <p:ext uri="{386F3935-93C4-4BCD-93E2-E3B085C9AB24}">
+                <p16:designElem xmlns:p16="http://schemas.microsoft.com/office/powerpoint/2015/main" val="1"/>
+              </p:ext>
+            </p:extLst>
+          </p:nvPr>
+        </p:nvSpPr>
+        <p:spPr>
+          <a:xfrm>
+            <a:off x="0" y="0"/>
+            <a:ext cx="4948887" cy="6858000"/>
+          </a:xfrm>
+          <a:custGeom>
+            <a:avLst/>
+            <a:gdLst>
+              <a:gd name="connsiteX0" fmla="*/ 0 w 4948887"/>
+              <a:gd name="connsiteY0" fmla="*/ 0 h 6858000"/>
+              <a:gd name="connsiteX1" fmla="*/ 4099967 w 4948887"/>
+              <a:gd name="connsiteY1" fmla="*/ 0 h 6858000"/>
+              <a:gd name="connsiteX2" fmla="*/ 4168864 w 4948887"/>
+              <a:gd name="connsiteY2" fmla="*/ 123368 h 6858000"/>
+              <a:gd name="connsiteX3" fmla="*/ 4948887 w 4948887"/>
+              <a:gd name="connsiteY3" fmla="*/ 3429000 h 6858000"/>
+              <a:gd name="connsiteX4" fmla="*/ 4168864 w 4948887"/>
+              <a:gd name="connsiteY4" fmla="*/ 6734633 h 6858000"/>
+              <a:gd name="connsiteX5" fmla="*/ 4099967 w 4948887"/>
+              <a:gd name="connsiteY5" fmla="*/ 6858000 h 6858000"/>
+              <a:gd name="connsiteX6" fmla="*/ 0 w 4948887"/>
+              <a:gd name="connsiteY6" fmla="*/ 6858000 h 6858000"/>
+            </a:gdLst>
+            <a:ahLst/>
+            <a:cxnLst>
+              <a:cxn ang="0">
+                <a:pos x="connsiteX0" y="connsiteY0"/>
+              </a:cxn>
+              <a:cxn ang="0">
+                <a:pos x="connsiteX1" y="connsiteY1"/>
+              </a:cxn>
+              <a:cxn ang="0">
+                <a:pos x="connsiteX2" y="connsiteY2"/>
+              </a:cxn>
+              <a:cxn ang="0">
+                <a:pos x="connsiteX3" y="connsiteY3"/>
+              </a:cxn>
+              <a:cxn ang="0">
+                <a:pos x="connsiteX4" y="connsiteY4"/>
+              </a:cxn>
+              <a:cxn ang="0">
+                <a:pos x="connsiteX5" y="connsiteY5"/>
+              </a:cxn>
+              <a:cxn ang="0">
+                <a:pos x="connsiteX6" y="connsiteY6"/>
+              </a:cxn>
+            </a:cxnLst>
+            <a:rect l="l" t="t" r="r" b="b"/>
+            <a:pathLst>
+              <a:path w="4948887" h="6858000">
+                <a:moveTo>
+                  <a:pt x="0" y="0"/>
+                </a:moveTo>
+                <a:lnTo>
+                  <a:pt x="4099967" y="0"/>
+                </a:lnTo>
+                <a:lnTo>
+                  <a:pt x="4168864" y="123368"/>
+                </a:lnTo>
+                <a:cubicBezTo>
+                  <a:pt x="4658769" y="1045156"/>
+                  <a:pt x="4948887" y="2189404"/>
+                  <a:pt x="4948887" y="3429000"/>
+                </a:cubicBezTo>
+                <a:cubicBezTo>
+                  <a:pt x="4948887" y="4668597"/>
+                  <a:pt x="4658769" y="5812845"/>
+                  <a:pt x="4168864" y="6734633"/>
+                </a:cubicBezTo>
+                <a:lnTo>
+                  <a:pt x="4099967" y="6858000"/>
+                </a:lnTo>
+                <a:lnTo>
+                  <a:pt x="0" y="6858000"/>
+                </a:lnTo>
+                <a:close/>
+              </a:path>
+            </a:pathLst>
+          </a:custGeom>
+          <a:ln w="9525">
+            <a:noFill/>
+          </a:ln>
+          <a:effectLst/>
+        </p:spPr>
+        <p:style>
+          <a:lnRef idx="2">
+            <a:schemeClr val="accent1">
+              <a:shade val="50000"/>
+            </a:schemeClr>
+          </a:lnRef>
+          <a:fillRef idx="1">
+            <a:schemeClr val="accent1"/>
+          </a:fillRef>
+          <a:effectRef idx="0">
+            <a:schemeClr val="accent1"/>
+          </a:effectRef>
+          <a:fontRef idx="minor">
+            <a:schemeClr val="lt1"/>
+          </a:fontRef>
+        </p:style>
+        <p:txBody>
+          <a:bodyPr wrap="square" rtlCol="0" anchor="ctr">
+            <a:noAutofit/>
+          </a:bodyPr>
+          <a:lstStyle/>
+          <a:p>
+            <a:pPr marL="0" marR="0" lvl="0" indent="0" algn="ctr" defTabSz="914400" rtl="0" eaLnBrk="1" fontAlgn="auto" latinLnBrk="0" hangingPunct="1">
+              <a:lnSpc>
+                <a:spcPct val="100000"/>
+              </a:lnSpc>
+              <a:spcBef>
+                <a:spcPts val="0"/>
+              </a:spcBef>
+              <a:spcAft>
+                <a:spcPts val="0"/>
+              </a:spcAft>
+              <a:buClrTx/>
+              <a:buSzTx/>
+              <a:buFontTx/>
+              <a:buNone/>
+              <a:tabLst/>
+              <a:defRPr/>
+            </a:pPr>
+            <a:endParaRPr kumimoji="0" lang="en-US" sz="1800" b="0" i="0" u="none" strike="noStrike" kern="1200" cap="none" spc="0" normalizeH="0" baseline="0" noProof="0">
+              <a:ln>
+                <a:noFill/>
+              </a:ln>
+              <a:solidFill>
+                <a:prstClr val="white"/>
+              </a:solidFill>
+              <a:effectLst/>
+              <a:uLnTx/>
+              <a:uFillTx/>
+              <a:latin typeface="Calibri" panose="020F0502020204030204"/>
+              <a:ea typeface="+mn-ea"/>
+              <a:cs typeface="+mn-cs"/>
+            </a:endParaRPr>
+          </a:p>
+        </p:txBody>
+      </p:sp>
+      <p:sp>
+        <p:nvSpPr>
+          <p:cNvPr id="2" name="Title 1"/>
+          <p:cNvSpPr>
+            <a:spLocks noGrp="1"/>
+          </p:cNvSpPr>
+          <p:nvPr>
+            <p:ph type="title"/>
+          </p:nvPr>
+        </p:nvSpPr>
+        <p:spPr>
+          <a:xfrm>
+            <a:off x="477981" y="1122363"/>
+            <a:ext cx="4023360" cy="3204134"/>
+          </a:xfrm>
+        </p:spPr>
+        <p:txBody>
+          <a:bodyPr vert="horz" lIns="91440" tIns="45720" rIns="91440" bIns="45720" rtlCol="0" anchor="b">
+            <a:normAutofit/>
+          </a:bodyPr>
+          <a:lstStyle/>
+          <a:p>
+            <a:pPr>
+              <a:defRPr sz="2800"/>
+            </a:pPr>
+            <a:r>
+              <a:rPr lang="en-US" sz="4800"/>
+              <a:t>Figure 1 – Experimental design &amp; datasets</a:t>
+            </a:r>
+          </a:p>
+        </p:txBody>
+      </p:sp>
+      <p:sp>
+        <p:nvSpPr>
+          <p:cNvPr id="34" name="Rectangle 33">
+            <a:extLst>
+              <a:ext uri="{FF2B5EF4-FFF2-40B4-BE49-F238E27FC236}">
+                <a16:creationId xmlns:a16="http://schemas.microsoft.com/office/drawing/2014/main" id="{AF2F604E-43BE-4DC3-B983-E071523364F8}"/>
+              </a:ext>
+              <a:ext uri="{C183D7F6-B498-43B3-948B-1728B52AA6E4}">
+                <adec:decorative xmlns:adec="http://schemas.microsoft.com/office/drawing/2017/decorative" val="1"/>
+              </a:ext>
+            </a:extLst>
+          </p:cNvPr>
+          <p:cNvSpPr>
+            <a:spLocks noGrp="1" noRot="1" noChangeAspect="1" noMove="1" noResize="1" noEditPoints="1" noAdjustHandles="1" noChangeArrowheads="1" noChangeShapeType="1" noTextEdit="1"/>
+          </p:cNvSpPr>
+          <p:nvPr>
+            <p:extLst>
+              <p:ext uri="{386F3935-93C4-4BCD-93E2-E3B085C9AB24}">
+                <p16:designElem xmlns:p16="http://schemas.microsoft.com/office/powerpoint/2015/main" val="1"/>
+              </p:ext>
+            </p:extLst>
+          </p:nvPr>
+        </p:nvSpPr>
+        <p:spPr>
+          <a:xfrm rot="5400000">
+            <a:off x="759921" y="346791"/>
+            <a:ext cx="146304" cy="704088"/>
+          </a:xfrm>
+          <a:prstGeom prst="rect">
+            <a:avLst/>
+          </a:prstGeom>
+          <a:solidFill>
+            <a:schemeClr val="accent1"/>
+          </a:solidFill>
+          <a:ln>
+            <a:noFill/>
+          </a:ln>
+        </p:spPr>
+        <p:style>
+          <a:lnRef idx="2">
+            <a:schemeClr val="accent1">
+              <a:shade val="50000"/>
+            </a:schemeClr>
+          </a:lnRef>
+          <a:fillRef idx="1">
+            <a:schemeClr val="accent1"/>
+          </a:fillRef>
+          <a:effectRef idx="0">
+            <a:schemeClr val="accent1"/>
+          </a:effectRef>
+          <a:fontRef idx="minor">
+            <a:schemeClr val="lt1"/>
+          </a:fontRef>
+        </p:style>
+        <p:txBody>
+          <a:bodyPr rtlCol="0" anchor="ctr"/>
+          <a:lstStyle/>
+          <a:p>
+            <a:pPr marL="0" marR="0" lvl="0" indent="0" algn="ctr" defTabSz="914400" rtl="0" eaLnBrk="1" fontAlgn="auto" latinLnBrk="0" hangingPunct="1">
+              <a:lnSpc>
+                <a:spcPct val="100000"/>
+              </a:lnSpc>
+              <a:spcBef>
+                <a:spcPts val="0"/>
+              </a:spcBef>
+              <a:spcAft>
+                <a:spcPts val="0"/>
+              </a:spcAft>
+              <a:buClrTx/>
+              <a:buSzTx/>
+              <a:buFontTx/>
+              <a:buNone/>
+              <a:tabLst/>
+              <a:defRPr/>
+            </a:pPr>
+            <a:endParaRPr kumimoji="0" lang="en-US" sz="1800" b="0" i="0" u="none" strike="noStrike" kern="1200" cap="none" spc="0" normalizeH="0" baseline="0" noProof="0">
+              <a:ln>
+                <a:noFill/>
+              </a:ln>
+              <a:solidFill>
+                <a:prstClr val="white"/>
+              </a:solidFill>
+              <a:effectLst/>
+              <a:uLnTx/>
+              <a:uFillTx/>
+              <a:latin typeface="Calibri" panose="020F0502020204030204"/>
+              <a:ea typeface="+mn-ea"/>
+              <a:cs typeface="+mn-cs"/>
+            </a:endParaRPr>
+          </a:p>
+        </p:txBody>
+      </p:sp>
+      <p:sp>
+        <p:nvSpPr>
+          <p:cNvPr id="36" name="Rectangle 35">
+            <a:extLst>
+              <a:ext uri="{FF2B5EF4-FFF2-40B4-BE49-F238E27FC236}">
+                <a16:creationId xmlns:a16="http://schemas.microsoft.com/office/drawing/2014/main" id="{08C9B587-E65E-4B52-B37C-ABEBB6E87928}"/>
+              </a:ext>
+              <a:ext uri="{C183D7F6-B498-43B3-948B-1728B52AA6E4}">
+                <adec:decorative xmlns:adec="http://schemas.microsoft.com/office/drawing/2017/decorative" val="1"/>
+              </a:ext>
+            </a:extLst>
+          </p:cNvPr>
+          <p:cNvSpPr>
+            <a:spLocks noGrp="1" noRot="1" noChangeAspect="1" noMove="1" noResize="1" noEditPoints="1" noAdjustHandles="1" noChangeArrowheads="1" noChangeShapeType="1" noTextEdit="1"/>
+          </p:cNvSpPr>
+          <p:nvPr>
+            <p:extLst>
+              <p:ext uri="{386F3935-93C4-4BCD-93E2-E3B085C9AB24}">
+                <p16:designElem xmlns:p16="http://schemas.microsoft.com/office/powerpoint/2015/main" val="1"/>
+              </p:ext>
+            </p:extLst>
+          </p:nvPr>
+        </p:nvSpPr>
+        <p:spPr>
+          <a:xfrm>
+            <a:off x="481029" y="4546920"/>
+            <a:ext cx="4023360" cy="18288"/>
+          </a:xfrm>
+          <a:prstGeom prst="rect">
+            <a:avLst/>
+          </a:prstGeom>
+          <a:solidFill>
+            <a:schemeClr val="tx2">
+              <a:lumMod val="25000"/>
+              <a:lumOff val="75000"/>
+            </a:schemeClr>
+          </a:solidFill>
+          <a:ln w="3175">
+            <a:noFill/>
+          </a:ln>
+          <a:effectLst/>
+        </p:spPr>
+        <p:style>
+          <a:lnRef idx="2">
+            <a:schemeClr val="accent1">
+              <a:shade val="50000"/>
+            </a:schemeClr>
+          </a:lnRef>
+          <a:fillRef idx="1">
+            <a:schemeClr val="accent1"/>
+          </a:fillRef>
+          <a:effectRef idx="0">
+            <a:schemeClr val="accent1"/>
+          </a:effectRef>
+          <a:fontRef idx="minor">
+            <a:schemeClr val="lt1"/>
+          </a:fontRef>
+        </p:style>
+        <p:txBody>
+          <a:bodyPr rtlCol="0" anchor="ctr"/>
+          <a:lstStyle/>
+          <a:p>
+            <a:pPr marL="0" marR="0" lvl="0" indent="0" algn="ctr" defTabSz="914400" rtl="0" eaLnBrk="1" fontAlgn="auto" latinLnBrk="0" hangingPunct="1">
+              <a:lnSpc>
+                <a:spcPct val="100000"/>
+              </a:lnSpc>
+              <a:spcBef>
+                <a:spcPts val="0"/>
+              </a:spcBef>
+              <a:spcAft>
+                <a:spcPts val="0"/>
+              </a:spcAft>
+              <a:buClrTx/>
+              <a:buSzTx/>
+              <a:buFontTx/>
+              <a:buNone/>
+              <a:tabLst/>
+              <a:defRPr/>
+            </a:pPr>
+            <a:endParaRPr kumimoji="0" lang="en-US" sz="1800" b="0" i="0" u="none" strike="noStrike" kern="1200" cap="none" spc="0" normalizeH="0" baseline="0" noProof="0">
+              <a:ln>
+                <a:noFill/>
+              </a:ln>
+              <a:solidFill>
+                <a:prstClr val="white"/>
+              </a:solidFill>
+              <a:effectLst/>
+              <a:uLnTx/>
+              <a:uFillTx/>
+              <a:latin typeface="Calibri" panose="020F0502020204030204"/>
+              <a:ea typeface="+mn-ea"/>
+              <a:cs typeface="+mn-cs"/>
+            </a:endParaRPr>
+          </a:p>
+        </p:txBody>
+      </p:sp>
+      <p:pic>
+        <p:nvPicPr>
+          <p:cNvPr id="6" name="Picture 5" descr="A diagram of a dna sequence&#10;&#10;AI-generated content may be incorrect.">
+            <a:extLst>
+              <a:ext uri="{FF2B5EF4-FFF2-40B4-BE49-F238E27FC236}">
+                <a16:creationId xmlns:a16="http://schemas.microsoft.com/office/drawing/2014/main" id="{12327BDA-DA84-8935-4588-4FC09A1EE455}"/>
+              </a:ext>
+            </a:extLst>
+          </p:cNvPr>
+          <p:cNvPicPr>
+            <a:picLocks noChangeAspect="1"/>
+          </p:cNvPicPr>
+          <p:nvPr/>
+        </p:nvPicPr>
+        <p:blipFill>
+          <a:blip r:embed="rId2"/>
+          <a:srcRect r="2" b="8094"/>
+          <a:stretch>
+            <a:fillRect/>
+          </a:stretch>
+        </p:blipFill>
+        <p:spPr>
+          <a:xfrm>
+            <a:off x="5658340" y="330038"/>
+            <a:ext cx="6241739" cy="5751026"/>
+          </a:xfrm>
+          <a:prstGeom prst="rect">
+            <a:avLst/>
+          </a:prstGeom>
+        </p:spPr>
+      </p:pic>
+    </p:spTree>
+  </p:cSld>
+  <p:clrMapOvr>
+    <a:masterClrMapping/>
+  </p:clrMapOvr>
+</p:sld>
+</file>
+
+<file path=ppt/slides/slide16.xml><?xml version="1.0" encoding="utf-8"?>
+<p:sld xmlns:a="http://schemas.openxmlformats.org/drawingml/2006/main" xmlns:r="http://schemas.openxmlformats.org/officeDocument/2006/relationships" xmlns:p="http://schemas.openxmlformats.org/presentationml/2006/main">
+  <p:cSld>
+    <p:bg>
+      <p:bgPr>
+        <a:solidFill>
+          <a:schemeClr val="bg1"/>
+        </a:solidFill>
+        <a:effectLst/>
+      </p:bgPr>
+    </p:bg>
+    <p:spTree>
+      <p:nvGrpSpPr>
+        <p:cNvPr id="1" name="">
+          <a:extLst>
+            <a:ext uri="{FF2B5EF4-FFF2-40B4-BE49-F238E27FC236}">
+              <a16:creationId xmlns:a16="http://schemas.microsoft.com/office/drawing/2014/main" id="{2629735C-889E-574C-8C11-14A7DC04DC04}"/>
+            </a:ext>
+          </a:extLst>
+        </p:cNvPr>
+        <p:cNvGrpSpPr/>
+        <p:nvPr/>
+      </p:nvGrpSpPr>
+      <p:grpSpPr>
+        <a:xfrm>
+          <a:off x="0" y="0"/>
+          <a:ext cx="0" cy="0"/>
+          <a:chOff x="0" y="0"/>
+          <a:chExt cx="0" cy="0"/>
+        </a:xfrm>
+      </p:grpSpPr>
+      <p:sp>
+        <p:nvSpPr>
+          <p:cNvPr id="22" name="Rectangle 21">
+            <a:extLst>
+              <a:ext uri="{FF2B5EF4-FFF2-40B4-BE49-F238E27FC236}">
+                <a16:creationId xmlns:a16="http://schemas.microsoft.com/office/drawing/2014/main" id="{8D06CE56-3881-4ADA-8CEF-D18B02C242A3}"/>
+              </a:ext>
+              <a:ext uri="{C183D7F6-B498-43B3-948B-1728B52AA6E4}">
+                <adec:decorative xmlns:adec="http://schemas.microsoft.com/office/drawing/2017/decorative" val="1"/>
+              </a:ext>
+            </a:extLst>
+          </p:cNvPr>
+          <p:cNvSpPr>
+            <a:spLocks noGrp="1" noRot="1" noChangeAspect="1" noMove="1" noResize="1" noEditPoints="1" noAdjustHandles="1" noChangeArrowheads="1" noChangeShapeType="1" noTextEdit="1"/>
+          </p:cNvSpPr>
+          <p:nvPr>
+            <p:extLst>
+              <p:ext uri="{386F3935-93C4-4BCD-93E2-E3B085C9AB24}">
+                <p16:designElem xmlns:p16="http://schemas.microsoft.com/office/powerpoint/2015/main" val="1"/>
+              </p:ext>
+            </p:extLst>
+          </p:nvPr>
+        </p:nvSpPr>
+        <p:spPr>
+          <a:xfrm rot="5400000">
+            <a:off x="857544" y="346791"/>
+            <a:ext cx="146304" cy="704088"/>
+          </a:xfrm>
+          <a:prstGeom prst="rect">
+            <a:avLst/>
+          </a:prstGeom>
+          <a:solidFill>
+            <a:schemeClr val="accent1"/>
+          </a:solidFill>
+          <a:ln>
+            <a:noFill/>
+          </a:ln>
+        </p:spPr>
+        <p:style>
+          <a:lnRef idx="2">
+            <a:schemeClr val="accent1">
+              <a:shade val="50000"/>
+            </a:schemeClr>
+          </a:lnRef>
+          <a:fillRef idx="1">
+            <a:schemeClr val="accent1"/>
+          </a:fillRef>
+          <a:effectRef idx="0">
+            <a:schemeClr val="accent1"/>
+          </a:effectRef>
+          <a:fontRef idx="minor">
+            <a:schemeClr val="lt1"/>
+          </a:fontRef>
+        </p:style>
+        <p:txBody>
+          <a:bodyPr rtlCol="0" anchor="ctr"/>
+          <a:lstStyle/>
+          <a:p>
+            <a:pPr marL="0" marR="0" lvl="0" indent="0" algn="ctr" defTabSz="914400" rtl="0" eaLnBrk="1" fontAlgn="auto" latinLnBrk="0" hangingPunct="1">
+              <a:lnSpc>
+                <a:spcPct val="100000"/>
+              </a:lnSpc>
+              <a:spcBef>
+                <a:spcPts val="0"/>
+              </a:spcBef>
+              <a:spcAft>
+                <a:spcPts val="0"/>
+              </a:spcAft>
+              <a:buClrTx/>
+              <a:buSzTx/>
+              <a:buFontTx/>
+              <a:buNone/>
+              <a:tabLst/>
+              <a:defRPr/>
+            </a:pPr>
+            <a:endParaRPr kumimoji="0" lang="en-US" sz="1800" b="0" i="0" u="none" strike="noStrike" kern="1200" cap="none" spc="0" normalizeH="0" baseline="0" noProof="0">
+              <a:ln>
+                <a:noFill/>
+              </a:ln>
+              <a:solidFill>
+                <a:prstClr val="white"/>
+              </a:solidFill>
+              <a:effectLst/>
+              <a:uLnTx/>
+              <a:uFillTx/>
+              <a:latin typeface="Calibri" panose="020F0502020204030204"/>
+              <a:ea typeface="+mn-ea"/>
+              <a:cs typeface="+mn-cs"/>
+            </a:endParaRPr>
+          </a:p>
+        </p:txBody>
+      </p:sp>
+      <p:sp>
+        <p:nvSpPr>
+          <p:cNvPr id="24" name="Rectangle 23">
+            <a:extLst>
+              <a:ext uri="{FF2B5EF4-FFF2-40B4-BE49-F238E27FC236}">
+                <a16:creationId xmlns:a16="http://schemas.microsoft.com/office/drawing/2014/main" id="{79F3C543-62EC-4433-9C93-A2CD8764E9B4}"/>
+              </a:ext>
+              <a:ext uri="{C183D7F6-B498-43B3-948B-1728B52AA6E4}">
+                <adec:decorative xmlns:adec="http://schemas.microsoft.com/office/drawing/2017/decorative" val="1"/>
+              </a:ext>
+            </a:extLst>
+          </p:cNvPr>
+          <p:cNvSpPr>
+            <a:spLocks noGrp="1" noRot="1" noChangeAspect="1" noMove="1" noResize="1" noEditPoints="1" noAdjustHandles="1" noChangeArrowheads="1" noChangeShapeType="1" noTextEdit="1"/>
+          </p:cNvSpPr>
+          <p:nvPr>
+            <p:extLst>
+              <p:ext uri="{386F3935-93C4-4BCD-93E2-E3B085C9AB24}">
+                <p16:designElem xmlns:p16="http://schemas.microsoft.com/office/powerpoint/2015/main" val="1"/>
+              </p:ext>
+            </p:extLst>
+          </p:nvPr>
+        </p:nvSpPr>
+        <p:spPr>
+          <a:xfrm flipV="1">
+            <a:off x="578652" y="4501201"/>
+            <a:ext cx="11034696" cy="18288"/>
+          </a:xfrm>
+          <a:prstGeom prst="rect">
+            <a:avLst/>
+          </a:prstGeom>
+          <a:solidFill>
+            <a:schemeClr val="tx2">
+              <a:lumMod val="25000"/>
+              <a:lumOff val="75000"/>
+            </a:schemeClr>
+          </a:solidFill>
+          <a:ln w="3175">
+            <a:noFill/>
+          </a:ln>
+          <a:effectLst/>
+        </p:spPr>
+        <p:style>
+          <a:lnRef idx="2">
+            <a:schemeClr val="accent1">
+              <a:shade val="50000"/>
+            </a:schemeClr>
+          </a:lnRef>
+          <a:fillRef idx="1">
+            <a:schemeClr val="accent1"/>
+          </a:fillRef>
+          <a:effectRef idx="0">
+            <a:schemeClr val="accent1"/>
+          </a:effectRef>
+          <a:fontRef idx="minor">
+            <a:schemeClr val="lt1"/>
+          </a:fontRef>
+        </p:style>
+        <p:txBody>
+          <a:bodyPr rtlCol="0" anchor="ctr"/>
+          <a:lstStyle/>
+          <a:p>
+            <a:pPr marL="0" marR="0" lvl="0" indent="0" algn="ctr" defTabSz="914400" rtl="0" eaLnBrk="1" fontAlgn="auto" latinLnBrk="0" hangingPunct="1">
+              <a:lnSpc>
+                <a:spcPct val="100000"/>
+              </a:lnSpc>
+              <a:spcBef>
+                <a:spcPts val="0"/>
+              </a:spcBef>
+              <a:spcAft>
+                <a:spcPts val="0"/>
+              </a:spcAft>
+              <a:buClrTx/>
+              <a:buSzTx/>
+              <a:buFontTx/>
+              <a:buNone/>
+              <a:tabLst/>
+              <a:defRPr/>
+            </a:pPr>
+            <a:endParaRPr kumimoji="0" lang="en-US" sz="1800" b="0" i="0" u="none" strike="noStrike" kern="1200" cap="none" spc="0" normalizeH="0" baseline="0" noProof="0">
+              <a:ln>
+                <a:noFill/>
+              </a:ln>
+              <a:solidFill>
+                <a:prstClr val="white"/>
+              </a:solidFill>
+              <a:effectLst/>
+              <a:uLnTx/>
+              <a:uFillTx/>
+              <a:latin typeface="Calibri" panose="020F0502020204030204"/>
+              <a:ea typeface="+mn-ea"/>
+              <a:cs typeface="+mn-cs"/>
+            </a:endParaRPr>
+          </a:p>
+        </p:txBody>
+      </p:sp>
+      <p:sp useBgFill="1">
+        <p:nvSpPr>
+          <p:cNvPr id="26" name="Rectangle 25">
+            <a:extLst>
+              <a:ext uri="{FF2B5EF4-FFF2-40B4-BE49-F238E27FC236}">
+                <a16:creationId xmlns:a16="http://schemas.microsoft.com/office/drawing/2014/main" id="{68AF5748-FED8-45BA-8631-26D1D10F3246}"/>
+              </a:ext>
+              <a:ext uri="{C183D7F6-B498-43B3-948B-1728B52AA6E4}">
+                <adec:decorative xmlns:adec="http://schemas.microsoft.com/office/drawing/2017/decorative" val="1"/>
+              </a:ext>
+            </a:extLst>
+          </p:cNvPr>
+          <p:cNvSpPr>
+            <a:spLocks noGrp="1" noRot="1" noChangeAspect="1" noMove="1" noResize="1" noEditPoints="1" noAdjustHandles="1" noChangeArrowheads="1" noChangeShapeType="1" noTextEdit="1"/>
+          </p:cNvSpPr>
+          <p:nvPr>
+            <p:extLst>
+              <p:ext uri="{386F3935-93C4-4BCD-93E2-E3B085C9AB24}">
+                <p16:designElem xmlns:p16="http://schemas.microsoft.com/office/powerpoint/2015/main" val="1"/>
+              </p:ext>
+            </p:extLst>
+          </p:nvPr>
+        </p:nvSpPr>
+        <p:spPr>
+          <a:xfrm>
+            <a:off x="0" y="0"/>
+            <a:ext cx="12192000" cy="6858000"/>
+          </a:xfrm>
+          <a:prstGeom prst="rect">
+            <a:avLst/>
+          </a:prstGeom>
+          <a:ln>
+            <a:noFill/>
+          </a:ln>
+        </p:spPr>
+        <p:style>
+          <a:lnRef idx="2">
+            <a:schemeClr val="accent1">
+              <a:shade val="50000"/>
+            </a:schemeClr>
+          </a:lnRef>
+          <a:fillRef idx="1">
+            <a:schemeClr val="accent1"/>
+          </a:fillRef>
+          <a:effectRef idx="0">
+            <a:schemeClr val="accent1"/>
+          </a:effectRef>
+          <a:fontRef idx="minor">
+            <a:schemeClr val="lt1"/>
+          </a:fontRef>
+        </p:style>
+        <p:txBody>
+          <a:bodyPr rtlCol="0" anchor="ctr"/>
+          <a:lstStyle/>
+          <a:p>
+            <a:pPr algn="ctr"/>
+            <a:endParaRPr lang="en-US"/>
+          </a:p>
+        </p:txBody>
+      </p:sp>
+      <p:sp>
+        <p:nvSpPr>
+          <p:cNvPr id="2" name="Title 1">
+            <a:extLst>
+              <a:ext uri="{FF2B5EF4-FFF2-40B4-BE49-F238E27FC236}">
+                <a16:creationId xmlns:a16="http://schemas.microsoft.com/office/drawing/2014/main" id="{985B5DED-89A2-0B84-7C32-A863A132650B}"/>
+              </a:ext>
+            </a:extLst>
+          </p:cNvPr>
+          <p:cNvSpPr>
+            <a:spLocks noGrp="1"/>
+          </p:cNvSpPr>
+          <p:nvPr>
+            <p:ph type="title"/>
+          </p:nvPr>
+        </p:nvSpPr>
+        <p:spPr>
+          <a:xfrm>
+            <a:off x="477981" y="1122363"/>
+            <a:ext cx="4023360" cy="3204134"/>
+          </a:xfrm>
+        </p:spPr>
+        <p:txBody>
+          <a:bodyPr vert="horz" lIns="91440" tIns="45720" rIns="91440" bIns="45720" rtlCol="0" anchor="b">
+            <a:normAutofit/>
+          </a:bodyPr>
+          <a:lstStyle/>
+          <a:p>
+            <a:pPr>
+              <a:defRPr sz="2800"/>
+            </a:pPr>
+            <a:r>
+              <a:rPr lang="en-US" sz="4800" dirty="0"/>
+              <a:t>Figure 1 – Metabolic pulse</a:t>
+            </a:r>
+          </a:p>
+        </p:txBody>
+      </p:sp>
+      <p:sp>
+        <p:nvSpPr>
+          <p:cNvPr id="28" name="Rectangle 27">
+            <a:extLst>
+              <a:ext uri="{FF2B5EF4-FFF2-40B4-BE49-F238E27FC236}">
+                <a16:creationId xmlns:a16="http://schemas.microsoft.com/office/drawing/2014/main" id="{AF2F604E-43BE-4DC3-B983-E071523364F8}"/>
+              </a:ext>
+              <a:ext uri="{C183D7F6-B498-43B3-948B-1728B52AA6E4}">
+                <adec:decorative xmlns:adec="http://schemas.microsoft.com/office/drawing/2017/decorative" val="1"/>
+              </a:ext>
+            </a:extLst>
+          </p:cNvPr>
+          <p:cNvSpPr>
+            <a:spLocks noGrp="1" noRot="1" noChangeAspect="1" noMove="1" noResize="1" noEditPoints="1" noAdjustHandles="1" noChangeArrowheads="1" noChangeShapeType="1" noTextEdit="1"/>
+          </p:cNvSpPr>
+          <p:nvPr>
+            <p:extLst>
+              <p:ext uri="{386F3935-93C4-4BCD-93E2-E3B085C9AB24}">
+                <p16:designElem xmlns:p16="http://schemas.microsoft.com/office/powerpoint/2015/main" val="1"/>
+              </p:ext>
+            </p:extLst>
+          </p:nvPr>
+        </p:nvSpPr>
+        <p:spPr>
+          <a:xfrm rot="5400000">
+            <a:off x="759921" y="346791"/>
+            <a:ext cx="146304" cy="704088"/>
+          </a:xfrm>
+          <a:prstGeom prst="rect">
+            <a:avLst/>
+          </a:prstGeom>
+          <a:solidFill>
+            <a:schemeClr val="accent1"/>
+          </a:solidFill>
+          <a:ln>
+            <a:noFill/>
+          </a:ln>
+        </p:spPr>
+        <p:style>
+          <a:lnRef idx="2">
+            <a:schemeClr val="accent1">
+              <a:shade val="50000"/>
+            </a:schemeClr>
+          </a:lnRef>
+          <a:fillRef idx="1">
+            <a:schemeClr val="accent1"/>
+          </a:fillRef>
+          <a:effectRef idx="0">
+            <a:schemeClr val="accent1"/>
+          </a:effectRef>
+          <a:fontRef idx="minor">
+            <a:schemeClr val="lt1"/>
+          </a:fontRef>
+        </p:style>
+        <p:txBody>
+          <a:bodyPr rtlCol="0" anchor="ctr"/>
+          <a:lstStyle/>
+          <a:p>
+            <a:pPr marL="0" marR="0" lvl="0" indent="0" algn="ctr" defTabSz="914400" rtl="0" eaLnBrk="1" fontAlgn="auto" latinLnBrk="0" hangingPunct="1">
+              <a:lnSpc>
+                <a:spcPct val="100000"/>
+              </a:lnSpc>
+              <a:spcBef>
+                <a:spcPts val="0"/>
+              </a:spcBef>
+              <a:spcAft>
+                <a:spcPts val="0"/>
+              </a:spcAft>
+              <a:buClrTx/>
+              <a:buSzTx/>
+              <a:buFontTx/>
+              <a:buNone/>
+              <a:tabLst/>
+              <a:defRPr/>
+            </a:pPr>
+            <a:endParaRPr kumimoji="0" lang="en-US" sz="1800" b="0" i="0" u="none" strike="noStrike" kern="1200" cap="none" spc="0" normalizeH="0" baseline="0" noProof="0">
+              <a:ln>
+                <a:noFill/>
+              </a:ln>
+              <a:solidFill>
+                <a:prstClr val="white"/>
+              </a:solidFill>
+              <a:effectLst/>
+              <a:uLnTx/>
+              <a:uFillTx/>
+              <a:latin typeface="Calibri" panose="020F0502020204030204"/>
+              <a:ea typeface="+mn-ea"/>
+              <a:cs typeface="+mn-cs"/>
+            </a:endParaRPr>
+          </a:p>
+        </p:txBody>
+      </p:sp>
+      <p:sp>
+        <p:nvSpPr>
+          <p:cNvPr id="30" name="Rectangle 29">
+            <a:extLst>
+              <a:ext uri="{FF2B5EF4-FFF2-40B4-BE49-F238E27FC236}">
+                <a16:creationId xmlns:a16="http://schemas.microsoft.com/office/drawing/2014/main" id="{08C9B587-E65E-4B52-B37C-ABEBB6E87928}"/>
+              </a:ext>
+              <a:ext uri="{C183D7F6-B498-43B3-948B-1728B52AA6E4}">
+                <adec:decorative xmlns:adec="http://schemas.microsoft.com/office/drawing/2017/decorative" val="1"/>
+              </a:ext>
+            </a:extLst>
+          </p:cNvPr>
+          <p:cNvSpPr>
+            <a:spLocks noGrp="1" noRot="1" noChangeAspect="1" noMove="1" noResize="1" noEditPoints="1" noAdjustHandles="1" noChangeArrowheads="1" noChangeShapeType="1" noTextEdit="1"/>
+          </p:cNvSpPr>
+          <p:nvPr>
+            <p:extLst>
+              <p:ext uri="{386F3935-93C4-4BCD-93E2-E3B085C9AB24}">
+                <p16:designElem xmlns:p16="http://schemas.microsoft.com/office/powerpoint/2015/main" val="1"/>
+              </p:ext>
+            </p:extLst>
+          </p:nvPr>
+        </p:nvSpPr>
+        <p:spPr>
+          <a:xfrm>
+            <a:off x="481029" y="4546920"/>
+            <a:ext cx="4023360" cy="18288"/>
+          </a:xfrm>
+          <a:prstGeom prst="rect">
+            <a:avLst/>
+          </a:prstGeom>
+          <a:solidFill>
+            <a:schemeClr val="tx2">
+              <a:lumMod val="25000"/>
+              <a:lumOff val="75000"/>
+            </a:schemeClr>
+          </a:solidFill>
+          <a:ln w="3175">
+            <a:noFill/>
+          </a:ln>
+          <a:effectLst/>
+        </p:spPr>
+        <p:style>
+          <a:lnRef idx="2">
+            <a:schemeClr val="accent1">
+              <a:shade val="50000"/>
+            </a:schemeClr>
+          </a:lnRef>
+          <a:fillRef idx="1">
+            <a:schemeClr val="accent1"/>
+          </a:fillRef>
+          <a:effectRef idx="0">
+            <a:schemeClr val="accent1"/>
+          </a:effectRef>
+          <a:fontRef idx="minor">
+            <a:schemeClr val="lt1"/>
+          </a:fontRef>
+        </p:style>
+        <p:txBody>
+          <a:bodyPr rtlCol="0" anchor="ctr"/>
+          <a:lstStyle/>
+          <a:p>
+            <a:pPr marL="0" marR="0" lvl="0" indent="0" algn="ctr" defTabSz="914400" rtl="0" eaLnBrk="1" fontAlgn="auto" latinLnBrk="0" hangingPunct="1">
+              <a:lnSpc>
+                <a:spcPct val="100000"/>
+              </a:lnSpc>
+              <a:spcBef>
+                <a:spcPts val="0"/>
+              </a:spcBef>
+              <a:spcAft>
+                <a:spcPts val="0"/>
+              </a:spcAft>
+              <a:buClrTx/>
+              <a:buSzTx/>
+              <a:buFontTx/>
+              <a:buNone/>
+              <a:tabLst/>
+              <a:defRPr/>
+            </a:pPr>
+            <a:endParaRPr kumimoji="0" lang="en-US" sz="1800" b="0" i="0" u="none" strike="noStrike" kern="1200" cap="none" spc="0" normalizeH="0" baseline="0" noProof="0">
+              <a:ln>
+                <a:noFill/>
+              </a:ln>
+              <a:solidFill>
+                <a:prstClr val="white"/>
+              </a:solidFill>
+              <a:effectLst/>
+              <a:uLnTx/>
+              <a:uFillTx/>
+              <a:latin typeface="Calibri" panose="020F0502020204030204"/>
+              <a:ea typeface="+mn-ea"/>
+              <a:cs typeface="+mn-cs"/>
+            </a:endParaRPr>
+          </a:p>
+        </p:txBody>
+      </p:sp>
+      <p:pic>
+        <p:nvPicPr>
+          <p:cNvPr id="4" name="Picture 3" descr="A diagram of a graph&#10;&#10;AI-generated content may be incorrect.">
+            <a:extLst>
+              <a:ext uri="{FF2B5EF4-FFF2-40B4-BE49-F238E27FC236}">
+                <a16:creationId xmlns:a16="http://schemas.microsoft.com/office/drawing/2014/main" id="{E8027157-6B26-863D-F2BD-03690C9CA433}"/>
+              </a:ext>
+            </a:extLst>
+          </p:cNvPr>
+          <p:cNvPicPr>
+            <a:picLocks noChangeAspect="1"/>
+          </p:cNvPicPr>
+          <p:nvPr/>
+        </p:nvPicPr>
+        <p:blipFill>
+          <a:blip r:embed="rId2"/>
+          <a:srcRect l="6570" r="4976" b="1"/>
+          <a:stretch>
+            <a:fillRect/>
+          </a:stretch>
+        </p:blipFill>
+        <p:spPr>
+          <a:xfrm>
+            <a:off x="5327327" y="625683"/>
+            <a:ext cx="5920924" cy="5455380"/>
+          </a:xfrm>
+          <a:prstGeom prst="rect">
+            <a:avLst/>
+          </a:prstGeom>
+        </p:spPr>
+      </p:pic>
+    </p:spTree>
+    <p:extLst>
+      <p:ext uri="{BB962C8B-B14F-4D97-AF65-F5344CB8AC3E}">
+        <p14:creationId xmlns:p14="http://schemas.microsoft.com/office/powerpoint/2010/main" val="2279895452"/>
+      </p:ext>
+    </p:extLst>
+  </p:cSld>
+  <p:clrMapOvr>
+    <a:masterClrMapping/>
+  </p:clrMapOvr>
+  <p:timing>
+    <p:tnLst>
+      <p:par>
+        <p:cTn id="1" dur="indefinite" restart="never" nodeType="tmRoot">
+          <p:childTnLst>
+            <p:seq concurrent="1" nextAc="seek">
+              <p:cTn id="2" dur="indefinite" nodeType="mainSeq">
+                <p:childTnLst>
+                  <p:par>
+                    <p:cTn id="3" fill="hold">
+                      <p:stCondLst>
+                        <p:cond delay="indefinite"/>
+                        <p:cond evt="onBegin" delay="0">
+                          <p:tn val="2"/>
+                        </p:cond>
+                      </p:stCondLst>
+                      <p:childTnLst>
+                        <p:par>
+                          <p:cTn id="4" fill="hold">
+                            <p:stCondLst>
+                              <p:cond delay="0"/>
+                            </p:stCondLst>
+                            <p:childTnLst>
+                              <p:par>
+                                <p:cTn id="5" presetID="10" presetClass="entr" presetSubtype="0" fill="hold" grpId="0" nodeType="withEffect">
+                                  <p:stCondLst>
+                                    <p:cond delay="1000"/>
+                                  </p:stCondLst>
+                                  <p:iterate>
+                                    <p:tmPct val="10000"/>
+                                  </p:iterate>
+                                  <p:childTnLst>
+                                    <p:set>
+                                      <p:cBhvr>
+                                        <p:cTn id="6" dur="1" fill="hold">
+                                          <p:stCondLst>
+                                            <p:cond delay="0"/>
+                                          </p:stCondLst>
+                                        </p:cTn>
+                                        <p:tgtEl>
+                                          <p:spTgt spid="2"/>
+                                        </p:tgtEl>
+                                        <p:attrNameLst>
+                                          <p:attrName>style.visibility</p:attrName>
+                                        </p:attrNameLst>
+                                      </p:cBhvr>
+                                      <p:to>
+                                        <p:strVal val="visible"/>
+                                      </p:to>
+                                    </p:set>
+                                    <p:animEffect transition="in" filter="fade">
+                                      <p:cBhvr>
+                                        <p:cTn id="7" dur="700"/>
+                                        <p:tgtEl>
+                                          <p:spTgt spid="2"/>
+                                        </p:tgtEl>
+                                      </p:cBhvr>
+                                    </p:animEffect>
+                                  </p:childTnLst>
+                                </p:cTn>
+                              </p:par>
+                            </p:childTnLst>
+                          </p:cTn>
+                        </p:par>
+                      </p:childTnLst>
+                    </p:cTn>
+                  </p:par>
+                </p:childTnLst>
+              </p:cTn>
+              <p:prevCondLst>
+                <p:cond evt="onPrev" delay="0">
+                  <p:tgtEl>
+                    <p:sldTgt/>
+                  </p:tgtEl>
+                </p:cond>
+              </p:prevCondLst>
+              <p:nextCondLst>
+                <p:cond evt="onNext" delay="0">
+                  <p:tgtEl>
+                    <p:sldTgt/>
+                  </p:tgtEl>
+                </p:cond>
+              </p:nextCondLst>
+            </p:seq>
+          </p:childTnLst>
+        </p:cTn>
+      </p:par>
+    </p:tnLst>
+    <p:bldLst>
+      <p:bldP spid="2" grpId="0"/>
+    </p:bldLst>
+  </p:timing>
+</p:sld>
+</file>
+
+<file path=ppt/slides/slide17.xml><?xml version="1.0" encoding="utf-8"?>
+<p:sld xmlns:a="http://schemas.openxmlformats.org/drawingml/2006/main" xmlns:r="http://schemas.openxmlformats.org/officeDocument/2006/relationships" xmlns:p="http://schemas.openxmlformats.org/presentationml/2006/main">
+  <p:cSld>
+    <p:bg>
+      <p:bgPr>
+        <a:solidFill>
+          <a:schemeClr val="bg1"/>
+        </a:solidFill>
+        <a:effectLst/>
+      </p:bgPr>
+    </p:bg>
+    <p:spTree>
+      <p:nvGrpSpPr>
+        <p:cNvPr id="1" name="">
+          <a:extLst>
+            <a:ext uri="{FF2B5EF4-FFF2-40B4-BE49-F238E27FC236}">
+              <a16:creationId xmlns:a16="http://schemas.microsoft.com/office/drawing/2014/main" id="{601258FA-C59F-697F-FF44-570E59CCC83D}"/>
+            </a:ext>
+          </a:extLst>
+        </p:cNvPr>
+        <p:cNvGrpSpPr/>
+        <p:nvPr/>
+      </p:nvGrpSpPr>
+      <p:grpSpPr>
+        <a:xfrm>
+          <a:off x="0" y="0"/>
+          <a:ext cx="0" cy="0"/>
+          <a:chOff x="0" y="0"/>
+          <a:chExt cx="0" cy="0"/>
+        </a:xfrm>
+      </p:grpSpPr>
+      <p:sp>
+        <p:nvSpPr>
+          <p:cNvPr id="10" name="Rectangle 9">
+            <a:extLst>
+              <a:ext uri="{FF2B5EF4-FFF2-40B4-BE49-F238E27FC236}">
+                <a16:creationId xmlns:a16="http://schemas.microsoft.com/office/drawing/2014/main" id="{8D06CE56-3881-4ADA-8CEF-D18B02C242A3}"/>
+              </a:ext>
+              <a:ext uri="{C183D7F6-B498-43B3-948B-1728B52AA6E4}">
+                <adec:decorative xmlns:adec="http://schemas.microsoft.com/office/drawing/2017/decorative" val="1"/>
+              </a:ext>
+            </a:extLst>
+          </p:cNvPr>
+          <p:cNvSpPr>
+            <a:spLocks noGrp="1" noRot="1" noChangeAspect="1" noMove="1" noResize="1" noEditPoints="1" noAdjustHandles="1" noChangeArrowheads="1" noChangeShapeType="1" noTextEdit="1"/>
+          </p:cNvSpPr>
+          <p:nvPr>
+            <p:extLst>
+              <p:ext uri="{386F3935-93C4-4BCD-93E2-E3B085C9AB24}">
+                <p16:designElem xmlns:p16="http://schemas.microsoft.com/office/powerpoint/2015/main" val="1"/>
+              </p:ext>
+            </p:extLst>
+          </p:nvPr>
+        </p:nvSpPr>
+        <p:spPr>
+          <a:xfrm rot="5400000">
+            <a:off x="857544" y="346791"/>
+            <a:ext cx="146304" cy="704088"/>
+          </a:xfrm>
+          <a:prstGeom prst="rect">
+            <a:avLst/>
+          </a:prstGeom>
+          <a:solidFill>
+            <a:schemeClr val="accent1"/>
+          </a:solidFill>
+          <a:ln>
+            <a:noFill/>
+          </a:ln>
+        </p:spPr>
+        <p:style>
+          <a:lnRef idx="2">
+            <a:schemeClr val="accent1">
+              <a:shade val="50000"/>
+            </a:schemeClr>
+          </a:lnRef>
+          <a:fillRef idx="1">
+            <a:schemeClr val="accent1"/>
+          </a:fillRef>
+          <a:effectRef idx="0">
+            <a:schemeClr val="accent1"/>
+          </a:effectRef>
+          <a:fontRef idx="minor">
+            <a:schemeClr val="lt1"/>
+          </a:fontRef>
+        </p:style>
+        <p:txBody>
+          <a:bodyPr rtlCol="0" anchor="ctr"/>
+          <a:lstStyle/>
+          <a:p>
+            <a:pPr marL="0" marR="0" lvl="0" indent="0" algn="ctr" defTabSz="914400" rtl="0" eaLnBrk="1" fontAlgn="auto" latinLnBrk="0" hangingPunct="1">
+              <a:lnSpc>
+                <a:spcPct val="100000"/>
+              </a:lnSpc>
+              <a:spcBef>
+                <a:spcPts val="0"/>
+              </a:spcBef>
+              <a:spcAft>
+                <a:spcPts val="0"/>
+              </a:spcAft>
+              <a:buClrTx/>
+              <a:buSzTx/>
+              <a:buFontTx/>
+              <a:buNone/>
+              <a:tabLst/>
+              <a:defRPr/>
+            </a:pPr>
+            <a:endParaRPr kumimoji="0" lang="en-US" sz="1800" b="0" i="0" u="none" strike="noStrike" kern="1200" cap="none" spc="0" normalizeH="0" baseline="0" noProof="0">
+              <a:ln>
+                <a:noFill/>
+              </a:ln>
+              <a:solidFill>
+                <a:prstClr val="white"/>
+              </a:solidFill>
+              <a:effectLst/>
+              <a:uLnTx/>
+              <a:uFillTx/>
+              <a:latin typeface="Calibri" panose="020F0502020204030204"/>
+              <a:ea typeface="+mn-ea"/>
+              <a:cs typeface="+mn-cs"/>
+            </a:endParaRPr>
+          </a:p>
+        </p:txBody>
+      </p:sp>
+      <p:sp>
+        <p:nvSpPr>
+          <p:cNvPr id="12" name="Rectangle 11">
+            <a:extLst>
+              <a:ext uri="{FF2B5EF4-FFF2-40B4-BE49-F238E27FC236}">
+                <a16:creationId xmlns:a16="http://schemas.microsoft.com/office/drawing/2014/main" id="{79F3C543-62EC-4433-9C93-A2CD8764E9B4}"/>
+              </a:ext>
+              <a:ext uri="{C183D7F6-B498-43B3-948B-1728B52AA6E4}">
+                <adec:decorative xmlns:adec="http://schemas.microsoft.com/office/drawing/2017/decorative" val="1"/>
+              </a:ext>
+            </a:extLst>
+          </p:cNvPr>
+          <p:cNvSpPr>
+            <a:spLocks noGrp="1" noRot="1" noChangeAspect="1" noMove="1" noResize="1" noEditPoints="1" noAdjustHandles="1" noChangeArrowheads="1" noChangeShapeType="1" noTextEdit="1"/>
+          </p:cNvSpPr>
+          <p:nvPr>
+            <p:extLst>
+              <p:ext uri="{386F3935-93C4-4BCD-93E2-E3B085C9AB24}">
+                <p16:designElem xmlns:p16="http://schemas.microsoft.com/office/powerpoint/2015/main" val="1"/>
+              </p:ext>
+            </p:extLst>
+          </p:nvPr>
+        </p:nvSpPr>
+        <p:spPr>
+          <a:xfrm flipV="1">
+            <a:off x="578652" y="4501201"/>
+            <a:ext cx="11034696" cy="18288"/>
+          </a:xfrm>
+          <a:prstGeom prst="rect">
+            <a:avLst/>
+          </a:prstGeom>
+          <a:solidFill>
+            <a:schemeClr val="tx2">
+              <a:lumMod val="25000"/>
+              <a:lumOff val="75000"/>
+            </a:schemeClr>
+          </a:solidFill>
+          <a:ln w="3175">
+            <a:noFill/>
+          </a:ln>
+          <a:effectLst/>
+        </p:spPr>
+        <p:style>
+          <a:lnRef idx="2">
+            <a:schemeClr val="accent1">
+              <a:shade val="50000"/>
+            </a:schemeClr>
+          </a:lnRef>
+          <a:fillRef idx="1">
+            <a:schemeClr val="accent1"/>
+          </a:fillRef>
+          <a:effectRef idx="0">
+            <a:schemeClr val="accent1"/>
+          </a:effectRef>
+          <a:fontRef idx="minor">
+            <a:schemeClr val="lt1"/>
+          </a:fontRef>
+        </p:style>
+        <p:txBody>
+          <a:bodyPr rtlCol="0" anchor="ctr"/>
+          <a:lstStyle/>
+          <a:p>
+            <a:pPr marL="0" marR="0" lvl="0" indent="0" algn="ctr" defTabSz="914400" rtl="0" eaLnBrk="1" fontAlgn="auto" latinLnBrk="0" hangingPunct="1">
+              <a:lnSpc>
+                <a:spcPct val="100000"/>
+              </a:lnSpc>
+              <a:spcBef>
+                <a:spcPts val="0"/>
+              </a:spcBef>
+              <a:spcAft>
+                <a:spcPts val="0"/>
+              </a:spcAft>
+              <a:buClrTx/>
+              <a:buSzTx/>
+              <a:buFontTx/>
+              <a:buNone/>
+              <a:tabLst/>
+              <a:defRPr/>
+            </a:pPr>
+            <a:endParaRPr kumimoji="0" lang="en-US" sz="1800" b="0" i="0" u="none" strike="noStrike" kern="1200" cap="none" spc="0" normalizeH="0" baseline="0" noProof="0">
+              <a:ln>
+                <a:noFill/>
+              </a:ln>
+              <a:solidFill>
+                <a:prstClr val="white"/>
+              </a:solidFill>
+              <a:effectLst/>
+              <a:uLnTx/>
+              <a:uFillTx/>
+              <a:latin typeface="Calibri" panose="020F0502020204030204"/>
+              <a:ea typeface="+mn-ea"/>
+              <a:cs typeface="+mn-cs"/>
+            </a:endParaRPr>
+          </a:p>
+        </p:txBody>
+      </p:sp>
+      <p:sp useBgFill="1">
+        <p:nvSpPr>
+          <p:cNvPr id="14" name="Rectangle 13">
+            <a:extLst>
+              <a:ext uri="{FF2B5EF4-FFF2-40B4-BE49-F238E27FC236}">
+                <a16:creationId xmlns:a16="http://schemas.microsoft.com/office/drawing/2014/main" id="{5DCB5928-DC7D-4612-9922-441966E15627}"/>
+              </a:ext>
+              <a:ext uri="{C183D7F6-B498-43B3-948B-1728B52AA6E4}">
+                <adec:decorative xmlns:adec="http://schemas.microsoft.com/office/drawing/2017/decorative" val="1"/>
+              </a:ext>
+            </a:extLst>
+          </p:cNvPr>
+          <p:cNvSpPr>
+            <a:spLocks noGrp="1" noRot="1" noChangeAspect="1" noMove="1" noResize="1" noEditPoints="1" noAdjustHandles="1" noChangeArrowheads="1" noChangeShapeType="1" noTextEdit="1"/>
+          </p:cNvSpPr>
+          <p:nvPr>
+            <p:extLst>
+              <p:ext uri="{386F3935-93C4-4BCD-93E2-E3B085C9AB24}">
+                <p16:designElem xmlns:p16="http://schemas.microsoft.com/office/powerpoint/2015/main" val="1"/>
+              </p:ext>
+            </p:extLst>
+          </p:nvPr>
+        </p:nvSpPr>
+        <p:spPr>
+          <a:xfrm>
+            <a:off x="0" y="0"/>
+            <a:ext cx="12192000" cy="6858000"/>
+          </a:xfrm>
+          <a:prstGeom prst="rect">
+            <a:avLst/>
+          </a:prstGeom>
+          <a:ln>
+            <a:noFill/>
+          </a:ln>
+        </p:spPr>
+        <p:style>
+          <a:lnRef idx="2">
+            <a:schemeClr val="accent1">
+              <a:shade val="50000"/>
+            </a:schemeClr>
+          </a:lnRef>
+          <a:fillRef idx="1">
+            <a:schemeClr val="accent1"/>
+          </a:fillRef>
+          <a:effectRef idx="0">
+            <a:schemeClr val="accent1"/>
+          </a:effectRef>
+          <a:fontRef idx="minor">
+            <a:schemeClr val="lt1"/>
+          </a:fontRef>
+        </p:style>
+        <p:txBody>
+          <a:bodyPr rtlCol="0" anchor="ctr"/>
+          <a:lstStyle/>
+          <a:p>
+            <a:pPr algn="ctr"/>
+            <a:endParaRPr lang="en-US"/>
+          </a:p>
+        </p:txBody>
+      </p:sp>
+      <p:sp useBgFill="1">
+        <p:nvSpPr>
+          <p:cNvPr id="16" name="Freeform: Shape 15">
+            <a:extLst>
+              <a:ext uri="{FF2B5EF4-FFF2-40B4-BE49-F238E27FC236}">
+                <a16:creationId xmlns:a16="http://schemas.microsoft.com/office/drawing/2014/main" id="{682C1161-1736-45EC-99B7-33F3CAE9D517}"/>
+              </a:ext>
+              <a:ext uri="{C183D7F6-B498-43B3-948B-1728B52AA6E4}">
+                <adec:decorative xmlns:adec="http://schemas.microsoft.com/office/drawing/2017/decorative" val="1"/>
+              </a:ext>
+            </a:extLst>
+          </p:cNvPr>
+          <p:cNvSpPr>
+            <a:spLocks noGrp="1" noRot="1" noChangeAspect="1" noMove="1" noResize="1" noEditPoints="1" noAdjustHandles="1" noChangeArrowheads="1" noChangeShapeType="1" noTextEdit="1"/>
+          </p:cNvSpPr>
+          <p:nvPr>
+            <p:extLst>
+              <p:ext uri="{386F3935-93C4-4BCD-93E2-E3B085C9AB24}">
+                <p16:designElem xmlns:p16="http://schemas.microsoft.com/office/powerpoint/2015/main" val="1"/>
+              </p:ext>
+            </p:extLst>
+          </p:nvPr>
+        </p:nvSpPr>
+        <p:spPr>
+          <a:xfrm>
+            <a:off x="0" y="0"/>
+            <a:ext cx="4959047" cy="6858000"/>
+          </a:xfrm>
+          <a:custGeom>
+            <a:avLst/>
+            <a:gdLst>
+              <a:gd name="connsiteX0" fmla="*/ 0 w 4959047"/>
+              <a:gd name="connsiteY0" fmla="*/ 0 h 6858000"/>
+              <a:gd name="connsiteX1" fmla="*/ 4110127 w 4959047"/>
+              <a:gd name="connsiteY1" fmla="*/ 0 h 6858000"/>
+              <a:gd name="connsiteX2" fmla="*/ 4179024 w 4959047"/>
+              <a:gd name="connsiteY2" fmla="*/ 123368 h 6858000"/>
+              <a:gd name="connsiteX3" fmla="*/ 4959047 w 4959047"/>
+              <a:gd name="connsiteY3" fmla="*/ 3429000 h 6858000"/>
+              <a:gd name="connsiteX4" fmla="*/ 4179024 w 4959047"/>
+              <a:gd name="connsiteY4" fmla="*/ 6734633 h 6858000"/>
+              <a:gd name="connsiteX5" fmla="*/ 4110127 w 4959047"/>
+              <a:gd name="connsiteY5" fmla="*/ 6858000 h 6858000"/>
+              <a:gd name="connsiteX6" fmla="*/ 0 w 4959047"/>
+              <a:gd name="connsiteY6" fmla="*/ 6858000 h 6858000"/>
+            </a:gdLst>
+            <a:ahLst/>
+            <a:cxnLst>
+              <a:cxn ang="0">
+                <a:pos x="connsiteX0" y="connsiteY0"/>
+              </a:cxn>
+              <a:cxn ang="0">
+                <a:pos x="connsiteX1" y="connsiteY1"/>
+              </a:cxn>
+              <a:cxn ang="0">
+                <a:pos x="connsiteX2" y="connsiteY2"/>
+              </a:cxn>
+              <a:cxn ang="0">
+                <a:pos x="connsiteX3" y="connsiteY3"/>
+              </a:cxn>
+              <a:cxn ang="0">
+                <a:pos x="connsiteX4" y="connsiteY4"/>
+              </a:cxn>
+              <a:cxn ang="0">
+                <a:pos x="connsiteX5" y="connsiteY5"/>
+              </a:cxn>
+              <a:cxn ang="0">
+                <a:pos x="connsiteX6" y="connsiteY6"/>
+              </a:cxn>
+            </a:cxnLst>
+            <a:rect l="l" t="t" r="r" b="b"/>
+            <a:pathLst>
+              <a:path w="4959047" h="6858000">
+                <a:moveTo>
+                  <a:pt x="0" y="0"/>
+                </a:moveTo>
+                <a:lnTo>
+                  <a:pt x="4110127" y="0"/>
+                </a:lnTo>
+                <a:lnTo>
+                  <a:pt x="4179024" y="123368"/>
+                </a:lnTo>
+                <a:cubicBezTo>
+                  <a:pt x="4668929" y="1045156"/>
+                  <a:pt x="4959047" y="2189404"/>
+                  <a:pt x="4959047" y="3429000"/>
+                </a:cubicBezTo>
+                <a:cubicBezTo>
+                  <a:pt x="4959047" y="4668597"/>
+                  <a:pt x="4668929" y="5812845"/>
+                  <a:pt x="4179024" y="6734633"/>
+                </a:cubicBezTo>
+                <a:lnTo>
+                  <a:pt x="4110127" y="6858000"/>
+                </a:lnTo>
+                <a:lnTo>
+                  <a:pt x="0" y="6858000"/>
+                </a:lnTo>
+                <a:close/>
+              </a:path>
+            </a:pathLst>
+          </a:custGeom>
+          <a:ln w="9525">
+            <a:solidFill>
+              <a:schemeClr val="tx2">
+                <a:lumMod val="10000"/>
+                <a:lumOff val="90000"/>
+              </a:schemeClr>
+            </a:solidFill>
+          </a:ln>
+          <a:effectLst>
+            <a:outerShdw blurRad="50800" dist="38100" algn="l" rotWithShape="0">
+              <a:schemeClr val="bg1">
+                <a:lumMod val="85000"/>
+                <a:alpha val="30000"/>
+              </a:schemeClr>
+            </a:outerShdw>
+          </a:effectLst>
+        </p:spPr>
+        <p:style>
+          <a:lnRef idx="2">
+            <a:schemeClr val="accent1">
+              <a:shade val="50000"/>
+            </a:schemeClr>
+          </a:lnRef>
+          <a:fillRef idx="1">
+            <a:schemeClr val="accent1"/>
+          </a:fillRef>
+          <a:effectRef idx="0">
+            <a:schemeClr val="accent1"/>
+          </a:effectRef>
+          <a:fontRef idx="minor">
+            <a:schemeClr val="lt1"/>
+          </a:fontRef>
+        </p:style>
+        <p:txBody>
+          <a:bodyPr wrap="square" rtlCol="0" anchor="ctr">
+            <a:noAutofit/>
+          </a:bodyPr>
+          <a:lstStyle/>
+          <a:p>
+            <a:pPr marL="0" marR="0" lvl="0" indent="0" algn="ctr" defTabSz="914400" rtl="0" eaLnBrk="1" fontAlgn="auto" latinLnBrk="0" hangingPunct="1">
+              <a:lnSpc>
+                <a:spcPct val="100000"/>
+              </a:lnSpc>
+              <a:spcBef>
+                <a:spcPts val="0"/>
+              </a:spcBef>
+              <a:spcAft>
+                <a:spcPts val="0"/>
+              </a:spcAft>
+              <a:buClrTx/>
+              <a:buSzTx/>
+              <a:buFontTx/>
+              <a:buNone/>
+              <a:tabLst/>
+              <a:defRPr/>
+            </a:pPr>
+            <a:endParaRPr kumimoji="0" lang="en-US" sz="1800" b="0" i="0" u="none" strike="noStrike" kern="1200" cap="none" spc="0" normalizeH="0" baseline="0" noProof="0">
+              <a:ln>
+                <a:noFill/>
+              </a:ln>
+              <a:solidFill>
+                <a:prstClr val="white"/>
+              </a:solidFill>
+              <a:effectLst/>
+              <a:uLnTx/>
+              <a:uFillTx/>
+              <a:latin typeface="Calibri" panose="020F0502020204030204"/>
+              <a:ea typeface="+mn-ea"/>
+              <a:cs typeface="+mn-cs"/>
+            </a:endParaRPr>
+          </a:p>
+        </p:txBody>
+      </p:sp>
+      <p:sp useBgFill="1">
+        <p:nvSpPr>
+          <p:cNvPr id="18" name="Freeform: Shape 17">
+            <a:extLst>
+              <a:ext uri="{FF2B5EF4-FFF2-40B4-BE49-F238E27FC236}">
+                <a16:creationId xmlns:a16="http://schemas.microsoft.com/office/drawing/2014/main" id="{84D4DDB8-B68F-45B0-9F62-C4279996F672}"/>
+              </a:ext>
+              <a:ext uri="{C183D7F6-B498-43B3-948B-1728B52AA6E4}">
+                <adec:decorative xmlns:adec="http://schemas.microsoft.com/office/drawing/2017/decorative" val="1"/>
+              </a:ext>
+            </a:extLst>
+          </p:cNvPr>
+          <p:cNvSpPr>
+            <a:spLocks noGrp="1" noRot="1" noChangeAspect="1" noMove="1" noResize="1" noEditPoints="1" noAdjustHandles="1" noChangeArrowheads="1" noChangeShapeType="1" noTextEdit="1"/>
+          </p:cNvSpPr>
+          <p:nvPr>
+            <p:extLst>
+              <p:ext uri="{386F3935-93C4-4BCD-93E2-E3B085C9AB24}">
+                <p16:designElem xmlns:p16="http://schemas.microsoft.com/office/powerpoint/2015/main" val="1"/>
+              </p:ext>
+            </p:extLst>
+          </p:nvPr>
+        </p:nvSpPr>
+        <p:spPr>
+          <a:xfrm>
+            <a:off x="0" y="0"/>
+            <a:ext cx="4948887" cy="6858000"/>
+          </a:xfrm>
+          <a:custGeom>
+            <a:avLst/>
+            <a:gdLst>
+              <a:gd name="connsiteX0" fmla="*/ 0 w 4948887"/>
+              <a:gd name="connsiteY0" fmla="*/ 0 h 6858000"/>
+              <a:gd name="connsiteX1" fmla="*/ 4099967 w 4948887"/>
+              <a:gd name="connsiteY1" fmla="*/ 0 h 6858000"/>
+              <a:gd name="connsiteX2" fmla="*/ 4168864 w 4948887"/>
+              <a:gd name="connsiteY2" fmla="*/ 123368 h 6858000"/>
+              <a:gd name="connsiteX3" fmla="*/ 4948887 w 4948887"/>
+              <a:gd name="connsiteY3" fmla="*/ 3429000 h 6858000"/>
+              <a:gd name="connsiteX4" fmla="*/ 4168864 w 4948887"/>
+              <a:gd name="connsiteY4" fmla="*/ 6734633 h 6858000"/>
+              <a:gd name="connsiteX5" fmla="*/ 4099967 w 4948887"/>
+              <a:gd name="connsiteY5" fmla="*/ 6858000 h 6858000"/>
+              <a:gd name="connsiteX6" fmla="*/ 0 w 4948887"/>
+              <a:gd name="connsiteY6" fmla="*/ 6858000 h 6858000"/>
+            </a:gdLst>
+            <a:ahLst/>
+            <a:cxnLst>
+              <a:cxn ang="0">
+                <a:pos x="connsiteX0" y="connsiteY0"/>
+              </a:cxn>
+              <a:cxn ang="0">
+                <a:pos x="connsiteX1" y="connsiteY1"/>
+              </a:cxn>
+              <a:cxn ang="0">
+                <a:pos x="connsiteX2" y="connsiteY2"/>
+              </a:cxn>
+              <a:cxn ang="0">
+                <a:pos x="connsiteX3" y="connsiteY3"/>
+              </a:cxn>
+              <a:cxn ang="0">
+                <a:pos x="connsiteX4" y="connsiteY4"/>
+              </a:cxn>
+              <a:cxn ang="0">
+                <a:pos x="connsiteX5" y="connsiteY5"/>
+              </a:cxn>
+              <a:cxn ang="0">
+                <a:pos x="connsiteX6" y="connsiteY6"/>
+              </a:cxn>
+            </a:cxnLst>
+            <a:rect l="l" t="t" r="r" b="b"/>
+            <a:pathLst>
+              <a:path w="4948887" h="6858000">
+                <a:moveTo>
+                  <a:pt x="0" y="0"/>
+                </a:moveTo>
+                <a:lnTo>
+                  <a:pt x="4099967" y="0"/>
+                </a:lnTo>
+                <a:lnTo>
+                  <a:pt x="4168864" y="123368"/>
+                </a:lnTo>
+                <a:cubicBezTo>
+                  <a:pt x="4658769" y="1045156"/>
+                  <a:pt x="4948887" y="2189404"/>
+                  <a:pt x="4948887" y="3429000"/>
+                </a:cubicBezTo>
+                <a:cubicBezTo>
+                  <a:pt x="4948887" y="4668597"/>
+                  <a:pt x="4658769" y="5812845"/>
+                  <a:pt x="4168864" y="6734633"/>
+                </a:cubicBezTo>
+                <a:lnTo>
+                  <a:pt x="4099967" y="6858000"/>
+                </a:lnTo>
+                <a:lnTo>
+                  <a:pt x="0" y="6858000"/>
+                </a:lnTo>
+                <a:close/>
+              </a:path>
+            </a:pathLst>
+          </a:custGeom>
+          <a:ln w="9525">
+            <a:noFill/>
+          </a:ln>
+          <a:effectLst/>
+        </p:spPr>
+        <p:style>
+          <a:lnRef idx="2">
+            <a:schemeClr val="accent1">
+              <a:shade val="50000"/>
+            </a:schemeClr>
+          </a:lnRef>
+          <a:fillRef idx="1">
+            <a:schemeClr val="accent1"/>
+          </a:fillRef>
+          <a:effectRef idx="0">
+            <a:schemeClr val="accent1"/>
+          </a:effectRef>
+          <a:fontRef idx="minor">
+            <a:schemeClr val="lt1"/>
+          </a:fontRef>
+        </p:style>
+        <p:txBody>
+          <a:bodyPr wrap="square" rtlCol="0" anchor="ctr">
+            <a:noAutofit/>
+          </a:bodyPr>
+          <a:lstStyle/>
+          <a:p>
+            <a:pPr marL="0" marR="0" lvl="0" indent="0" algn="ctr" defTabSz="914400" rtl="0" eaLnBrk="1" fontAlgn="auto" latinLnBrk="0" hangingPunct="1">
+              <a:lnSpc>
+                <a:spcPct val="100000"/>
+              </a:lnSpc>
+              <a:spcBef>
+                <a:spcPts val="0"/>
+              </a:spcBef>
+              <a:spcAft>
+                <a:spcPts val="0"/>
+              </a:spcAft>
+              <a:buClrTx/>
+              <a:buSzTx/>
+              <a:buFontTx/>
+              <a:buNone/>
+              <a:tabLst/>
+              <a:defRPr/>
+            </a:pPr>
+            <a:endParaRPr kumimoji="0" lang="en-US" sz="1800" b="0" i="0" u="none" strike="noStrike" kern="1200" cap="none" spc="0" normalizeH="0" baseline="0" noProof="0">
+              <a:ln>
+                <a:noFill/>
+              </a:ln>
+              <a:solidFill>
+                <a:prstClr val="white"/>
+              </a:solidFill>
+              <a:effectLst/>
+              <a:uLnTx/>
+              <a:uFillTx/>
+              <a:latin typeface="Calibri" panose="020F0502020204030204"/>
+              <a:ea typeface="+mn-ea"/>
+              <a:cs typeface="+mn-cs"/>
+            </a:endParaRPr>
+          </a:p>
+        </p:txBody>
+      </p:sp>
+      <p:sp>
+        <p:nvSpPr>
+          <p:cNvPr id="2" name="Title 1">
+            <a:extLst>
+              <a:ext uri="{FF2B5EF4-FFF2-40B4-BE49-F238E27FC236}">
+                <a16:creationId xmlns:a16="http://schemas.microsoft.com/office/drawing/2014/main" id="{EFA46653-345E-6D31-52E0-F593A2DD1F99}"/>
+              </a:ext>
+            </a:extLst>
+          </p:cNvPr>
+          <p:cNvSpPr>
+            <a:spLocks noGrp="1"/>
+          </p:cNvSpPr>
+          <p:nvPr>
+            <p:ph type="title"/>
+          </p:nvPr>
+        </p:nvSpPr>
+        <p:spPr>
+          <a:xfrm>
+            <a:off x="477981" y="1122363"/>
+            <a:ext cx="4023360" cy="3204134"/>
+          </a:xfrm>
+        </p:spPr>
+        <p:txBody>
+          <a:bodyPr vert="horz" lIns="91440" tIns="45720" rIns="91440" bIns="45720" rtlCol="0" anchor="b">
+            <a:normAutofit/>
+          </a:bodyPr>
+          <a:lstStyle/>
+          <a:p>
+            <a:pPr>
+              <a:defRPr sz="2800"/>
+            </a:pPr>
+            <a:r>
+              <a:rPr lang="en-US" sz="4800" dirty="0"/>
+              <a:t>Figure 2 – mRNA and protein levels and half-lives.</a:t>
+            </a:r>
+          </a:p>
+        </p:txBody>
+      </p:sp>
+      <p:sp>
+        <p:nvSpPr>
+          <p:cNvPr id="20" name="Rectangle 19">
+            <a:extLst>
+              <a:ext uri="{FF2B5EF4-FFF2-40B4-BE49-F238E27FC236}">
+                <a16:creationId xmlns:a16="http://schemas.microsoft.com/office/drawing/2014/main" id="{AF2F604E-43BE-4DC3-B983-E071523364F8}"/>
+              </a:ext>
+              <a:ext uri="{C183D7F6-B498-43B3-948B-1728B52AA6E4}">
+                <adec:decorative xmlns:adec="http://schemas.microsoft.com/office/drawing/2017/decorative" val="1"/>
+              </a:ext>
+            </a:extLst>
+          </p:cNvPr>
+          <p:cNvSpPr>
+            <a:spLocks noGrp="1" noRot="1" noChangeAspect="1" noMove="1" noResize="1" noEditPoints="1" noAdjustHandles="1" noChangeArrowheads="1" noChangeShapeType="1" noTextEdit="1"/>
+          </p:cNvSpPr>
+          <p:nvPr>
+            <p:extLst>
+              <p:ext uri="{386F3935-93C4-4BCD-93E2-E3B085C9AB24}">
+                <p16:designElem xmlns:p16="http://schemas.microsoft.com/office/powerpoint/2015/main" val="1"/>
+              </p:ext>
+            </p:extLst>
+          </p:nvPr>
+        </p:nvSpPr>
+        <p:spPr>
+          <a:xfrm rot="5400000">
+            <a:off x="759921" y="346791"/>
+            <a:ext cx="146304" cy="704088"/>
+          </a:xfrm>
+          <a:prstGeom prst="rect">
+            <a:avLst/>
+          </a:prstGeom>
+          <a:solidFill>
+            <a:schemeClr val="accent1"/>
+          </a:solidFill>
+          <a:ln>
+            <a:noFill/>
+          </a:ln>
+        </p:spPr>
+        <p:style>
+          <a:lnRef idx="2">
+            <a:schemeClr val="accent1">
+              <a:shade val="50000"/>
+            </a:schemeClr>
+          </a:lnRef>
+          <a:fillRef idx="1">
+            <a:schemeClr val="accent1"/>
+          </a:fillRef>
+          <a:effectRef idx="0">
+            <a:schemeClr val="accent1"/>
+          </a:effectRef>
+          <a:fontRef idx="minor">
+            <a:schemeClr val="lt1"/>
+          </a:fontRef>
+        </p:style>
+        <p:txBody>
+          <a:bodyPr rtlCol="0" anchor="ctr"/>
+          <a:lstStyle/>
+          <a:p>
+            <a:pPr marL="0" marR="0" lvl="0" indent="0" algn="ctr" defTabSz="914400" rtl="0" eaLnBrk="1" fontAlgn="auto" latinLnBrk="0" hangingPunct="1">
+              <a:lnSpc>
+                <a:spcPct val="100000"/>
+              </a:lnSpc>
+              <a:spcBef>
+                <a:spcPts val="0"/>
+              </a:spcBef>
+              <a:spcAft>
+                <a:spcPts val="0"/>
+              </a:spcAft>
+              <a:buClrTx/>
+              <a:buSzTx/>
+              <a:buFontTx/>
+              <a:buNone/>
+              <a:tabLst/>
+              <a:defRPr/>
+            </a:pPr>
+            <a:endParaRPr kumimoji="0" lang="en-US" sz="1800" b="0" i="0" u="none" strike="noStrike" kern="1200" cap="none" spc="0" normalizeH="0" baseline="0" noProof="0">
+              <a:ln>
+                <a:noFill/>
+              </a:ln>
+              <a:solidFill>
+                <a:prstClr val="white"/>
+              </a:solidFill>
+              <a:effectLst/>
+              <a:uLnTx/>
+              <a:uFillTx/>
+              <a:latin typeface="Calibri" panose="020F0502020204030204"/>
+              <a:ea typeface="+mn-ea"/>
+              <a:cs typeface="+mn-cs"/>
+            </a:endParaRPr>
+          </a:p>
+        </p:txBody>
+      </p:sp>
+      <p:sp>
+        <p:nvSpPr>
+          <p:cNvPr id="22" name="Rectangle 21">
+            <a:extLst>
+              <a:ext uri="{FF2B5EF4-FFF2-40B4-BE49-F238E27FC236}">
+                <a16:creationId xmlns:a16="http://schemas.microsoft.com/office/drawing/2014/main" id="{08C9B587-E65E-4B52-B37C-ABEBB6E87928}"/>
+              </a:ext>
+              <a:ext uri="{C183D7F6-B498-43B3-948B-1728B52AA6E4}">
+                <adec:decorative xmlns:adec="http://schemas.microsoft.com/office/drawing/2017/decorative" val="1"/>
+              </a:ext>
+            </a:extLst>
+          </p:cNvPr>
+          <p:cNvSpPr>
+            <a:spLocks noGrp="1" noRot="1" noChangeAspect="1" noMove="1" noResize="1" noEditPoints="1" noAdjustHandles="1" noChangeArrowheads="1" noChangeShapeType="1" noTextEdit="1"/>
+          </p:cNvSpPr>
+          <p:nvPr>
+            <p:extLst>
+              <p:ext uri="{386F3935-93C4-4BCD-93E2-E3B085C9AB24}">
+                <p16:designElem xmlns:p16="http://schemas.microsoft.com/office/powerpoint/2015/main" val="1"/>
+              </p:ext>
+            </p:extLst>
+          </p:nvPr>
+        </p:nvSpPr>
+        <p:spPr>
+          <a:xfrm>
+            <a:off x="481029" y="4546920"/>
+            <a:ext cx="4023360" cy="18288"/>
+          </a:xfrm>
+          <a:prstGeom prst="rect">
+            <a:avLst/>
+          </a:prstGeom>
+          <a:solidFill>
+            <a:schemeClr val="tx2">
+              <a:lumMod val="25000"/>
+              <a:lumOff val="75000"/>
+            </a:schemeClr>
+          </a:solidFill>
+          <a:ln w="3175">
+            <a:noFill/>
+          </a:ln>
+          <a:effectLst/>
+        </p:spPr>
+        <p:style>
+          <a:lnRef idx="2">
+            <a:schemeClr val="accent1">
+              <a:shade val="50000"/>
+            </a:schemeClr>
+          </a:lnRef>
+          <a:fillRef idx="1">
+            <a:schemeClr val="accent1"/>
+          </a:fillRef>
+          <a:effectRef idx="0">
+            <a:schemeClr val="accent1"/>
+          </a:effectRef>
+          <a:fontRef idx="minor">
+            <a:schemeClr val="lt1"/>
+          </a:fontRef>
+        </p:style>
+        <p:txBody>
+          <a:bodyPr rtlCol="0" anchor="ctr"/>
+          <a:lstStyle/>
+          <a:p>
+            <a:pPr marL="0" marR="0" lvl="0" indent="0" algn="ctr" defTabSz="914400" rtl="0" eaLnBrk="1" fontAlgn="auto" latinLnBrk="0" hangingPunct="1">
+              <a:lnSpc>
+                <a:spcPct val="100000"/>
+              </a:lnSpc>
+              <a:spcBef>
+                <a:spcPts val="0"/>
+              </a:spcBef>
+              <a:spcAft>
+                <a:spcPts val="0"/>
+              </a:spcAft>
+              <a:buClrTx/>
+              <a:buSzTx/>
+              <a:buFontTx/>
+              <a:buNone/>
+              <a:tabLst/>
+              <a:defRPr/>
+            </a:pPr>
+            <a:endParaRPr kumimoji="0" lang="en-US" sz="1800" b="0" i="0" u="none" strike="noStrike" kern="1200" cap="none" spc="0" normalizeH="0" baseline="0" noProof="0">
+              <a:ln>
+                <a:noFill/>
+              </a:ln>
+              <a:solidFill>
+                <a:prstClr val="white"/>
+              </a:solidFill>
+              <a:effectLst/>
+              <a:uLnTx/>
+              <a:uFillTx/>
+              <a:latin typeface="Calibri" panose="020F0502020204030204"/>
+              <a:ea typeface="+mn-ea"/>
+              <a:cs typeface="+mn-cs"/>
+            </a:endParaRPr>
+          </a:p>
+        </p:txBody>
+      </p:sp>
+      <p:pic>
+        <p:nvPicPr>
+          <p:cNvPr id="5" name="Picture 4" descr="A group of graphs showing different types of cells&#10;&#10;AI-generated content may be incorrect.">
+            <a:extLst>
+              <a:ext uri="{FF2B5EF4-FFF2-40B4-BE49-F238E27FC236}">
+                <a16:creationId xmlns:a16="http://schemas.microsoft.com/office/drawing/2014/main" id="{1BAB8FF1-B12A-61C8-B149-DACBEF8F0B7E}"/>
+              </a:ext>
+            </a:extLst>
+          </p:cNvPr>
+          <p:cNvPicPr>
+            <a:picLocks noChangeAspect="1"/>
+          </p:cNvPicPr>
+          <p:nvPr/>
+        </p:nvPicPr>
+        <p:blipFill>
+          <a:blip r:embed="rId2"/>
+          <a:stretch>
+            <a:fillRect/>
+          </a:stretch>
+        </p:blipFill>
+        <p:spPr>
+          <a:xfrm>
+            <a:off x="5159475" y="799153"/>
+            <a:ext cx="6743199" cy="5259694"/>
+          </a:xfrm>
+          <a:prstGeom prst="rect">
+            <a:avLst/>
+          </a:prstGeom>
+        </p:spPr>
+      </p:pic>
+    </p:spTree>
+    <p:extLst>
+      <p:ext uri="{BB962C8B-B14F-4D97-AF65-F5344CB8AC3E}">
+        <p14:creationId xmlns:p14="http://schemas.microsoft.com/office/powerpoint/2010/main" val="1708592787"/>
+      </p:ext>
+    </p:extLst>
+  </p:cSld>
+  <p:clrMapOvr>
+    <a:masterClrMapping/>
+  </p:clrMapOvr>
+  <p:timing>
+    <p:tnLst>
+      <p:par>
+        <p:cTn id="1" dur="indefinite" restart="never" nodeType="tmRoot">
+          <p:childTnLst>
+            <p:seq concurrent="1" nextAc="seek">
+              <p:cTn id="2" dur="indefinite" nodeType="mainSeq">
+                <p:childTnLst>
+                  <p:par>
+                    <p:cTn id="3" fill="hold">
+                      <p:stCondLst>
+                        <p:cond delay="indefinite"/>
+                        <p:cond evt="onBegin" delay="0">
+                          <p:tn val="2"/>
+                        </p:cond>
+                      </p:stCondLst>
+                      <p:childTnLst>
+                        <p:par>
+                          <p:cTn id="4" fill="hold">
+                            <p:stCondLst>
+                              <p:cond delay="0"/>
+                            </p:stCondLst>
+                            <p:childTnLst>
+                              <p:par>
+                                <p:cTn id="5" presetID="10" presetClass="entr" presetSubtype="0" fill="hold" grpId="0" nodeType="withEffect">
+                                  <p:stCondLst>
+                                    <p:cond delay="1000"/>
+                                  </p:stCondLst>
+                                  <p:iterate>
+                                    <p:tmPct val="10000"/>
+                                  </p:iterate>
+                                  <p:childTnLst>
+                                    <p:set>
+                                      <p:cBhvr>
+                                        <p:cTn id="6" dur="1" fill="hold">
+                                          <p:stCondLst>
+                                            <p:cond delay="0"/>
+                                          </p:stCondLst>
+                                        </p:cTn>
+                                        <p:tgtEl>
+                                          <p:spTgt spid="2"/>
+                                        </p:tgtEl>
+                                        <p:attrNameLst>
+                                          <p:attrName>style.visibility</p:attrName>
+                                        </p:attrNameLst>
+                                      </p:cBhvr>
+                                      <p:to>
+                                        <p:strVal val="visible"/>
+                                      </p:to>
+                                    </p:set>
+                                    <p:animEffect transition="in" filter="fade">
+                                      <p:cBhvr>
+                                        <p:cTn id="7" dur="700"/>
+                                        <p:tgtEl>
+                                          <p:spTgt spid="2"/>
+                                        </p:tgtEl>
+                                      </p:cBhvr>
+                                    </p:animEffect>
+                                  </p:childTnLst>
+                                </p:cTn>
+                              </p:par>
+                            </p:childTnLst>
+                          </p:cTn>
+                        </p:par>
+                      </p:childTnLst>
+                    </p:cTn>
+                  </p:par>
+                </p:childTnLst>
+              </p:cTn>
+              <p:prevCondLst>
+                <p:cond evt="onPrev" delay="0">
+                  <p:tgtEl>
+                    <p:sldTgt/>
+                  </p:tgtEl>
+                </p:cond>
+              </p:prevCondLst>
+              <p:nextCondLst>
+                <p:cond evt="onNext" delay="0">
+                  <p:tgtEl>
+                    <p:sldTgt/>
+                  </p:tgtEl>
+                </p:cond>
+              </p:nextCondLst>
+            </p:seq>
+          </p:childTnLst>
+        </p:cTn>
+      </p:par>
+    </p:tnLst>
+    <p:bldLst>
+      <p:bldP spid="2" grpId="0"/>
+    </p:bldLst>
+  </p:timing>
+</p:sld>
+</file>
+
+<file path=ppt/slides/slide18.xml><?xml version="1.0" encoding="utf-8"?>
+<p:sld xmlns:a="http://schemas.openxmlformats.org/drawingml/2006/main" xmlns:r="http://schemas.openxmlformats.org/officeDocument/2006/relationships" xmlns:p="http://schemas.openxmlformats.org/presentationml/2006/main">
+  <p:cSld>
+    <p:bg>
+      <p:bgPr>
+        <a:solidFill>
+          <a:schemeClr val="bg1"/>
+        </a:solidFill>
+        <a:effectLst/>
+      </p:bgPr>
+    </p:bg>
+    <p:spTree>
+      <p:nvGrpSpPr>
+        <p:cNvPr id="1" name="">
+          <a:extLst>
+            <a:ext uri="{FF2B5EF4-FFF2-40B4-BE49-F238E27FC236}">
+              <a16:creationId xmlns:a16="http://schemas.microsoft.com/office/drawing/2014/main" id="{3F9CD8CA-62F6-580A-1F0F-4F7499D21BFA}"/>
+            </a:ext>
+          </a:extLst>
+        </p:cNvPr>
+        <p:cNvGrpSpPr/>
+        <p:nvPr/>
+      </p:nvGrpSpPr>
+      <p:grpSpPr>
+        <a:xfrm>
+          <a:off x="0" y="0"/>
+          <a:ext cx="0" cy="0"/>
+          <a:chOff x="0" y="0"/>
+          <a:chExt cx="0" cy="0"/>
+        </a:xfrm>
+      </p:grpSpPr>
+      <p:sp>
+        <p:nvSpPr>
+          <p:cNvPr id="9" name="Rectangle 8">
+            <a:extLst>
+              <a:ext uri="{FF2B5EF4-FFF2-40B4-BE49-F238E27FC236}">
+                <a16:creationId xmlns:a16="http://schemas.microsoft.com/office/drawing/2014/main" id="{8D06CE56-3881-4ADA-8CEF-D18B02C242A3}"/>
+              </a:ext>
+              <a:ext uri="{C183D7F6-B498-43B3-948B-1728B52AA6E4}">
+                <adec:decorative xmlns:adec="http://schemas.microsoft.com/office/drawing/2017/decorative" val="1"/>
+              </a:ext>
+            </a:extLst>
+          </p:cNvPr>
+          <p:cNvSpPr>
+            <a:spLocks noGrp="1" noRot="1" noChangeAspect="1" noMove="1" noResize="1" noEditPoints="1" noAdjustHandles="1" noChangeArrowheads="1" noChangeShapeType="1" noTextEdit="1"/>
+          </p:cNvSpPr>
+          <p:nvPr>
+            <p:extLst>
+              <p:ext uri="{386F3935-93C4-4BCD-93E2-E3B085C9AB24}">
+                <p16:designElem xmlns:p16="http://schemas.microsoft.com/office/powerpoint/2015/main" val="1"/>
+              </p:ext>
+            </p:extLst>
+          </p:nvPr>
+        </p:nvSpPr>
+        <p:spPr>
+          <a:xfrm rot="5400000">
+            <a:off x="857544" y="346791"/>
+            <a:ext cx="146304" cy="704088"/>
+          </a:xfrm>
+          <a:prstGeom prst="rect">
+            <a:avLst/>
+          </a:prstGeom>
+          <a:solidFill>
+            <a:schemeClr val="accent1"/>
+          </a:solidFill>
+          <a:ln>
+            <a:noFill/>
+          </a:ln>
+        </p:spPr>
+        <p:style>
+          <a:lnRef idx="2">
+            <a:schemeClr val="accent1">
+              <a:shade val="50000"/>
+            </a:schemeClr>
+          </a:lnRef>
+          <a:fillRef idx="1">
+            <a:schemeClr val="accent1"/>
+          </a:fillRef>
+          <a:effectRef idx="0">
+            <a:schemeClr val="accent1"/>
+          </a:effectRef>
+          <a:fontRef idx="minor">
+            <a:schemeClr val="lt1"/>
+          </a:fontRef>
+        </p:style>
+        <p:txBody>
+          <a:bodyPr rtlCol="0" anchor="ctr"/>
+          <a:lstStyle/>
+          <a:p>
+            <a:pPr marL="0" marR="0" lvl="0" indent="0" algn="ctr" defTabSz="914400" rtl="0" eaLnBrk="1" fontAlgn="auto" latinLnBrk="0" hangingPunct="1">
+              <a:lnSpc>
+                <a:spcPct val="100000"/>
+              </a:lnSpc>
+              <a:spcBef>
+                <a:spcPts val="0"/>
+              </a:spcBef>
+              <a:spcAft>
+                <a:spcPts val="0"/>
+              </a:spcAft>
+              <a:buClrTx/>
+              <a:buSzTx/>
+              <a:buFontTx/>
+              <a:buNone/>
+              <a:tabLst/>
+              <a:defRPr/>
+            </a:pPr>
+            <a:endParaRPr kumimoji="0" lang="en-US" sz="1800" b="0" i="0" u="none" strike="noStrike" kern="1200" cap="none" spc="0" normalizeH="0" baseline="0" noProof="0">
+              <a:ln>
+                <a:noFill/>
+              </a:ln>
+              <a:solidFill>
+                <a:prstClr val="white"/>
+              </a:solidFill>
+              <a:effectLst/>
+              <a:uLnTx/>
+              <a:uFillTx/>
+              <a:latin typeface="Calibri" panose="020F0502020204030204"/>
+              <a:ea typeface="+mn-ea"/>
+              <a:cs typeface="+mn-cs"/>
+            </a:endParaRPr>
+          </a:p>
+        </p:txBody>
+      </p:sp>
+      <p:sp>
+        <p:nvSpPr>
+          <p:cNvPr id="11" name="Rectangle 10">
+            <a:extLst>
+              <a:ext uri="{FF2B5EF4-FFF2-40B4-BE49-F238E27FC236}">
+                <a16:creationId xmlns:a16="http://schemas.microsoft.com/office/drawing/2014/main" id="{79F3C543-62EC-4433-9C93-A2CD8764E9B4}"/>
+              </a:ext>
+              <a:ext uri="{C183D7F6-B498-43B3-948B-1728B52AA6E4}">
+                <adec:decorative xmlns:adec="http://schemas.microsoft.com/office/drawing/2017/decorative" val="1"/>
+              </a:ext>
+            </a:extLst>
+          </p:cNvPr>
+          <p:cNvSpPr>
+            <a:spLocks noGrp="1" noRot="1" noChangeAspect="1" noMove="1" noResize="1" noEditPoints="1" noAdjustHandles="1" noChangeArrowheads="1" noChangeShapeType="1" noTextEdit="1"/>
+          </p:cNvSpPr>
+          <p:nvPr>
+            <p:extLst>
+              <p:ext uri="{386F3935-93C4-4BCD-93E2-E3B085C9AB24}">
+                <p16:designElem xmlns:p16="http://schemas.microsoft.com/office/powerpoint/2015/main" val="1"/>
+              </p:ext>
+            </p:extLst>
+          </p:nvPr>
+        </p:nvSpPr>
+        <p:spPr>
+          <a:xfrm flipV="1">
+            <a:off x="578652" y="4501201"/>
+            <a:ext cx="11034696" cy="18288"/>
+          </a:xfrm>
+          <a:prstGeom prst="rect">
+            <a:avLst/>
+          </a:prstGeom>
+          <a:solidFill>
+            <a:schemeClr val="tx2">
+              <a:lumMod val="25000"/>
+              <a:lumOff val="75000"/>
+            </a:schemeClr>
+          </a:solidFill>
+          <a:ln w="3175">
+            <a:noFill/>
+          </a:ln>
+          <a:effectLst/>
+        </p:spPr>
+        <p:style>
+          <a:lnRef idx="2">
+            <a:schemeClr val="accent1">
+              <a:shade val="50000"/>
+            </a:schemeClr>
+          </a:lnRef>
+          <a:fillRef idx="1">
+            <a:schemeClr val="accent1"/>
+          </a:fillRef>
+          <a:effectRef idx="0">
+            <a:schemeClr val="accent1"/>
+          </a:effectRef>
+          <a:fontRef idx="minor">
+            <a:schemeClr val="lt1"/>
+          </a:fontRef>
+        </p:style>
+        <p:txBody>
+          <a:bodyPr rtlCol="0" anchor="ctr"/>
+          <a:lstStyle/>
+          <a:p>
+            <a:pPr marL="0" marR="0" lvl="0" indent="0" algn="ctr" defTabSz="914400" rtl="0" eaLnBrk="1" fontAlgn="auto" latinLnBrk="0" hangingPunct="1">
+              <a:lnSpc>
+                <a:spcPct val="100000"/>
+              </a:lnSpc>
+              <a:spcBef>
+                <a:spcPts val="0"/>
+              </a:spcBef>
+              <a:spcAft>
+                <a:spcPts val="0"/>
+              </a:spcAft>
+              <a:buClrTx/>
+              <a:buSzTx/>
+              <a:buFontTx/>
+              <a:buNone/>
+              <a:tabLst/>
+              <a:defRPr/>
+            </a:pPr>
+            <a:endParaRPr kumimoji="0" lang="en-US" sz="1800" b="0" i="0" u="none" strike="noStrike" kern="1200" cap="none" spc="0" normalizeH="0" baseline="0" noProof="0">
+              <a:ln>
+                <a:noFill/>
+              </a:ln>
+              <a:solidFill>
+                <a:prstClr val="white"/>
+              </a:solidFill>
+              <a:effectLst/>
+              <a:uLnTx/>
+              <a:uFillTx/>
+              <a:latin typeface="Calibri" panose="020F0502020204030204"/>
+              <a:ea typeface="+mn-ea"/>
+              <a:cs typeface="+mn-cs"/>
+            </a:endParaRPr>
+          </a:p>
+        </p:txBody>
+      </p:sp>
+      <p:sp useBgFill="1">
+        <p:nvSpPr>
+          <p:cNvPr id="13" name="Rectangle 12">
+            <a:extLst>
+              <a:ext uri="{FF2B5EF4-FFF2-40B4-BE49-F238E27FC236}">
+                <a16:creationId xmlns:a16="http://schemas.microsoft.com/office/drawing/2014/main" id="{68AF5748-FED8-45BA-8631-26D1D10F3246}"/>
+              </a:ext>
+              <a:ext uri="{C183D7F6-B498-43B3-948B-1728B52AA6E4}">
+                <adec:decorative xmlns:adec="http://schemas.microsoft.com/office/drawing/2017/decorative" val="1"/>
+              </a:ext>
+            </a:extLst>
+          </p:cNvPr>
+          <p:cNvSpPr>
+            <a:spLocks noGrp="1" noRot="1" noChangeAspect="1" noMove="1" noResize="1" noEditPoints="1" noAdjustHandles="1" noChangeArrowheads="1" noChangeShapeType="1" noTextEdit="1"/>
+          </p:cNvSpPr>
+          <p:nvPr>
+            <p:extLst>
+              <p:ext uri="{386F3935-93C4-4BCD-93E2-E3B085C9AB24}">
+                <p16:designElem xmlns:p16="http://schemas.microsoft.com/office/powerpoint/2015/main" val="1"/>
+              </p:ext>
+            </p:extLst>
+          </p:nvPr>
+        </p:nvSpPr>
+        <p:spPr>
+          <a:xfrm>
+            <a:off x="0" y="0"/>
+            <a:ext cx="12192000" cy="6858000"/>
+          </a:xfrm>
+          <a:prstGeom prst="rect">
+            <a:avLst/>
+          </a:prstGeom>
+          <a:ln>
+            <a:noFill/>
+          </a:ln>
+        </p:spPr>
+        <p:style>
+          <a:lnRef idx="2">
+            <a:schemeClr val="accent1">
+              <a:shade val="50000"/>
+            </a:schemeClr>
+          </a:lnRef>
+          <a:fillRef idx="1">
+            <a:schemeClr val="accent1"/>
+          </a:fillRef>
+          <a:effectRef idx="0">
+            <a:schemeClr val="accent1"/>
+          </a:effectRef>
+          <a:fontRef idx="minor">
+            <a:schemeClr val="lt1"/>
+          </a:fontRef>
+        </p:style>
+        <p:txBody>
+          <a:bodyPr rtlCol="0" anchor="ctr"/>
+          <a:lstStyle/>
+          <a:p>
+            <a:pPr algn="ctr"/>
+            <a:endParaRPr lang="en-US"/>
+          </a:p>
+        </p:txBody>
+      </p:sp>
+      <p:sp>
+        <p:nvSpPr>
+          <p:cNvPr id="2" name="Title 1">
+            <a:extLst>
+              <a:ext uri="{FF2B5EF4-FFF2-40B4-BE49-F238E27FC236}">
+                <a16:creationId xmlns:a16="http://schemas.microsoft.com/office/drawing/2014/main" id="{9D7D831B-9BB4-9CD9-E213-977CF38E2C40}"/>
+              </a:ext>
+            </a:extLst>
+          </p:cNvPr>
+          <p:cNvSpPr>
+            <a:spLocks noGrp="1"/>
+          </p:cNvSpPr>
+          <p:nvPr>
+            <p:ph type="title"/>
+          </p:nvPr>
+        </p:nvSpPr>
+        <p:spPr>
+          <a:xfrm>
+            <a:off x="477981" y="1122363"/>
+            <a:ext cx="4023360" cy="3204134"/>
+          </a:xfrm>
+        </p:spPr>
+        <p:txBody>
+          <a:bodyPr vert="horz" lIns="91440" tIns="45720" rIns="91440" bIns="45720" rtlCol="0" anchor="b">
+            <a:normAutofit fontScale="90000"/>
+          </a:bodyPr>
+          <a:lstStyle/>
+          <a:p>
+            <a:pPr>
+              <a:defRPr sz="2800"/>
+            </a:pPr>
+            <a:r>
+              <a:rPr lang="en-US" sz="4800" dirty="0"/>
+              <a:t>Figure 3 –﻿ Quantitative model of gene expression in growing cells.</a:t>
+            </a:r>
+          </a:p>
+        </p:txBody>
+      </p:sp>
+      <p:sp>
+        <p:nvSpPr>
+          <p:cNvPr id="15" name="Rectangle 14">
+            <a:extLst>
+              <a:ext uri="{FF2B5EF4-FFF2-40B4-BE49-F238E27FC236}">
+                <a16:creationId xmlns:a16="http://schemas.microsoft.com/office/drawing/2014/main" id="{AF2F604E-43BE-4DC3-B983-E071523364F8}"/>
+              </a:ext>
+              <a:ext uri="{C183D7F6-B498-43B3-948B-1728B52AA6E4}">
+                <adec:decorative xmlns:adec="http://schemas.microsoft.com/office/drawing/2017/decorative" val="1"/>
+              </a:ext>
+            </a:extLst>
+          </p:cNvPr>
+          <p:cNvSpPr>
+            <a:spLocks noGrp="1" noRot="1" noChangeAspect="1" noMove="1" noResize="1" noEditPoints="1" noAdjustHandles="1" noChangeArrowheads="1" noChangeShapeType="1" noTextEdit="1"/>
+          </p:cNvSpPr>
+          <p:nvPr>
+            <p:extLst>
+              <p:ext uri="{386F3935-93C4-4BCD-93E2-E3B085C9AB24}">
+                <p16:designElem xmlns:p16="http://schemas.microsoft.com/office/powerpoint/2015/main" val="1"/>
+              </p:ext>
+            </p:extLst>
+          </p:nvPr>
+        </p:nvSpPr>
+        <p:spPr>
+          <a:xfrm rot="5400000">
+            <a:off x="759921" y="346791"/>
+            <a:ext cx="146304" cy="704088"/>
+          </a:xfrm>
+          <a:prstGeom prst="rect">
+            <a:avLst/>
+          </a:prstGeom>
+          <a:solidFill>
+            <a:schemeClr val="accent1"/>
+          </a:solidFill>
+          <a:ln>
+            <a:noFill/>
+          </a:ln>
+        </p:spPr>
+        <p:style>
+          <a:lnRef idx="2">
+            <a:schemeClr val="accent1">
+              <a:shade val="50000"/>
+            </a:schemeClr>
+          </a:lnRef>
+          <a:fillRef idx="1">
+            <a:schemeClr val="accent1"/>
+          </a:fillRef>
+          <a:effectRef idx="0">
+            <a:schemeClr val="accent1"/>
+          </a:effectRef>
+          <a:fontRef idx="minor">
+            <a:schemeClr val="lt1"/>
+          </a:fontRef>
+        </p:style>
+        <p:txBody>
+          <a:bodyPr rtlCol="0" anchor="ctr"/>
+          <a:lstStyle/>
+          <a:p>
+            <a:pPr marL="0" marR="0" lvl="0" indent="0" algn="ctr" defTabSz="914400" rtl="0" eaLnBrk="1" fontAlgn="auto" latinLnBrk="0" hangingPunct="1">
+              <a:lnSpc>
+                <a:spcPct val="100000"/>
+              </a:lnSpc>
+              <a:spcBef>
+                <a:spcPts val="0"/>
+              </a:spcBef>
+              <a:spcAft>
+                <a:spcPts val="0"/>
+              </a:spcAft>
+              <a:buClrTx/>
+              <a:buSzTx/>
+              <a:buFontTx/>
+              <a:buNone/>
+              <a:tabLst/>
+              <a:defRPr/>
+            </a:pPr>
+            <a:endParaRPr kumimoji="0" lang="en-US" sz="1800" b="0" i="0" u="none" strike="noStrike" kern="1200" cap="none" spc="0" normalizeH="0" baseline="0" noProof="0">
+              <a:ln>
+                <a:noFill/>
+              </a:ln>
+              <a:solidFill>
+                <a:prstClr val="white"/>
+              </a:solidFill>
+              <a:effectLst/>
+              <a:uLnTx/>
+              <a:uFillTx/>
+              <a:latin typeface="Calibri" panose="020F0502020204030204"/>
+              <a:ea typeface="+mn-ea"/>
+              <a:cs typeface="+mn-cs"/>
+            </a:endParaRPr>
+          </a:p>
+        </p:txBody>
+      </p:sp>
+      <p:sp>
+        <p:nvSpPr>
+          <p:cNvPr id="17" name="Rectangle 16">
+            <a:extLst>
+              <a:ext uri="{FF2B5EF4-FFF2-40B4-BE49-F238E27FC236}">
+                <a16:creationId xmlns:a16="http://schemas.microsoft.com/office/drawing/2014/main" id="{08C9B587-E65E-4B52-B37C-ABEBB6E87928}"/>
+              </a:ext>
+              <a:ext uri="{C183D7F6-B498-43B3-948B-1728B52AA6E4}">
+                <adec:decorative xmlns:adec="http://schemas.microsoft.com/office/drawing/2017/decorative" val="1"/>
+              </a:ext>
+            </a:extLst>
+          </p:cNvPr>
+          <p:cNvSpPr>
+            <a:spLocks noGrp="1" noRot="1" noChangeAspect="1" noMove="1" noResize="1" noEditPoints="1" noAdjustHandles="1" noChangeArrowheads="1" noChangeShapeType="1" noTextEdit="1"/>
+          </p:cNvSpPr>
+          <p:nvPr>
+            <p:extLst>
+              <p:ext uri="{386F3935-93C4-4BCD-93E2-E3B085C9AB24}">
+                <p16:designElem xmlns:p16="http://schemas.microsoft.com/office/powerpoint/2015/main" val="1"/>
+              </p:ext>
+            </p:extLst>
+          </p:nvPr>
+        </p:nvSpPr>
+        <p:spPr>
+          <a:xfrm>
+            <a:off x="481029" y="4546920"/>
+            <a:ext cx="4023360" cy="18288"/>
+          </a:xfrm>
+          <a:prstGeom prst="rect">
+            <a:avLst/>
+          </a:prstGeom>
+          <a:solidFill>
+            <a:schemeClr val="tx2">
+              <a:lumMod val="25000"/>
+              <a:lumOff val="75000"/>
+            </a:schemeClr>
+          </a:solidFill>
+          <a:ln w="3175">
+            <a:noFill/>
+          </a:ln>
+          <a:effectLst/>
+        </p:spPr>
+        <p:style>
+          <a:lnRef idx="2">
+            <a:schemeClr val="accent1">
+              <a:shade val="50000"/>
+            </a:schemeClr>
+          </a:lnRef>
+          <a:fillRef idx="1">
+            <a:schemeClr val="accent1"/>
+          </a:fillRef>
+          <a:effectRef idx="0">
+            <a:schemeClr val="accent1"/>
+          </a:effectRef>
+          <a:fontRef idx="minor">
+            <a:schemeClr val="lt1"/>
+          </a:fontRef>
+        </p:style>
+        <p:txBody>
+          <a:bodyPr rtlCol="0" anchor="ctr"/>
+          <a:lstStyle/>
+          <a:p>
+            <a:pPr marL="0" marR="0" lvl="0" indent="0" algn="ctr" defTabSz="914400" rtl="0" eaLnBrk="1" fontAlgn="auto" latinLnBrk="0" hangingPunct="1">
+              <a:lnSpc>
+                <a:spcPct val="100000"/>
+              </a:lnSpc>
+              <a:spcBef>
+                <a:spcPts val="0"/>
+              </a:spcBef>
+              <a:spcAft>
+                <a:spcPts val="0"/>
+              </a:spcAft>
+              <a:buClrTx/>
+              <a:buSzTx/>
+              <a:buFontTx/>
+              <a:buNone/>
+              <a:tabLst/>
+              <a:defRPr/>
+            </a:pPr>
+            <a:endParaRPr kumimoji="0" lang="en-US" sz="1800" b="0" i="0" u="none" strike="noStrike" kern="1200" cap="none" spc="0" normalizeH="0" baseline="0" noProof="0">
+              <a:ln>
+                <a:noFill/>
+              </a:ln>
+              <a:solidFill>
+                <a:prstClr val="white"/>
+              </a:solidFill>
+              <a:effectLst/>
+              <a:uLnTx/>
+              <a:uFillTx/>
+              <a:latin typeface="Calibri" panose="020F0502020204030204"/>
+              <a:ea typeface="+mn-ea"/>
+              <a:cs typeface="+mn-cs"/>
+            </a:endParaRPr>
+          </a:p>
+        </p:txBody>
+      </p:sp>
+      <p:pic>
+        <p:nvPicPr>
+          <p:cNvPr id="4" name="Picture 3" descr="A collage of graphs and diagrams&#10;&#10;AI-generated content may be incorrect.">
+            <a:extLst>
+              <a:ext uri="{FF2B5EF4-FFF2-40B4-BE49-F238E27FC236}">
+                <a16:creationId xmlns:a16="http://schemas.microsoft.com/office/drawing/2014/main" id="{CAAD1876-3926-E0BB-2A99-49222522D993}"/>
+              </a:ext>
+            </a:extLst>
+          </p:cNvPr>
+          <p:cNvPicPr>
+            <a:picLocks noChangeAspect="1"/>
+          </p:cNvPicPr>
+          <p:nvPr/>
+        </p:nvPicPr>
+        <p:blipFill>
+          <a:blip r:embed="rId2"/>
+          <a:stretch>
+            <a:fillRect/>
+          </a:stretch>
+        </p:blipFill>
+        <p:spPr>
+          <a:xfrm>
+            <a:off x="5134390" y="625683"/>
+            <a:ext cx="6306798" cy="5455380"/>
+          </a:xfrm>
+          <a:prstGeom prst="rect">
+            <a:avLst/>
+          </a:prstGeom>
+        </p:spPr>
+      </p:pic>
+    </p:spTree>
+    <p:extLst>
+      <p:ext uri="{BB962C8B-B14F-4D97-AF65-F5344CB8AC3E}">
+        <p14:creationId xmlns:p14="http://schemas.microsoft.com/office/powerpoint/2010/main" val="758616608"/>
+      </p:ext>
+    </p:extLst>
+  </p:cSld>
+  <p:clrMapOvr>
+    <a:masterClrMapping/>
+  </p:clrMapOvr>
+  <p:timing>
+    <p:tnLst>
+      <p:par>
+        <p:cTn id="1" dur="indefinite" restart="never" nodeType="tmRoot">
+          <p:childTnLst>
+            <p:seq concurrent="1" nextAc="seek">
+              <p:cTn id="2" dur="indefinite" nodeType="mainSeq">
+                <p:childTnLst>
+                  <p:par>
+                    <p:cTn id="3" fill="hold">
+                      <p:stCondLst>
+                        <p:cond delay="indefinite"/>
+                        <p:cond evt="onBegin" delay="0">
+                          <p:tn val="2"/>
+                        </p:cond>
+                      </p:stCondLst>
+                      <p:childTnLst>
+                        <p:par>
+                          <p:cTn id="4" fill="hold">
+                            <p:stCondLst>
+                              <p:cond delay="0"/>
+                            </p:stCondLst>
+                            <p:childTnLst>
+                              <p:par>
+                                <p:cTn id="5" presetID="10" presetClass="entr" presetSubtype="0" fill="hold" grpId="0" nodeType="withEffect">
+                                  <p:stCondLst>
+                                    <p:cond delay="1000"/>
+                                  </p:stCondLst>
+                                  <p:iterate>
+                                    <p:tmPct val="10000"/>
+                                  </p:iterate>
+                                  <p:childTnLst>
+                                    <p:set>
+                                      <p:cBhvr>
+                                        <p:cTn id="6" dur="1" fill="hold">
+                                          <p:stCondLst>
+                                            <p:cond delay="0"/>
+                                          </p:stCondLst>
+                                        </p:cTn>
+                                        <p:tgtEl>
+                                          <p:spTgt spid="2"/>
+                                        </p:tgtEl>
+                                        <p:attrNameLst>
+                                          <p:attrName>style.visibility</p:attrName>
+                                        </p:attrNameLst>
+                                      </p:cBhvr>
+                                      <p:to>
+                                        <p:strVal val="visible"/>
+                                      </p:to>
+                                    </p:set>
+                                    <p:animEffect transition="in" filter="fade">
+                                      <p:cBhvr>
+                                        <p:cTn id="7" dur="700"/>
+                                        <p:tgtEl>
+                                          <p:spTgt spid="2"/>
+                                        </p:tgtEl>
+                                      </p:cBhvr>
+                                    </p:animEffect>
+                                  </p:childTnLst>
+                                </p:cTn>
+                              </p:par>
+                            </p:childTnLst>
+                          </p:cTn>
+                        </p:par>
+                      </p:childTnLst>
+                    </p:cTn>
+                  </p:par>
+                </p:childTnLst>
+              </p:cTn>
+              <p:prevCondLst>
+                <p:cond evt="onPrev" delay="0">
+                  <p:tgtEl>
+                    <p:sldTgt/>
+                  </p:tgtEl>
+                </p:cond>
+              </p:prevCondLst>
+              <p:nextCondLst>
+                <p:cond evt="onNext" delay="0">
+                  <p:tgtEl>
+                    <p:sldTgt/>
+                  </p:tgtEl>
+                </p:cond>
+              </p:nextCondLst>
+            </p:seq>
+          </p:childTnLst>
+        </p:cTn>
+      </p:par>
+    </p:tnLst>
+    <p:bldLst>
+      <p:bldP spid="2" grpId="0"/>
+    </p:bldLst>
+  </p:timing>
+</p:sld>
+</file>
+
+<file path=ppt/slides/slide19.xml><?xml version="1.0" encoding="utf-8"?>
+<p:sld xmlns:a="http://schemas.openxmlformats.org/drawingml/2006/main" xmlns:r="http://schemas.openxmlformats.org/officeDocument/2006/relationships" xmlns:p="http://schemas.openxmlformats.org/presentationml/2006/main">
+  <p:cSld>
+    <p:bg>
+      <p:bgPr>
+        <a:solidFill>
+          <a:schemeClr val="bg1"/>
+        </a:solidFill>
+        <a:effectLst/>
+      </p:bgPr>
+    </p:bg>
+    <p:spTree>
+      <p:nvGrpSpPr>
+        <p:cNvPr id="1" name="">
+          <a:extLst>
+            <a:ext uri="{FF2B5EF4-FFF2-40B4-BE49-F238E27FC236}">
+              <a16:creationId xmlns:a16="http://schemas.microsoft.com/office/drawing/2014/main" id="{A55FBB51-A433-29F1-D8AE-70098629A93D}"/>
+            </a:ext>
+          </a:extLst>
+        </p:cNvPr>
+        <p:cNvGrpSpPr/>
+        <p:nvPr/>
+      </p:nvGrpSpPr>
+      <p:grpSpPr>
+        <a:xfrm>
+          <a:off x="0" y="0"/>
+          <a:ext cx="0" cy="0"/>
+          <a:chOff x="0" y="0"/>
+          <a:chExt cx="0" cy="0"/>
+        </a:xfrm>
+      </p:grpSpPr>
+      <p:sp>
+        <p:nvSpPr>
+          <p:cNvPr id="9" name="Rectangle 8">
+            <a:extLst>
+              <a:ext uri="{FF2B5EF4-FFF2-40B4-BE49-F238E27FC236}">
+                <a16:creationId xmlns:a16="http://schemas.microsoft.com/office/drawing/2014/main" id="{8D06CE56-3881-4ADA-8CEF-D18B02C242A3}"/>
+              </a:ext>
+              <a:ext uri="{C183D7F6-B498-43B3-948B-1728B52AA6E4}">
+                <adec:decorative xmlns:adec="http://schemas.microsoft.com/office/drawing/2017/decorative" val="1"/>
+              </a:ext>
+            </a:extLst>
+          </p:cNvPr>
+          <p:cNvSpPr>
+            <a:spLocks noGrp="1" noRot="1" noChangeAspect="1" noMove="1" noResize="1" noEditPoints="1" noAdjustHandles="1" noChangeArrowheads="1" noChangeShapeType="1" noTextEdit="1"/>
+          </p:cNvSpPr>
+          <p:nvPr>
+            <p:extLst>
+              <p:ext uri="{386F3935-93C4-4BCD-93E2-E3B085C9AB24}">
+                <p16:designElem xmlns:p16="http://schemas.microsoft.com/office/powerpoint/2015/main" val="1"/>
+              </p:ext>
+            </p:extLst>
+          </p:nvPr>
+        </p:nvSpPr>
+        <p:spPr>
+          <a:xfrm rot="5400000">
+            <a:off x="857544" y="346791"/>
+            <a:ext cx="146304" cy="704088"/>
+          </a:xfrm>
+          <a:prstGeom prst="rect">
+            <a:avLst/>
+          </a:prstGeom>
+          <a:solidFill>
+            <a:schemeClr val="accent1"/>
+          </a:solidFill>
+          <a:ln>
+            <a:noFill/>
+          </a:ln>
+        </p:spPr>
+        <p:style>
+          <a:lnRef idx="2">
+            <a:schemeClr val="accent1">
+              <a:shade val="50000"/>
+            </a:schemeClr>
+          </a:lnRef>
+          <a:fillRef idx="1">
+            <a:schemeClr val="accent1"/>
+          </a:fillRef>
+          <a:effectRef idx="0">
+            <a:schemeClr val="accent1"/>
+          </a:effectRef>
+          <a:fontRef idx="minor">
+            <a:schemeClr val="lt1"/>
+          </a:fontRef>
+        </p:style>
+        <p:txBody>
+          <a:bodyPr rtlCol="0" anchor="ctr"/>
+          <a:lstStyle/>
+          <a:p>
+            <a:pPr marL="0" marR="0" lvl="0" indent="0" algn="ctr" defTabSz="914400" rtl="0" eaLnBrk="1" fontAlgn="auto" latinLnBrk="0" hangingPunct="1">
+              <a:lnSpc>
+                <a:spcPct val="100000"/>
+              </a:lnSpc>
+              <a:spcBef>
+                <a:spcPts val="0"/>
+              </a:spcBef>
+              <a:spcAft>
+                <a:spcPts val="0"/>
+              </a:spcAft>
+              <a:buClrTx/>
+              <a:buSzTx/>
+              <a:buFontTx/>
+              <a:buNone/>
+              <a:tabLst/>
+              <a:defRPr/>
+            </a:pPr>
+            <a:endParaRPr kumimoji="0" lang="en-US" sz="1800" b="0" i="0" u="none" strike="noStrike" kern="1200" cap="none" spc="0" normalizeH="0" baseline="0" noProof="0">
+              <a:ln>
+                <a:noFill/>
+              </a:ln>
+              <a:solidFill>
+                <a:prstClr val="white"/>
+              </a:solidFill>
+              <a:effectLst/>
+              <a:uLnTx/>
+              <a:uFillTx/>
+              <a:latin typeface="Calibri" panose="020F0502020204030204"/>
+              <a:ea typeface="+mn-ea"/>
+              <a:cs typeface="+mn-cs"/>
+            </a:endParaRPr>
+          </a:p>
+        </p:txBody>
+      </p:sp>
+      <p:sp>
+        <p:nvSpPr>
+          <p:cNvPr id="11" name="Rectangle 10">
+            <a:extLst>
+              <a:ext uri="{FF2B5EF4-FFF2-40B4-BE49-F238E27FC236}">
+                <a16:creationId xmlns:a16="http://schemas.microsoft.com/office/drawing/2014/main" id="{79F3C543-62EC-4433-9C93-A2CD8764E9B4}"/>
+              </a:ext>
+              <a:ext uri="{C183D7F6-B498-43B3-948B-1728B52AA6E4}">
+                <adec:decorative xmlns:adec="http://schemas.microsoft.com/office/drawing/2017/decorative" val="1"/>
+              </a:ext>
+            </a:extLst>
+          </p:cNvPr>
+          <p:cNvSpPr>
+            <a:spLocks noGrp="1" noRot="1" noChangeAspect="1" noMove="1" noResize="1" noEditPoints="1" noAdjustHandles="1" noChangeArrowheads="1" noChangeShapeType="1" noTextEdit="1"/>
+          </p:cNvSpPr>
+          <p:nvPr>
+            <p:extLst>
+              <p:ext uri="{386F3935-93C4-4BCD-93E2-E3B085C9AB24}">
+                <p16:designElem xmlns:p16="http://schemas.microsoft.com/office/powerpoint/2015/main" val="1"/>
+              </p:ext>
+            </p:extLst>
+          </p:nvPr>
+        </p:nvSpPr>
+        <p:spPr>
+          <a:xfrm flipV="1">
+            <a:off x="578652" y="4501201"/>
+            <a:ext cx="11034696" cy="18288"/>
+          </a:xfrm>
+          <a:prstGeom prst="rect">
+            <a:avLst/>
+          </a:prstGeom>
+          <a:solidFill>
+            <a:schemeClr val="tx2">
+              <a:lumMod val="25000"/>
+              <a:lumOff val="75000"/>
+            </a:schemeClr>
+          </a:solidFill>
+          <a:ln w="3175">
+            <a:noFill/>
+          </a:ln>
+          <a:effectLst/>
+        </p:spPr>
+        <p:style>
+          <a:lnRef idx="2">
+            <a:schemeClr val="accent1">
+              <a:shade val="50000"/>
+            </a:schemeClr>
+          </a:lnRef>
+          <a:fillRef idx="1">
+            <a:schemeClr val="accent1"/>
+          </a:fillRef>
+          <a:effectRef idx="0">
+            <a:schemeClr val="accent1"/>
+          </a:effectRef>
+          <a:fontRef idx="minor">
+            <a:schemeClr val="lt1"/>
+          </a:fontRef>
+        </p:style>
+        <p:txBody>
+          <a:bodyPr rtlCol="0" anchor="ctr"/>
+          <a:lstStyle/>
+          <a:p>
+            <a:pPr marL="0" marR="0" lvl="0" indent="0" algn="ctr" defTabSz="914400" rtl="0" eaLnBrk="1" fontAlgn="auto" latinLnBrk="0" hangingPunct="1">
+              <a:lnSpc>
+                <a:spcPct val="100000"/>
+              </a:lnSpc>
+              <a:spcBef>
+                <a:spcPts val="0"/>
+              </a:spcBef>
+              <a:spcAft>
+                <a:spcPts val="0"/>
+              </a:spcAft>
+              <a:buClrTx/>
+              <a:buSzTx/>
+              <a:buFontTx/>
+              <a:buNone/>
+              <a:tabLst/>
+              <a:defRPr/>
+            </a:pPr>
+            <a:endParaRPr kumimoji="0" lang="en-US" sz="1800" b="0" i="0" u="none" strike="noStrike" kern="1200" cap="none" spc="0" normalizeH="0" baseline="0" noProof="0">
+              <a:ln>
+                <a:noFill/>
+              </a:ln>
+              <a:solidFill>
+                <a:prstClr val="white"/>
+              </a:solidFill>
+              <a:effectLst/>
+              <a:uLnTx/>
+              <a:uFillTx/>
+              <a:latin typeface="Calibri" panose="020F0502020204030204"/>
+              <a:ea typeface="+mn-ea"/>
+              <a:cs typeface="+mn-cs"/>
+            </a:endParaRPr>
+          </a:p>
+        </p:txBody>
+      </p:sp>
+      <p:sp useBgFill="1">
+        <p:nvSpPr>
+          <p:cNvPr id="13" name="Rectangle 12">
+            <a:extLst>
+              <a:ext uri="{FF2B5EF4-FFF2-40B4-BE49-F238E27FC236}">
+                <a16:creationId xmlns:a16="http://schemas.microsoft.com/office/drawing/2014/main" id="{017517EF-BD4D-4055-BDB4-A322C53568AD}"/>
+              </a:ext>
+              <a:ext uri="{C183D7F6-B498-43B3-948B-1728B52AA6E4}">
+                <adec:decorative xmlns:adec="http://schemas.microsoft.com/office/drawing/2017/decorative" val="1"/>
+              </a:ext>
+            </a:extLst>
+          </p:cNvPr>
+          <p:cNvSpPr>
+            <a:spLocks noGrp="1" noRot="1" noChangeAspect="1" noMove="1" noResize="1" noEditPoints="1" noAdjustHandles="1" noChangeArrowheads="1" noChangeShapeType="1" noTextEdit="1"/>
+          </p:cNvSpPr>
+          <p:nvPr>
+            <p:extLst>
+              <p:ext uri="{386F3935-93C4-4BCD-93E2-E3B085C9AB24}">
+                <p16:designElem xmlns:p16="http://schemas.microsoft.com/office/powerpoint/2015/main" val="1"/>
+              </p:ext>
+            </p:extLst>
+          </p:nvPr>
+        </p:nvSpPr>
+        <p:spPr>
+          <a:xfrm>
+            <a:off x="0" y="0"/>
+            <a:ext cx="12192000" cy="6858000"/>
+          </a:xfrm>
+          <a:prstGeom prst="rect">
+            <a:avLst/>
+          </a:prstGeom>
+          <a:ln>
+            <a:noFill/>
+          </a:ln>
+        </p:spPr>
+        <p:style>
+          <a:lnRef idx="2">
+            <a:schemeClr val="accent1">
+              <a:shade val="50000"/>
+            </a:schemeClr>
+          </a:lnRef>
+          <a:fillRef idx="1">
+            <a:schemeClr val="accent1"/>
+          </a:fillRef>
+          <a:effectRef idx="0">
+            <a:schemeClr val="accent1"/>
+          </a:effectRef>
+          <a:fontRef idx="minor">
+            <a:schemeClr val="lt1"/>
+          </a:fontRef>
+        </p:style>
+        <p:txBody>
+          <a:bodyPr rtlCol="0" anchor="ctr"/>
+          <a:lstStyle/>
+          <a:p>
+            <a:pPr algn="ctr"/>
+            <a:endParaRPr lang="en-US"/>
+          </a:p>
+        </p:txBody>
+      </p:sp>
+      <p:sp useBgFill="1">
+        <p:nvSpPr>
+          <p:cNvPr id="15" name="Rectangle 14">
+            <a:extLst>
+              <a:ext uri="{FF2B5EF4-FFF2-40B4-BE49-F238E27FC236}">
+                <a16:creationId xmlns:a16="http://schemas.microsoft.com/office/drawing/2014/main" id="{0ADDB668-2CA4-4D2B-9C34-3487CA330BA8}"/>
+              </a:ext>
+              <a:ext uri="{C183D7F6-B498-43B3-948B-1728B52AA6E4}">
+                <adec:decorative xmlns:adec="http://schemas.microsoft.com/office/drawing/2017/decorative" val="1"/>
+              </a:ext>
+            </a:extLst>
+          </p:cNvPr>
+          <p:cNvSpPr>
+            <a:spLocks noGrp="1" noRot="1" noChangeAspect="1" noMove="1" noResize="1" noEditPoints="1" noAdjustHandles="1" noChangeArrowheads="1" noChangeShapeType="1" noTextEdit="1"/>
+          </p:cNvSpPr>
+          <p:nvPr>
+            <p:extLst>
+              <p:ext uri="{386F3935-93C4-4BCD-93E2-E3B085C9AB24}">
+                <p16:designElem xmlns:p16="http://schemas.microsoft.com/office/powerpoint/2015/main" val="1"/>
+              </p:ext>
+            </p:extLst>
+          </p:nvPr>
+        </p:nvSpPr>
+        <p:spPr>
+          <a:xfrm>
+            <a:off x="551553" y="304802"/>
+            <a:ext cx="11097349" cy="1573149"/>
+          </a:xfrm>
+          <a:prstGeom prst="rect">
+            <a:avLst/>
+          </a:prstGeom>
+          <a:ln w="12700">
+            <a:solidFill>
+              <a:schemeClr val="tx2">
+                <a:lumMod val="10000"/>
+                <a:lumOff val="90000"/>
+              </a:schemeClr>
+            </a:solidFill>
+          </a:ln>
+          <a:effectLst>
+            <a:outerShdw blurRad="50800" dist="38100" dir="2700000" algn="tl" rotWithShape="0">
+              <a:schemeClr val="bg2">
+                <a:lumMod val="85000"/>
+                <a:alpha val="30000"/>
+              </a:schemeClr>
+            </a:outerShdw>
+          </a:effectLst>
+        </p:spPr>
+        <p:style>
+          <a:lnRef idx="2">
+            <a:schemeClr val="accent1">
+              <a:shade val="50000"/>
+            </a:schemeClr>
+          </a:lnRef>
+          <a:fillRef idx="1">
+            <a:schemeClr val="accent1"/>
+          </a:fillRef>
+          <a:effectRef idx="0">
+            <a:schemeClr val="accent1"/>
+          </a:effectRef>
+          <a:fontRef idx="minor">
+            <a:schemeClr val="lt1"/>
+          </a:fontRef>
+        </p:style>
+        <p:txBody>
+          <a:bodyPr rtlCol="0" anchor="ctr"/>
+          <a:lstStyle/>
+          <a:p>
+            <a:pPr marL="0" marR="0" lvl="0" indent="0" algn="ctr" defTabSz="914400" rtl="0" eaLnBrk="1" fontAlgn="auto" latinLnBrk="0" hangingPunct="1">
+              <a:lnSpc>
+                <a:spcPct val="100000"/>
+              </a:lnSpc>
+              <a:spcBef>
+                <a:spcPts val="0"/>
+              </a:spcBef>
+              <a:spcAft>
+                <a:spcPts val="0"/>
+              </a:spcAft>
+              <a:buClrTx/>
+              <a:buSzTx/>
+              <a:buFontTx/>
+              <a:buNone/>
+              <a:tabLst/>
+              <a:defRPr/>
+            </a:pPr>
+            <a:endParaRPr kumimoji="0" lang="en-US" sz="1800" b="0" i="0" u="none" strike="noStrike" kern="1200" cap="none" spc="0" normalizeH="0" baseline="0" noProof="0">
+              <a:ln>
+                <a:noFill/>
+              </a:ln>
+              <a:solidFill>
+                <a:prstClr val="white"/>
+              </a:solidFill>
+              <a:effectLst/>
+              <a:uLnTx/>
+              <a:uFillTx/>
+              <a:latin typeface="Calibri" panose="020F0502020204030204"/>
+              <a:ea typeface="+mn-ea"/>
+              <a:cs typeface="+mn-cs"/>
+            </a:endParaRPr>
+          </a:p>
+        </p:txBody>
+      </p:sp>
+      <p:sp>
+        <p:nvSpPr>
+          <p:cNvPr id="2" name="Title 1">
+            <a:extLst>
+              <a:ext uri="{FF2B5EF4-FFF2-40B4-BE49-F238E27FC236}">
+                <a16:creationId xmlns:a16="http://schemas.microsoft.com/office/drawing/2014/main" id="{033B8511-8D17-F86D-D93F-496D509F7574}"/>
+              </a:ext>
+            </a:extLst>
+          </p:cNvPr>
+          <p:cNvSpPr>
+            <a:spLocks noGrp="1"/>
+          </p:cNvSpPr>
+          <p:nvPr>
+            <p:ph type="title"/>
+          </p:nvPr>
+        </p:nvSpPr>
+        <p:spPr>
+          <a:xfrm>
+            <a:off x="901690" y="405575"/>
+            <a:ext cx="10711658" cy="1371600"/>
+          </a:xfrm>
+        </p:spPr>
+        <p:txBody>
+          <a:bodyPr vert="horz" lIns="91440" tIns="45720" rIns="91440" bIns="45720" rtlCol="0" anchor="ctr">
+            <a:normAutofit/>
+          </a:bodyPr>
+          <a:lstStyle/>
+          <a:p>
+            <a:pPr>
+              <a:defRPr sz="2800"/>
+            </a:pPr>
+            <a:r>
+              <a:rPr lang="en-US" sz="3200" dirty="0"/>
+              <a:t>Figure 4 – ﻿Impact of different rates and rate constants </a:t>
+            </a:r>
+          </a:p>
+        </p:txBody>
+      </p:sp>
+      <p:sp>
+        <p:nvSpPr>
+          <p:cNvPr id="17" name="Rectangle 16">
+            <a:extLst>
+              <a:ext uri="{FF2B5EF4-FFF2-40B4-BE49-F238E27FC236}">
+                <a16:creationId xmlns:a16="http://schemas.microsoft.com/office/drawing/2014/main" id="{2568BC19-F052-4108-93E1-6A3D1DEC072F}"/>
+              </a:ext>
+              <a:ext uri="{C183D7F6-B498-43B3-948B-1728B52AA6E4}">
+                <adec:decorative xmlns:adec="http://schemas.microsoft.com/office/drawing/2017/decorative" val="1"/>
+              </a:ext>
+            </a:extLst>
+          </p:cNvPr>
+          <p:cNvSpPr>
+            <a:spLocks noGrp="1" noRot="1" noChangeAspect="1" noMove="1" noResize="1" noEditPoints="1" noAdjustHandles="1" noChangeArrowheads="1" noChangeShapeType="1" noTextEdit="1"/>
+          </p:cNvSpPr>
+          <p:nvPr>
+            <p:extLst>
+              <p:ext uri="{386F3935-93C4-4BCD-93E2-E3B085C9AB24}">
+                <p16:designElem xmlns:p16="http://schemas.microsoft.com/office/powerpoint/2015/main" val="1"/>
+              </p:ext>
+            </p:extLst>
+          </p:nvPr>
+        </p:nvSpPr>
+        <p:spPr>
+          <a:xfrm>
+            <a:off x="494784" y="764424"/>
+            <a:ext cx="128016" cy="653903"/>
+          </a:xfrm>
+          <a:prstGeom prst="rect">
+            <a:avLst/>
+          </a:prstGeom>
+          <a:solidFill>
+            <a:schemeClr val="accent1"/>
+          </a:solidFill>
+          <a:ln>
+            <a:noFill/>
+          </a:ln>
+        </p:spPr>
+        <p:style>
+          <a:lnRef idx="2">
+            <a:schemeClr val="accent1">
+              <a:shade val="50000"/>
+            </a:schemeClr>
+          </a:lnRef>
+          <a:fillRef idx="1">
+            <a:schemeClr val="accent1"/>
+          </a:fillRef>
+          <a:effectRef idx="0">
+            <a:schemeClr val="accent1"/>
+          </a:effectRef>
+          <a:fontRef idx="minor">
+            <a:schemeClr val="lt1"/>
+          </a:fontRef>
+        </p:style>
+        <p:txBody>
+          <a:bodyPr rtlCol="0" anchor="ctr"/>
+          <a:lstStyle/>
+          <a:p>
+            <a:pPr marL="0" marR="0" lvl="0" indent="0" algn="ctr" defTabSz="914400" rtl="0" eaLnBrk="1" fontAlgn="auto" latinLnBrk="0" hangingPunct="1">
+              <a:lnSpc>
+                <a:spcPct val="100000"/>
+              </a:lnSpc>
+              <a:spcBef>
+                <a:spcPts val="0"/>
+              </a:spcBef>
+              <a:spcAft>
+                <a:spcPts val="0"/>
+              </a:spcAft>
+              <a:buClrTx/>
+              <a:buSzTx/>
+              <a:buFontTx/>
+              <a:buNone/>
+              <a:tabLst/>
+              <a:defRPr/>
+            </a:pPr>
+            <a:endParaRPr kumimoji="0" lang="en-US" sz="1800" b="0" i="0" u="none" strike="noStrike" kern="1200" cap="none" spc="0" normalizeH="0" baseline="0" noProof="0">
+              <a:ln>
+                <a:noFill/>
+              </a:ln>
+              <a:solidFill>
+                <a:prstClr val="white"/>
+              </a:solidFill>
+              <a:effectLst/>
+              <a:uLnTx/>
+              <a:uFillTx/>
+              <a:latin typeface="Calibri" panose="020F0502020204030204"/>
+              <a:ea typeface="+mn-ea"/>
+              <a:cs typeface="+mn-cs"/>
+            </a:endParaRPr>
+          </a:p>
+        </p:txBody>
+      </p:sp>
+      <p:sp>
+        <p:nvSpPr>
+          <p:cNvPr id="19" name="Rectangle 18">
+            <a:extLst>
+              <a:ext uri="{FF2B5EF4-FFF2-40B4-BE49-F238E27FC236}">
+                <a16:creationId xmlns:a16="http://schemas.microsoft.com/office/drawing/2014/main" id="{D5FD337D-4D6B-4C8B-B6F5-121097E09881}"/>
+              </a:ext>
+              <a:ext uri="{C183D7F6-B498-43B3-948B-1728B52AA6E4}">
+                <adec:decorative xmlns:adec="http://schemas.microsoft.com/office/drawing/2017/decorative" val="1"/>
+              </a:ext>
+            </a:extLst>
+          </p:cNvPr>
+          <p:cNvSpPr>
+            <a:spLocks noGrp="1" noRot="1" noChangeAspect="1" noMove="1" noResize="1" noEditPoints="1" noAdjustHandles="1" noChangeArrowheads="1" noChangeShapeType="1" noTextEdit="1"/>
+          </p:cNvSpPr>
+          <p:nvPr>
+            <p:extLst>
+              <p:ext uri="{386F3935-93C4-4BCD-93E2-E3B085C9AB24}">
+                <p16:designElem xmlns:p16="http://schemas.microsoft.com/office/powerpoint/2015/main" val="1"/>
+              </p:ext>
+            </p:extLst>
+          </p:nvPr>
+        </p:nvSpPr>
+        <p:spPr>
+          <a:xfrm rot="5400000">
+            <a:off x="7130604" y="1071836"/>
+            <a:ext cx="1021458" cy="9144"/>
+          </a:xfrm>
+          <a:prstGeom prst="rect">
+            <a:avLst/>
+          </a:prstGeom>
+          <a:solidFill>
+            <a:schemeClr val="tx2">
+              <a:lumMod val="25000"/>
+              <a:lumOff val="75000"/>
+            </a:schemeClr>
+          </a:solidFill>
+          <a:ln w="3175">
+            <a:noFill/>
+          </a:ln>
+          <a:effectLst/>
+        </p:spPr>
+        <p:style>
+          <a:lnRef idx="2">
+            <a:schemeClr val="accent1">
+              <a:shade val="50000"/>
+            </a:schemeClr>
+          </a:lnRef>
+          <a:fillRef idx="1">
+            <a:schemeClr val="accent1"/>
+          </a:fillRef>
+          <a:effectRef idx="0">
+            <a:schemeClr val="accent1"/>
+          </a:effectRef>
+          <a:fontRef idx="minor">
+            <a:schemeClr val="lt1"/>
+          </a:fontRef>
+        </p:style>
+        <p:txBody>
+          <a:bodyPr rtlCol="0" anchor="ctr"/>
+          <a:lstStyle/>
+          <a:p>
+            <a:pPr marL="0" marR="0" lvl="0" indent="0" algn="ctr" defTabSz="914400" rtl="0" eaLnBrk="1" fontAlgn="auto" latinLnBrk="0" hangingPunct="1">
+              <a:lnSpc>
+                <a:spcPct val="100000"/>
+              </a:lnSpc>
+              <a:spcBef>
+                <a:spcPts val="0"/>
+              </a:spcBef>
+              <a:spcAft>
+                <a:spcPts val="0"/>
+              </a:spcAft>
+              <a:buClrTx/>
+              <a:buSzTx/>
+              <a:buFontTx/>
+              <a:buNone/>
+              <a:tabLst/>
+              <a:defRPr/>
+            </a:pPr>
+            <a:endParaRPr kumimoji="0" lang="en-US" sz="1800" b="0" i="0" u="none" strike="noStrike" kern="1200" cap="none" spc="0" normalizeH="0" baseline="0" noProof="0">
+              <a:ln>
+                <a:noFill/>
+              </a:ln>
+              <a:solidFill>
+                <a:prstClr val="white"/>
+              </a:solidFill>
+              <a:effectLst/>
+              <a:uLnTx/>
+              <a:uFillTx/>
+              <a:latin typeface="Calibri" panose="020F0502020204030204"/>
+              <a:ea typeface="+mn-ea"/>
+              <a:cs typeface="+mn-cs"/>
+            </a:endParaRPr>
+          </a:p>
+        </p:txBody>
+      </p:sp>
+      <p:pic>
+        <p:nvPicPr>
+          <p:cNvPr id="4" name="Picture 3" descr="A diagram of a black and red dotted diagram&#10;&#10;AI-generated content may be incorrect.">
+            <a:extLst>
+              <a:ext uri="{FF2B5EF4-FFF2-40B4-BE49-F238E27FC236}">
+                <a16:creationId xmlns:a16="http://schemas.microsoft.com/office/drawing/2014/main" id="{11CEAA51-168B-EA42-CBA3-BB76B314A684}"/>
+              </a:ext>
+            </a:extLst>
+          </p:cNvPr>
+          <p:cNvPicPr>
+            <a:picLocks noChangeAspect="1"/>
+          </p:cNvPicPr>
+          <p:nvPr/>
+        </p:nvPicPr>
+        <p:blipFill>
+          <a:blip r:embed="rId2"/>
+          <a:stretch>
+            <a:fillRect/>
+          </a:stretch>
+        </p:blipFill>
+        <p:spPr>
+          <a:xfrm>
+            <a:off x="1290600" y="2091095"/>
+            <a:ext cx="9614265" cy="4206240"/>
+          </a:xfrm>
+          <a:prstGeom prst="rect">
+            <a:avLst/>
+          </a:prstGeom>
+        </p:spPr>
+      </p:pic>
+    </p:spTree>
+    <p:extLst>
+      <p:ext uri="{BB962C8B-B14F-4D97-AF65-F5344CB8AC3E}">
+        <p14:creationId xmlns:p14="http://schemas.microsoft.com/office/powerpoint/2010/main" val="1959032021"/>
+      </p:ext>
+    </p:extLst>
+  </p:cSld>
+  <p:clrMapOvr>
+    <a:masterClrMapping/>
+  </p:clrMapOvr>
+</p:sld>
+</file>
+
 <file path=ppt/slides/slide2.xml><?xml version="1.0" encoding="utf-8"?>
 <p:sld xmlns:a="http://schemas.openxmlformats.org/drawingml/2006/main" xmlns:r="http://schemas.openxmlformats.org/officeDocument/2006/relationships" xmlns:p="http://schemas.openxmlformats.org/presentationml/2006/main">
   <p:cSld>
@@ -7814,6 +11778,1972 @@
     <p:extLst>
       <p:ext uri="{BB962C8B-B14F-4D97-AF65-F5344CB8AC3E}">
         <p14:creationId xmlns:p14="http://schemas.microsoft.com/office/powerpoint/2010/main" val="1546263360"/>
+      </p:ext>
+    </p:extLst>
+  </p:cSld>
+  <p:clrMapOvr>
+    <a:masterClrMapping/>
+  </p:clrMapOvr>
+</p:sld>
+</file>
+
+<file path=ppt/slides/slide20.xml><?xml version="1.0" encoding="utf-8"?>
+<p:sld xmlns:a="http://schemas.openxmlformats.org/drawingml/2006/main" xmlns:r="http://schemas.openxmlformats.org/officeDocument/2006/relationships" xmlns:p="http://schemas.openxmlformats.org/presentationml/2006/main">
+  <p:cSld>
+    <p:bg>
+      <p:bgPr>
+        <a:solidFill>
+          <a:schemeClr val="bg1"/>
+        </a:solidFill>
+        <a:effectLst/>
+      </p:bgPr>
+    </p:bg>
+    <p:spTree>
+      <p:nvGrpSpPr>
+        <p:cNvPr id="1" name="">
+          <a:extLst>
+            <a:ext uri="{FF2B5EF4-FFF2-40B4-BE49-F238E27FC236}">
+              <a16:creationId xmlns:a16="http://schemas.microsoft.com/office/drawing/2014/main" id="{5A8695ED-7E1B-4367-7FE5-0AD8F1EF0672}"/>
+            </a:ext>
+          </a:extLst>
+        </p:cNvPr>
+        <p:cNvGrpSpPr/>
+        <p:nvPr/>
+      </p:nvGrpSpPr>
+      <p:grpSpPr>
+        <a:xfrm>
+          <a:off x="0" y="0"/>
+          <a:ext cx="0" cy="0"/>
+          <a:chOff x="0" y="0"/>
+          <a:chExt cx="0" cy="0"/>
+        </a:xfrm>
+      </p:grpSpPr>
+      <p:sp>
+        <p:nvSpPr>
+          <p:cNvPr id="9" name="Rectangle 8">
+            <a:extLst>
+              <a:ext uri="{FF2B5EF4-FFF2-40B4-BE49-F238E27FC236}">
+                <a16:creationId xmlns:a16="http://schemas.microsoft.com/office/drawing/2014/main" id="{8D06CE56-3881-4ADA-8CEF-D18B02C242A3}"/>
+              </a:ext>
+              <a:ext uri="{C183D7F6-B498-43B3-948B-1728B52AA6E4}">
+                <adec:decorative xmlns:adec="http://schemas.microsoft.com/office/drawing/2017/decorative" val="1"/>
+              </a:ext>
+            </a:extLst>
+          </p:cNvPr>
+          <p:cNvSpPr>
+            <a:spLocks noGrp="1" noRot="1" noChangeAspect="1" noMove="1" noResize="1" noEditPoints="1" noAdjustHandles="1" noChangeArrowheads="1" noChangeShapeType="1" noTextEdit="1"/>
+          </p:cNvSpPr>
+          <p:nvPr>
+            <p:extLst>
+              <p:ext uri="{386F3935-93C4-4BCD-93E2-E3B085C9AB24}">
+                <p16:designElem xmlns:p16="http://schemas.microsoft.com/office/powerpoint/2015/main" val="1"/>
+              </p:ext>
+            </p:extLst>
+          </p:nvPr>
+        </p:nvSpPr>
+        <p:spPr>
+          <a:xfrm rot="5400000">
+            <a:off x="857544" y="346791"/>
+            <a:ext cx="146304" cy="704088"/>
+          </a:xfrm>
+          <a:prstGeom prst="rect">
+            <a:avLst/>
+          </a:prstGeom>
+          <a:solidFill>
+            <a:schemeClr val="accent1"/>
+          </a:solidFill>
+          <a:ln>
+            <a:noFill/>
+          </a:ln>
+        </p:spPr>
+        <p:style>
+          <a:lnRef idx="2">
+            <a:schemeClr val="accent1">
+              <a:shade val="50000"/>
+            </a:schemeClr>
+          </a:lnRef>
+          <a:fillRef idx="1">
+            <a:schemeClr val="accent1"/>
+          </a:fillRef>
+          <a:effectRef idx="0">
+            <a:schemeClr val="accent1"/>
+          </a:effectRef>
+          <a:fontRef idx="minor">
+            <a:schemeClr val="lt1"/>
+          </a:fontRef>
+        </p:style>
+        <p:txBody>
+          <a:bodyPr rtlCol="0" anchor="ctr"/>
+          <a:lstStyle/>
+          <a:p>
+            <a:pPr marL="0" marR="0" lvl="0" indent="0" algn="ctr" defTabSz="914400" rtl="0" eaLnBrk="1" fontAlgn="auto" latinLnBrk="0" hangingPunct="1">
+              <a:lnSpc>
+                <a:spcPct val="100000"/>
+              </a:lnSpc>
+              <a:spcBef>
+                <a:spcPts val="0"/>
+              </a:spcBef>
+              <a:spcAft>
+                <a:spcPts val="0"/>
+              </a:spcAft>
+              <a:buClrTx/>
+              <a:buSzTx/>
+              <a:buFontTx/>
+              <a:buNone/>
+              <a:tabLst/>
+              <a:defRPr/>
+            </a:pPr>
+            <a:endParaRPr kumimoji="0" lang="en-US" sz="1800" b="0" i="0" u="none" strike="noStrike" kern="1200" cap="none" spc="0" normalizeH="0" baseline="0" noProof="0">
+              <a:ln>
+                <a:noFill/>
+              </a:ln>
+              <a:solidFill>
+                <a:prstClr val="white"/>
+              </a:solidFill>
+              <a:effectLst/>
+              <a:uLnTx/>
+              <a:uFillTx/>
+              <a:latin typeface="Calibri" panose="020F0502020204030204"/>
+              <a:ea typeface="+mn-ea"/>
+              <a:cs typeface="+mn-cs"/>
+            </a:endParaRPr>
+          </a:p>
+        </p:txBody>
+      </p:sp>
+      <p:sp>
+        <p:nvSpPr>
+          <p:cNvPr id="11" name="Rectangle 10">
+            <a:extLst>
+              <a:ext uri="{FF2B5EF4-FFF2-40B4-BE49-F238E27FC236}">
+                <a16:creationId xmlns:a16="http://schemas.microsoft.com/office/drawing/2014/main" id="{79F3C543-62EC-4433-9C93-A2CD8764E9B4}"/>
+              </a:ext>
+              <a:ext uri="{C183D7F6-B498-43B3-948B-1728B52AA6E4}">
+                <adec:decorative xmlns:adec="http://schemas.microsoft.com/office/drawing/2017/decorative" val="1"/>
+              </a:ext>
+            </a:extLst>
+          </p:cNvPr>
+          <p:cNvSpPr>
+            <a:spLocks noGrp="1" noRot="1" noChangeAspect="1" noMove="1" noResize="1" noEditPoints="1" noAdjustHandles="1" noChangeArrowheads="1" noChangeShapeType="1" noTextEdit="1"/>
+          </p:cNvSpPr>
+          <p:nvPr>
+            <p:extLst>
+              <p:ext uri="{386F3935-93C4-4BCD-93E2-E3B085C9AB24}">
+                <p16:designElem xmlns:p16="http://schemas.microsoft.com/office/powerpoint/2015/main" val="1"/>
+              </p:ext>
+            </p:extLst>
+          </p:nvPr>
+        </p:nvSpPr>
+        <p:spPr>
+          <a:xfrm flipV="1">
+            <a:off x="578652" y="4501201"/>
+            <a:ext cx="11034696" cy="18288"/>
+          </a:xfrm>
+          <a:prstGeom prst="rect">
+            <a:avLst/>
+          </a:prstGeom>
+          <a:solidFill>
+            <a:schemeClr val="tx2">
+              <a:lumMod val="25000"/>
+              <a:lumOff val="75000"/>
+            </a:schemeClr>
+          </a:solidFill>
+          <a:ln w="3175">
+            <a:noFill/>
+          </a:ln>
+          <a:effectLst/>
+        </p:spPr>
+        <p:style>
+          <a:lnRef idx="2">
+            <a:schemeClr val="accent1">
+              <a:shade val="50000"/>
+            </a:schemeClr>
+          </a:lnRef>
+          <a:fillRef idx="1">
+            <a:schemeClr val="accent1"/>
+          </a:fillRef>
+          <a:effectRef idx="0">
+            <a:schemeClr val="accent1"/>
+          </a:effectRef>
+          <a:fontRef idx="minor">
+            <a:schemeClr val="lt1"/>
+          </a:fontRef>
+        </p:style>
+        <p:txBody>
+          <a:bodyPr rtlCol="0" anchor="ctr"/>
+          <a:lstStyle/>
+          <a:p>
+            <a:pPr marL="0" marR="0" lvl="0" indent="0" algn="ctr" defTabSz="914400" rtl="0" eaLnBrk="1" fontAlgn="auto" latinLnBrk="0" hangingPunct="1">
+              <a:lnSpc>
+                <a:spcPct val="100000"/>
+              </a:lnSpc>
+              <a:spcBef>
+                <a:spcPts val="0"/>
+              </a:spcBef>
+              <a:spcAft>
+                <a:spcPts val="0"/>
+              </a:spcAft>
+              <a:buClrTx/>
+              <a:buSzTx/>
+              <a:buFontTx/>
+              <a:buNone/>
+              <a:tabLst/>
+              <a:defRPr/>
+            </a:pPr>
+            <a:endParaRPr kumimoji="0" lang="en-US" sz="1800" b="0" i="0" u="none" strike="noStrike" kern="1200" cap="none" spc="0" normalizeH="0" baseline="0" noProof="0">
+              <a:ln>
+                <a:noFill/>
+              </a:ln>
+              <a:solidFill>
+                <a:prstClr val="white"/>
+              </a:solidFill>
+              <a:effectLst/>
+              <a:uLnTx/>
+              <a:uFillTx/>
+              <a:latin typeface="Calibri" panose="020F0502020204030204"/>
+              <a:ea typeface="+mn-ea"/>
+              <a:cs typeface="+mn-cs"/>
+            </a:endParaRPr>
+          </a:p>
+        </p:txBody>
+      </p:sp>
+      <p:sp useBgFill="1">
+        <p:nvSpPr>
+          <p:cNvPr id="13" name="Rectangle 12">
+            <a:extLst>
+              <a:ext uri="{FF2B5EF4-FFF2-40B4-BE49-F238E27FC236}">
+                <a16:creationId xmlns:a16="http://schemas.microsoft.com/office/drawing/2014/main" id="{68AF5748-FED8-45BA-8631-26D1D10F3246}"/>
+              </a:ext>
+              <a:ext uri="{C183D7F6-B498-43B3-948B-1728B52AA6E4}">
+                <adec:decorative xmlns:adec="http://schemas.microsoft.com/office/drawing/2017/decorative" val="1"/>
+              </a:ext>
+            </a:extLst>
+          </p:cNvPr>
+          <p:cNvSpPr>
+            <a:spLocks noGrp="1" noRot="1" noChangeAspect="1" noMove="1" noResize="1" noEditPoints="1" noAdjustHandles="1" noChangeArrowheads="1" noChangeShapeType="1" noTextEdit="1"/>
+          </p:cNvSpPr>
+          <p:nvPr>
+            <p:extLst>
+              <p:ext uri="{386F3935-93C4-4BCD-93E2-E3B085C9AB24}">
+                <p16:designElem xmlns:p16="http://schemas.microsoft.com/office/powerpoint/2015/main" val="1"/>
+              </p:ext>
+            </p:extLst>
+          </p:nvPr>
+        </p:nvSpPr>
+        <p:spPr>
+          <a:xfrm>
+            <a:off x="0" y="0"/>
+            <a:ext cx="12192000" cy="6858000"/>
+          </a:xfrm>
+          <a:prstGeom prst="rect">
+            <a:avLst/>
+          </a:prstGeom>
+          <a:ln>
+            <a:noFill/>
+          </a:ln>
+        </p:spPr>
+        <p:style>
+          <a:lnRef idx="2">
+            <a:schemeClr val="accent1">
+              <a:shade val="50000"/>
+            </a:schemeClr>
+          </a:lnRef>
+          <a:fillRef idx="1">
+            <a:schemeClr val="accent1"/>
+          </a:fillRef>
+          <a:effectRef idx="0">
+            <a:schemeClr val="accent1"/>
+          </a:effectRef>
+          <a:fontRef idx="minor">
+            <a:schemeClr val="lt1"/>
+          </a:fontRef>
+        </p:style>
+        <p:txBody>
+          <a:bodyPr rtlCol="0" anchor="ctr"/>
+          <a:lstStyle/>
+          <a:p>
+            <a:pPr algn="ctr"/>
+            <a:endParaRPr lang="en-US"/>
+          </a:p>
+        </p:txBody>
+      </p:sp>
+      <p:sp>
+        <p:nvSpPr>
+          <p:cNvPr id="2" name="Title 1">
+            <a:extLst>
+              <a:ext uri="{FF2B5EF4-FFF2-40B4-BE49-F238E27FC236}">
+                <a16:creationId xmlns:a16="http://schemas.microsoft.com/office/drawing/2014/main" id="{D82AD849-5E43-1BBC-A390-887F3A4FF129}"/>
+              </a:ext>
+            </a:extLst>
+          </p:cNvPr>
+          <p:cNvSpPr>
+            <a:spLocks noGrp="1"/>
+          </p:cNvSpPr>
+          <p:nvPr>
+            <p:ph type="title"/>
+          </p:nvPr>
+        </p:nvSpPr>
+        <p:spPr>
+          <a:xfrm>
+            <a:off x="477981" y="1122363"/>
+            <a:ext cx="4023360" cy="3204134"/>
+          </a:xfrm>
+        </p:spPr>
+        <p:txBody>
+          <a:bodyPr vert="horz" lIns="91440" tIns="45720" rIns="91440" bIns="45720" rtlCol="0" anchor="b">
+            <a:normAutofit/>
+          </a:bodyPr>
+          <a:lstStyle/>
+          <a:p>
+            <a:pPr>
+              <a:defRPr sz="2800"/>
+            </a:pPr>
+            <a:r>
+              <a:rPr lang="en-US" sz="4800" dirty="0"/>
+              <a:t>Figure 5 – Functional enrichment</a:t>
+            </a:r>
+          </a:p>
+        </p:txBody>
+      </p:sp>
+      <p:sp>
+        <p:nvSpPr>
+          <p:cNvPr id="15" name="Rectangle 14">
+            <a:extLst>
+              <a:ext uri="{FF2B5EF4-FFF2-40B4-BE49-F238E27FC236}">
+                <a16:creationId xmlns:a16="http://schemas.microsoft.com/office/drawing/2014/main" id="{AF2F604E-43BE-4DC3-B983-E071523364F8}"/>
+              </a:ext>
+              <a:ext uri="{C183D7F6-B498-43B3-948B-1728B52AA6E4}">
+                <adec:decorative xmlns:adec="http://schemas.microsoft.com/office/drawing/2017/decorative" val="1"/>
+              </a:ext>
+            </a:extLst>
+          </p:cNvPr>
+          <p:cNvSpPr>
+            <a:spLocks noGrp="1" noRot="1" noChangeAspect="1" noMove="1" noResize="1" noEditPoints="1" noAdjustHandles="1" noChangeArrowheads="1" noChangeShapeType="1" noTextEdit="1"/>
+          </p:cNvSpPr>
+          <p:nvPr>
+            <p:extLst>
+              <p:ext uri="{386F3935-93C4-4BCD-93E2-E3B085C9AB24}">
+                <p16:designElem xmlns:p16="http://schemas.microsoft.com/office/powerpoint/2015/main" val="1"/>
+              </p:ext>
+            </p:extLst>
+          </p:nvPr>
+        </p:nvSpPr>
+        <p:spPr>
+          <a:xfrm rot="5400000">
+            <a:off x="759921" y="346791"/>
+            <a:ext cx="146304" cy="704088"/>
+          </a:xfrm>
+          <a:prstGeom prst="rect">
+            <a:avLst/>
+          </a:prstGeom>
+          <a:solidFill>
+            <a:schemeClr val="accent1"/>
+          </a:solidFill>
+          <a:ln>
+            <a:noFill/>
+          </a:ln>
+        </p:spPr>
+        <p:style>
+          <a:lnRef idx="2">
+            <a:schemeClr val="accent1">
+              <a:shade val="50000"/>
+            </a:schemeClr>
+          </a:lnRef>
+          <a:fillRef idx="1">
+            <a:schemeClr val="accent1"/>
+          </a:fillRef>
+          <a:effectRef idx="0">
+            <a:schemeClr val="accent1"/>
+          </a:effectRef>
+          <a:fontRef idx="minor">
+            <a:schemeClr val="lt1"/>
+          </a:fontRef>
+        </p:style>
+        <p:txBody>
+          <a:bodyPr rtlCol="0" anchor="ctr"/>
+          <a:lstStyle/>
+          <a:p>
+            <a:pPr marL="0" marR="0" lvl="0" indent="0" algn="ctr" defTabSz="914400" rtl="0" eaLnBrk="1" fontAlgn="auto" latinLnBrk="0" hangingPunct="1">
+              <a:lnSpc>
+                <a:spcPct val="100000"/>
+              </a:lnSpc>
+              <a:spcBef>
+                <a:spcPts val="0"/>
+              </a:spcBef>
+              <a:spcAft>
+                <a:spcPts val="0"/>
+              </a:spcAft>
+              <a:buClrTx/>
+              <a:buSzTx/>
+              <a:buFontTx/>
+              <a:buNone/>
+              <a:tabLst/>
+              <a:defRPr/>
+            </a:pPr>
+            <a:endParaRPr kumimoji="0" lang="en-US" sz="1800" b="0" i="0" u="none" strike="noStrike" kern="1200" cap="none" spc="0" normalizeH="0" baseline="0" noProof="0">
+              <a:ln>
+                <a:noFill/>
+              </a:ln>
+              <a:solidFill>
+                <a:prstClr val="white"/>
+              </a:solidFill>
+              <a:effectLst/>
+              <a:uLnTx/>
+              <a:uFillTx/>
+              <a:latin typeface="Calibri" panose="020F0502020204030204"/>
+              <a:ea typeface="+mn-ea"/>
+              <a:cs typeface="+mn-cs"/>
+            </a:endParaRPr>
+          </a:p>
+        </p:txBody>
+      </p:sp>
+      <p:sp>
+        <p:nvSpPr>
+          <p:cNvPr id="17" name="Rectangle 16">
+            <a:extLst>
+              <a:ext uri="{FF2B5EF4-FFF2-40B4-BE49-F238E27FC236}">
+                <a16:creationId xmlns:a16="http://schemas.microsoft.com/office/drawing/2014/main" id="{08C9B587-E65E-4B52-B37C-ABEBB6E87928}"/>
+              </a:ext>
+              <a:ext uri="{C183D7F6-B498-43B3-948B-1728B52AA6E4}">
+                <adec:decorative xmlns:adec="http://schemas.microsoft.com/office/drawing/2017/decorative" val="1"/>
+              </a:ext>
+            </a:extLst>
+          </p:cNvPr>
+          <p:cNvSpPr>
+            <a:spLocks noGrp="1" noRot="1" noChangeAspect="1" noMove="1" noResize="1" noEditPoints="1" noAdjustHandles="1" noChangeArrowheads="1" noChangeShapeType="1" noTextEdit="1"/>
+          </p:cNvSpPr>
+          <p:nvPr>
+            <p:extLst>
+              <p:ext uri="{386F3935-93C4-4BCD-93E2-E3B085C9AB24}">
+                <p16:designElem xmlns:p16="http://schemas.microsoft.com/office/powerpoint/2015/main" val="1"/>
+              </p:ext>
+            </p:extLst>
+          </p:nvPr>
+        </p:nvSpPr>
+        <p:spPr>
+          <a:xfrm>
+            <a:off x="481029" y="4546920"/>
+            <a:ext cx="4023360" cy="18288"/>
+          </a:xfrm>
+          <a:prstGeom prst="rect">
+            <a:avLst/>
+          </a:prstGeom>
+          <a:solidFill>
+            <a:schemeClr val="tx2">
+              <a:lumMod val="25000"/>
+              <a:lumOff val="75000"/>
+            </a:schemeClr>
+          </a:solidFill>
+          <a:ln w="3175">
+            <a:noFill/>
+          </a:ln>
+          <a:effectLst/>
+        </p:spPr>
+        <p:style>
+          <a:lnRef idx="2">
+            <a:schemeClr val="accent1">
+              <a:shade val="50000"/>
+            </a:schemeClr>
+          </a:lnRef>
+          <a:fillRef idx="1">
+            <a:schemeClr val="accent1"/>
+          </a:fillRef>
+          <a:effectRef idx="0">
+            <a:schemeClr val="accent1"/>
+          </a:effectRef>
+          <a:fontRef idx="minor">
+            <a:schemeClr val="lt1"/>
+          </a:fontRef>
+        </p:style>
+        <p:txBody>
+          <a:bodyPr rtlCol="0" anchor="ctr"/>
+          <a:lstStyle/>
+          <a:p>
+            <a:pPr marL="0" marR="0" lvl="0" indent="0" algn="ctr" defTabSz="914400" rtl="0" eaLnBrk="1" fontAlgn="auto" latinLnBrk="0" hangingPunct="1">
+              <a:lnSpc>
+                <a:spcPct val="100000"/>
+              </a:lnSpc>
+              <a:spcBef>
+                <a:spcPts val="0"/>
+              </a:spcBef>
+              <a:spcAft>
+                <a:spcPts val="0"/>
+              </a:spcAft>
+              <a:buClrTx/>
+              <a:buSzTx/>
+              <a:buFontTx/>
+              <a:buNone/>
+              <a:tabLst/>
+              <a:defRPr/>
+            </a:pPr>
+            <a:endParaRPr kumimoji="0" lang="en-US" sz="1800" b="0" i="0" u="none" strike="noStrike" kern="1200" cap="none" spc="0" normalizeH="0" baseline="0" noProof="0">
+              <a:ln>
+                <a:noFill/>
+              </a:ln>
+              <a:solidFill>
+                <a:prstClr val="white"/>
+              </a:solidFill>
+              <a:effectLst/>
+              <a:uLnTx/>
+              <a:uFillTx/>
+              <a:latin typeface="Calibri" panose="020F0502020204030204"/>
+              <a:ea typeface="+mn-ea"/>
+              <a:cs typeface="+mn-cs"/>
+            </a:endParaRPr>
+          </a:p>
+        </p:txBody>
+      </p:sp>
+      <p:pic>
+        <p:nvPicPr>
+          <p:cNvPr id="4" name="Picture 3" descr="A graph of a cell cycle&#10;&#10;AI-generated content may be incorrect.">
+            <a:extLst>
+              <a:ext uri="{FF2B5EF4-FFF2-40B4-BE49-F238E27FC236}">
+                <a16:creationId xmlns:a16="http://schemas.microsoft.com/office/drawing/2014/main" id="{850A8AA0-DF5B-8DA0-B10B-B5DB6942B798}"/>
+              </a:ext>
+            </a:extLst>
+          </p:cNvPr>
+          <p:cNvPicPr>
+            <a:picLocks noChangeAspect="1"/>
+          </p:cNvPicPr>
+          <p:nvPr/>
+        </p:nvPicPr>
+        <p:blipFill>
+          <a:blip r:embed="rId2"/>
+          <a:stretch>
+            <a:fillRect/>
+          </a:stretch>
+        </p:blipFill>
+        <p:spPr>
+          <a:xfrm>
+            <a:off x="5607835" y="625683"/>
+            <a:ext cx="5359909" cy="5455380"/>
+          </a:xfrm>
+          <a:prstGeom prst="rect">
+            <a:avLst/>
+          </a:prstGeom>
+        </p:spPr>
+      </p:pic>
+    </p:spTree>
+    <p:extLst>
+      <p:ext uri="{BB962C8B-B14F-4D97-AF65-F5344CB8AC3E}">
+        <p14:creationId xmlns:p14="http://schemas.microsoft.com/office/powerpoint/2010/main" val="80187494"/>
+      </p:ext>
+    </p:extLst>
+  </p:cSld>
+  <p:clrMapOvr>
+    <a:masterClrMapping/>
+  </p:clrMapOvr>
+</p:sld>
+</file>
+
+<file path=ppt/slides/slide21.xml><?xml version="1.0" encoding="utf-8"?>
+<p:sld xmlns:a="http://schemas.openxmlformats.org/drawingml/2006/main" xmlns:r="http://schemas.openxmlformats.org/officeDocument/2006/relationships" xmlns:p="http://schemas.openxmlformats.org/presentationml/2006/main">
+  <p:cSld>
+    <p:bg>
+      <p:bgPr>
+        <a:solidFill>
+          <a:schemeClr val="bg1"/>
+        </a:solidFill>
+        <a:effectLst/>
+      </p:bgPr>
+    </p:bg>
+    <p:spTree>
+      <p:nvGrpSpPr>
+        <p:cNvPr id="1" name="">
+          <a:extLst>
+            <a:ext uri="{FF2B5EF4-FFF2-40B4-BE49-F238E27FC236}">
+              <a16:creationId xmlns:a16="http://schemas.microsoft.com/office/drawing/2014/main" id="{97D42B05-58AB-6002-70CF-96E90179245D}"/>
+            </a:ext>
+          </a:extLst>
+        </p:cNvPr>
+        <p:cNvGrpSpPr/>
+        <p:nvPr/>
+      </p:nvGrpSpPr>
+      <p:grpSpPr>
+        <a:xfrm>
+          <a:off x="0" y="0"/>
+          <a:ext cx="0" cy="0"/>
+          <a:chOff x="0" y="0"/>
+          <a:chExt cx="0" cy="0"/>
+        </a:xfrm>
+      </p:grpSpPr>
+      <p:sp>
+        <p:nvSpPr>
+          <p:cNvPr id="7" name="Rectangle 6">
+            <a:extLst>
+              <a:ext uri="{FF2B5EF4-FFF2-40B4-BE49-F238E27FC236}">
+                <a16:creationId xmlns:a16="http://schemas.microsoft.com/office/drawing/2014/main" id="{8D06CE56-3881-4ADA-8CEF-D18B02C242A3}"/>
+              </a:ext>
+              <a:ext uri="{C183D7F6-B498-43B3-948B-1728B52AA6E4}">
+                <adec:decorative xmlns:adec="http://schemas.microsoft.com/office/drawing/2017/decorative" val="1"/>
+              </a:ext>
+            </a:extLst>
+          </p:cNvPr>
+          <p:cNvSpPr>
+            <a:spLocks noGrp="1" noRot="1" noChangeAspect="1" noMove="1" noResize="1" noEditPoints="1" noAdjustHandles="1" noChangeArrowheads="1" noChangeShapeType="1" noTextEdit="1"/>
+          </p:cNvSpPr>
+          <p:nvPr>
+            <p:extLst>
+              <p:ext uri="{386F3935-93C4-4BCD-93E2-E3B085C9AB24}">
+                <p16:designElem xmlns:p16="http://schemas.microsoft.com/office/powerpoint/2015/main" val="1"/>
+              </p:ext>
+            </p:extLst>
+          </p:nvPr>
+        </p:nvSpPr>
+        <p:spPr>
+          <a:xfrm rot="5400000">
+            <a:off x="857544" y="346791"/>
+            <a:ext cx="146304" cy="704088"/>
+          </a:xfrm>
+          <a:prstGeom prst="rect">
+            <a:avLst/>
+          </a:prstGeom>
+          <a:solidFill>
+            <a:schemeClr val="accent1"/>
+          </a:solidFill>
+          <a:ln>
+            <a:noFill/>
+          </a:ln>
+        </p:spPr>
+        <p:style>
+          <a:lnRef idx="2">
+            <a:schemeClr val="accent1">
+              <a:shade val="50000"/>
+            </a:schemeClr>
+          </a:lnRef>
+          <a:fillRef idx="1">
+            <a:schemeClr val="accent1"/>
+          </a:fillRef>
+          <a:effectRef idx="0">
+            <a:schemeClr val="accent1"/>
+          </a:effectRef>
+          <a:fontRef idx="minor">
+            <a:schemeClr val="lt1"/>
+          </a:fontRef>
+        </p:style>
+        <p:txBody>
+          <a:bodyPr rtlCol="0" anchor="ctr"/>
+          <a:lstStyle/>
+          <a:p>
+            <a:pPr marL="0" marR="0" lvl="0" indent="0" algn="ctr" defTabSz="914400" rtl="0" eaLnBrk="1" fontAlgn="auto" latinLnBrk="0" hangingPunct="1">
+              <a:lnSpc>
+                <a:spcPct val="100000"/>
+              </a:lnSpc>
+              <a:spcBef>
+                <a:spcPts val="0"/>
+              </a:spcBef>
+              <a:spcAft>
+                <a:spcPts val="0"/>
+              </a:spcAft>
+              <a:buClrTx/>
+              <a:buSzTx/>
+              <a:buFontTx/>
+              <a:buNone/>
+              <a:tabLst/>
+              <a:defRPr/>
+            </a:pPr>
+            <a:endParaRPr kumimoji="0" lang="en-US" sz="1800" b="0" i="0" u="none" strike="noStrike" kern="1200" cap="none" spc="0" normalizeH="0" baseline="0" noProof="0">
+              <a:ln>
+                <a:noFill/>
+              </a:ln>
+              <a:solidFill>
+                <a:prstClr val="white"/>
+              </a:solidFill>
+              <a:effectLst/>
+              <a:uLnTx/>
+              <a:uFillTx/>
+              <a:latin typeface="Calibri" panose="020F0502020204030204"/>
+              <a:ea typeface="+mn-ea"/>
+              <a:cs typeface="+mn-cs"/>
+            </a:endParaRPr>
+          </a:p>
+        </p:txBody>
+      </p:sp>
+      <p:sp>
+        <p:nvSpPr>
+          <p:cNvPr id="9" name="Rectangle 8">
+            <a:extLst>
+              <a:ext uri="{FF2B5EF4-FFF2-40B4-BE49-F238E27FC236}">
+                <a16:creationId xmlns:a16="http://schemas.microsoft.com/office/drawing/2014/main" id="{79F3C543-62EC-4433-9C93-A2CD8764E9B4}"/>
+              </a:ext>
+              <a:ext uri="{C183D7F6-B498-43B3-948B-1728B52AA6E4}">
+                <adec:decorative xmlns:adec="http://schemas.microsoft.com/office/drawing/2017/decorative" val="1"/>
+              </a:ext>
+            </a:extLst>
+          </p:cNvPr>
+          <p:cNvSpPr>
+            <a:spLocks noGrp="1" noRot="1" noChangeAspect="1" noMove="1" noResize="1" noEditPoints="1" noAdjustHandles="1" noChangeArrowheads="1" noChangeShapeType="1" noTextEdit="1"/>
+          </p:cNvSpPr>
+          <p:nvPr>
+            <p:extLst>
+              <p:ext uri="{386F3935-93C4-4BCD-93E2-E3B085C9AB24}">
+                <p16:designElem xmlns:p16="http://schemas.microsoft.com/office/powerpoint/2015/main" val="1"/>
+              </p:ext>
+            </p:extLst>
+          </p:nvPr>
+        </p:nvSpPr>
+        <p:spPr>
+          <a:xfrm flipV="1">
+            <a:off x="578652" y="4501201"/>
+            <a:ext cx="11034696" cy="18288"/>
+          </a:xfrm>
+          <a:prstGeom prst="rect">
+            <a:avLst/>
+          </a:prstGeom>
+          <a:solidFill>
+            <a:schemeClr val="tx2">
+              <a:lumMod val="25000"/>
+              <a:lumOff val="75000"/>
+            </a:schemeClr>
+          </a:solidFill>
+          <a:ln w="3175">
+            <a:noFill/>
+          </a:ln>
+          <a:effectLst/>
+        </p:spPr>
+        <p:style>
+          <a:lnRef idx="2">
+            <a:schemeClr val="accent1">
+              <a:shade val="50000"/>
+            </a:schemeClr>
+          </a:lnRef>
+          <a:fillRef idx="1">
+            <a:schemeClr val="accent1"/>
+          </a:fillRef>
+          <a:effectRef idx="0">
+            <a:schemeClr val="accent1"/>
+          </a:effectRef>
+          <a:fontRef idx="minor">
+            <a:schemeClr val="lt1"/>
+          </a:fontRef>
+        </p:style>
+        <p:txBody>
+          <a:bodyPr rtlCol="0" anchor="ctr"/>
+          <a:lstStyle/>
+          <a:p>
+            <a:pPr marL="0" marR="0" lvl="0" indent="0" algn="ctr" defTabSz="914400" rtl="0" eaLnBrk="1" fontAlgn="auto" latinLnBrk="0" hangingPunct="1">
+              <a:lnSpc>
+                <a:spcPct val="100000"/>
+              </a:lnSpc>
+              <a:spcBef>
+                <a:spcPts val="0"/>
+              </a:spcBef>
+              <a:spcAft>
+                <a:spcPts val="0"/>
+              </a:spcAft>
+              <a:buClrTx/>
+              <a:buSzTx/>
+              <a:buFontTx/>
+              <a:buNone/>
+              <a:tabLst/>
+              <a:defRPr/>
+            </a:pPr>
+            <a:endParaRPr kumimoji="0" lang="en-US" sz="1800" b="0" i="0" u="none" strike="noStrike" kern="1200" cap="none" spc="0" normalizeH="0" baseline="0" noProof="0">
+              <a:ln>
+                <a:noFill/>
+              </a:ln>
+              <a:solidFill>
+                <a:prstClr val="white"/>
+              </a:solidFill>
+              <a:effectLst/>
+              <a:uLnTx/>
+              <a:uFillTx/>
+              <a:latin typeface="Calibri" panose="020F0502020204030204"/>
+              <a:ea typeface="+mn-ea"/>
+              <a:cs typeface="+mn-cs"/>
+            </a:endParaRPr>
+          </a:p>
+        </p:txBody>
+      </p:sp>
+      <p:sp useBgFill="1">
+        <p:nvSpPr>
+          <p:cNvPr id="11" name="Rectangle 10">
+            <a:extLst>
+              <a:ext uri="{FF2B5EF4-FFF2-40B4-BE49-F238E27FC236}">
+                <a16:creationId xmlns:a16="http://schemas.microsoft.com/office/drawing/2014/main" id="{F1C4E306-BC28-4A7B-871B-1926F6FA6EF3}"/>
+              </a:ext>
+              <a:ext uri="{C183D7F6-B498-43B3-948B-1728B52AA6E4}">
+                <adec:decorative xmlns:adec="http://schemas.microsoft.com/office/drawing/2017/decorative" val="1"/>
+              </a:ext>
+            </a:extLst>
+          </p:cNvPr>
+          <p:cNvSpPr>
+            <a:spLocks noGrp="1" noRot="1" noChangeAspect="1" noMove="1" noResize="1" noEditPoints="1" noAdjustHandles="1" noChangeArrowheads="1" noChangeShapeType="1" noTextEdit="1"/>
+          </p:cNvSpPr>
+          <p:nvPr>
+            <p:extLst>
+              <p:ext uri="{386F3935-93C4-4BCD-93E2-E3B085C9AB24}">
+                <p16:designElem xmlns:p16="http://schemas.microsoft.com/office/powerpoint/2015/main" val="1"/>
+              </p:ext>
+            </p:extLst>
+          </p:nvPr>
+        </p:nvSpPr>
+        <p:spPr>
+          <a:xfrm>
+            <a:off x="0" y="0"/>
+            <a:ext cx="12192000" cy="6858000"/>
+          </a:xfrm>
+          <a:prstGeom prst="rect">
+            <a:avLst/>
+          </a:prstGeom>
+          <a:ln>
+            <a:noFill/>
+          </a:ln>
+        </p:spPr>
+        <p:style>
+          <a:lnRef idx="2">
+            <a:schemeClr val="accent1">
+              <a:shade val="50000"/>
+            </a:schemeClr>
+          </a:lnRef>
+          <a:fillRef idx="1">
+            <a:schemeClr val="accent1"/>
+          </a:fillRef>
+          <a:effectRef idx="0">
+            <a:schemeClr val="accent1"/>
+          </a:effectRef>
+          <a:fontRef idx="minor">
+            <a:schemeClr val="lt1"/>
+          </a:fontRef>
+        </p:style>
+        <p:txBody>
+          <a:bodyPr rtlCol="0" anchor="ctr"/>
+          <a:lstStyle/>
+          <a:p>
+            <a:pPr algn="ctr"/>
+            <a:endParaRPr lang="en-US"/>
+          </a:p>
+        </p:txBody>
+      </p:sp>
+      <p:sp useBgFill="1">
+        <p:nvSpPr>
+          <p:cNvPr id="13" name="Freeform: Shape 12">
+            <a:extLst>
+              <a:ext uri="{FF2B5EF4-FFF2-40B4-BE49-F238E27FC236}">
+                <a16:creationId xmlns:a16="http://schemas.microsoft.com/office/drawing/2014/main" id="{C3ECC9B4-989C-4F71-A6BC-DEBC1D9FD0BD}"/>
+              </a:ext>
+              <a:ext uri="{C183D7F6-B498-43B3-948B-1728B52AA6E4}">
+                <adec:decorative xmlns:adec="http://schemas.microsoft.com/office/drawing/2017/decorative" val="1"/>
+              </a:ext>
+            </a:extLst>
+          </p:cNvPr>
+          <p:cNvSpPr>
+            <a:spLocks noGrp="1" noRot="1" noChangeAspect="1" noMove="1" noResize="1" noEditPoints="1" noAdjustHandles="1" noChangeArrowheads="1" noChangeShapeType="1" noTextEdit="1"/>
+          </p:cNvSpPr>
+          <p:nvPr>
+            <p:extLst>
+              <p:ext uri="{386F3935-93C4-4BCD-93E2-E3B085C9AB24}">
+                <p16:designElem xmlns:p16="http://schemas.microsoft.com/office/powerpoint/2015/main" val="1"/>
+              </p:ext>
+            </p:extLst>
+          </p:nvPr>
+        </p:nvSpPr>
+        <p:spPr>
+          <a:xfrm>
+            <a:off x="0" y="0"/>
+            <a:ext cx="8452322" cy="6858000"/>
+          </a:xfrm>
+          <a:custGeom>
+            <a:avLst/>
+            <a:gdLst>
+              <a:gd name="connsiteX0" fmla="*/ 0 w 8452322"/>
+              <a:gd name="connsiteY0" fmla="*/ 0 h 6858000"/>
+              <a:gd name="connsiteX1" fmla="*/ 7447992 w 8452322"/>
+              <a:gd name="connsiteY1" fmla="*/ 0 h 6858000"/>
+              <a:gd name="connsiteX2" fmla="*/ 7501089 w 8452322"/>
+              <a:gd name="connsiteY2" fmla="*/ 79009 h 6858000"/>
+              <a:gd name="connsiteX3" fmla="*/ 8452322 w 8452322"/>
+              <a:gd name="connsiteY3" fmla="*/ 3429001 h 6858000"/>
+              <a:gd name="connsiteX4" fmla="*/ 7501089 w 8452322"/>
+              <a:gd name="connsiteY4" fmla="*/ 6778993 h 6858000"/>
+              <a:gd name="connsiteX5" fmla="*/ 7447994 w 8452322"/>
+              <a:gd name="connsiteY5" fmla="*/ 6858000 h 6858000"/>
+              <a:gd name="connsiteX6" fmla="*/ 0 w 8452322"/>
+              <a:gd name="connsiteY6" fmla="*/ 6858000 h 6858000"/>
+            </a:gdLst>
+            <a:ahLst/>
+            <a:cxnLst>
+              <a:cxn ang="0">
+                <a:pos x="connsiteX0" y="connsiteY0"/>
+              </a:cxn>
+              <a:cxn ang="0">
+                <a:pos x="connsiteX1" y="connsiteY1"/>
+              </a:cxn>
+              <a:cxn ang="0">
+                <a:pos x="connsiteX2" y="connsiteY2"/>
+              </a:cxn>
+              <a:cxn ang="0">
+                <a:pos x="connsiteX3" y="connsiteY3"/>
+              </a:cxn>
+              <a:cxn ang="0">
+                <a:pos x="connsiteX4" y="connsiteY4"/>
+              </a:cxn>
+              <a:cxn ang="0">
+                <a:pos x="connsiteX5" y="connsiteY5"/>
+              </a:cxn>
+              <a:cxn ang="0">
+                <a:pos x="connsiteX6" y="connsiteY6"/>
+              </a:cxn>
+            </a:cxnLst>
+            <a:rect l="l" t="t" r="r" b="b"/>
+            <a:pathLst>
+              <a:path w="8452322" h="6858000">
+                <a:moveTo>
+                  <a:pt x="0" y="0"/>
+                </a:moveTo>
+                <a:lnTo>
+                  <a:pt x="7447992" y="0"/>
+                </a:lnTo>
+                <a:lnTo>
+                  <a:pt x="7501089" y="79009"/>
+                </a:lnTo>
+                <a:cubicBezTo>
+                  <a:pt x="8098524" y="1013167"/>
+                  <a:pt x="8452322" y="2172770"/>
+                  <a:pt x="8452322" y="3429001"/>
+                </a:cubicBezTo>
+                <a:cubicBezTo>
+                  <a:pt x="8452322" y="4685233"/>
+                  <a:pt x="8098524" y="5844836"/>
+                  <a:pt x="7501089" y="6778993"/>
+                </a:cubicBezTo>
+                <a:lnTo>
+                  <a:pt x="7447994" y="6858000"/>
+                </a:lnTo>
+                <a:lnTo>
+                  <a:pt x="0" y="6858000"/>
+                </a:lnTo>
+                <a:close/>
+              </a:path>
+            </a:pathLst>
+          </a:custGeom>
+          <a:ln w="9525">
+            <a:solidFill>
+              <a:schemeClr val="tx2">
+                <a:lumMod val="10000"/>
+                <a:lumOff val="90000"/>
+              </a:schemeClr>
+            </a:solidFill>
+          </a:ln>
+          <a:effectLst>
+            <a:outerShdw blurRad="50800" dist="38100" algn="l" rotWithShape="0">
+              <a:schemeClr val="bg1">
+                <a:lumMod val="85000"/>
+                <a:alpha val="30000"/>
+              </a:schemeClr>
+            </a:outerShdw>
+          </a:effectLst>
+        </p:spPr>
+        <p:style>
+          <a:lnRef idx="2">
+            <a:schemeClr val="accent1">
+              <a:shade val="50000"/>
+            </a:schemeClr>
+          </a:lnRef>
+          <a:fillRef idx="1">
+            <a:schemeClr val="accent1"/>
+          </a:fillRef>
+          <a:effectRef idx="0">
+            <a:schemeClr val="accent1"/>
+          </a:effectRef>
+          <a:fontRef idx="minor">
+            <a:schemeClr val="lt1"/>
+          </a:fontRef>
+        </p:style>
+        <p:txBody>
+          <a:bodyPr wrap="square" rtlCol="0" anchor="ctr">
+            <a:noAutofit/>
+          </a:bodyPr>
+          <a:lstStyle/>
+          <a:p>
+            <a:pPr marL="0" marR="0" lvl="0" indent="0" algn="ctr" defTabSz="914400" rtl="0" eaLnBrk="1" fontAlgn="auto" latinLnBrk="0" hangingPunct="1">
+              <a:lnSpc>
+                <a:spcPct val="100000"/>
+              </a:lnSpc>
+              <a:spcBef>
+                <a:spcPts val="0"/>
+              </a:spcBef>
+              <a:spcAft>
+                <a:spcPts val="0"/>
+              </a:spcAft>
+              <a:buClrTx/>
+              <a:buSzTx/>
+              <a:buFontTx/>
+              <a:buNone/>
+              <a:tabLst/>
+              <a:defRPr/>
+            </a:pPr>
+            <a:endParaRPr kumimoji="0" lang="en-US" sz="1800" b="0" i="0" u="none" strike="noStrike" kern="1200" cap="none" spc="0" normalizeH="0" baseline="0" noProof="0">
+              <a:ln>
+                <a:noFill/>
+              </a:ln>
+              <a:solidFill>
+                <a:prstClr val="white"/>
+              </a:solidFill>
+              <a:effectLst/>
+              <a:uLnTx/>
+              <a:uFillTx/>
+              <a:latin typeface="Calibri" panose="020F0502020204030204"/>
+              <a:ea typeface="+mn-ea"/>
+              <a:cs typeface="+mn-cs"/>
+            </a:endParaRPr>
+          </a:p>
+        </p:txBody>
+      </p:sp>
+      <p:sp useBgFill="1">
+        <p:nvSpPr>
+          <p:cNvPr id="15" name="Freeform: Shape 14">
+            <a:extLst>
+              <a:ext uri="{FF2B5EF4-FFF2-40B4-BE49-F238E27FC236}">
+                <a16:creationId xmlns:a16="http://schemas.microsoft.com/office/drawing/2014/main" id="{7948E8DE-A931-4EF0-BE1D-F1027474099B}"/>
+              </a:ext>
+              <a:ext uri="{C183D7F6-B498-43B3-948B-1728B52AA6E4}">
+                <adec:decorative xmlns:adec="http://schemas.microsoft.com/office/drawing/2017/decorative" val="1"/>
+              </a:ext>
+            </a:extLst>
+          </p:cNvPr>
+          <p:cNvSpPr>
+            <a:spLocks noGrp="1" noRot="1" noChangeAspect="1" noMove="1" noResize="1" noEditPoints="1" noAdjustHandles="1" noChangeArrowheads="1" noChangeShapeType="1" noTextEdit="1"/>
+          </p:cNvSpPr>
+          <p:nvPr>
+            <p:extLst>
+              <p:ext uri="{386F3935-93C4-4BCD-93E2-E3B085C9AB24}">
+                <p16:designElem xmlns:p16="http://schemas.microsoft.com/office/powerpoint/2015/main" val="1"/>
+              </p:ext>
+            </p:extLst>
+          </p:nvPr>
+        </p:nvSpPr>
+        <p:spPr>
+          <a:xfrm>
+            <a:off x="0" y="0"/>
+            <a:ext cx="8443572" cy="6858000"/>
+          </a:xfrm>
+          <a:custGeom>
+            <a:avLst/>
+            <a:gdLst>
+              <a:gd name="connsiteX0" fmla="*/ 0 w 8443572"/>
+              <a:gd name="connsiteY0" fmla="*/ 0 h 6858000"/>
+              <a:gd name="connsiteX1" fmla="*/ 7439242 w 8443572"/>
+              <a:gd name="connsiteY1" fmla="*/ 0 h 6858000"/>
+              <a:gd name="connsiteX2" fmla="*/ 7492339 w 8443572"/>
+              <a:gd name="connsiteY2" fmla="*/ 79009 h 6858000"/>
+              <a:gd name="connsiteX3" fmla="*/ 8443572 w 8443572"/>
+              <a:gd name="connsiteY3" fmla="*/ 3429001 h 6858000"/>
+              <a:gd name="connsiteX4" fmla="*/ 7492339 w 8443572"/>
+              <a:gd name="connsiteY4" fmla="*/ 6778993 h 6858000"/>
+              <a:gd name="connsiteX5" fmla="*/ 7439244 w 8443572"/>
+              <a:gd name="connsiteY5" fmla="*/ 6858000 h 6858000"/>
+              <a:gd name="connsiteX6" fmla="*/ 0 w 8443572"/>
+              <a:gd name="connsiteY6" fmla="*/ 6858000 h 6858000"/>
+            </a:gdLst>
+            <a:ahLst/>
+            <a:cxnLst>
+              <a:cxn ang="0">
+                <a:pos x="connsiteX0" y="connsiteY0"/>
+              </a:cxn>
+              <a:cxn ang="0">
+                <a:pos x="connsiteX1" y="connsiteY1"/>
+              </a:cxn>
+              <a:cxn ang="0">
+                <a:pos x="connsiteX2" y="connsiteY2"/>
+              </a:cxn>
+              <a:cxn ang="0">
+                <a:pos x="connsiteX3" y="connsiteY3"/>
+              </a:cxn>
+              <a:cxn ang="0">
+                <a:pos x="connsiteX4" y="connsiteY4"/>
+              </a:cxn>
+              <a:cxn ang="0">
+                <a:pos x="connsiteX5" y="connsiteY5"/>
+              </a:cxn>
+              <a:cxn ang="0">
+                <a:pos x="connsiteX6" y="connsiteY6"/>
+              </a:cxn>
+            </a:cxnLst>
+            <a:rect l="l" t="t" r="r" b="b"/>
+            <a:pathLst>
+              <a:path w="8443572" h="6858000">
+                <a:moveTo>
+                  <a:pt x="0" y="0"/>
+                </a:moveTo>
+                <a:lnTo>
+                  <a:pt x="7439242" y="0"/>
+                </a:lnTo>
+                <a:lnTo>
+                  <a:pt x="7492339" y="79009"/>
+                </a:lnTo>
+                <a:cubicBezTo>
+                  <a:pt x="8089774" y="1013167"/>
+                  <a:pt x="8443572" y="2172770"/>
+                  <a:pt x="8443572" y="3429001"/>
+                </a:cubicBezTo>
+                <a:cubicBezTo>
+                  <a:pt x="8443572" y="4685233"/>
+                  <a:pt x="8089774" y="5844836"/>
+                  <a:pt x="7492339" y="6778993"/>
+                </a:cubicBezTo>
+                <a:lnTo>
+                  <a:pt x="7439244" y="6858000"/>
+                </a:lnTo>
+                <a:lnTo>
+                  <a:pt x="0" y="6858000"/>
+                </a:lnTo>
+                <a:close/>
+              </a:path>
+            </a:pathLst>
+          </a:custGeom>
+          <a:ln w="9525">
+            <a:noFill/>
+          </a:ln>
+          <a:effectLst/>
+        </p:spPr>
+        <p:style>
+          <a:lnRef idx="2">
+            <a:schemeClr val="accent1">
+              <a:shade val="50000"/>
+            </a:schemeClr>
+          </a:lnRef>
+          <a:fillRef idx="1">
+            <a:schemeClr val="accent1"/>
+          </a:fillRef>
+          <a:effectRef idx="0">
+            <a:schemeClr val="accent1"/>
+          </a:effectRef>
+          <a:fontRef idx="minor">
+            <a:schemeClr val="lt1"/>
+          </a:fontRef>
+        </p:style>
+        <p:txBody>
+          <a:bodyPr wrap="square" rtlCol="0" anchor="ctr">
+            <a:noAutofit/>
+          </a:bodyPr>
+          <a:lstStyle/>
+          <a:p>
+            <a:pPr marL="0" marR="0" lvl="0" indent="0" algn="ctr" defTabSz="914400" rtl="0" eaLnBrk="1" fontAlgn="auto" latinLnBrk="0" hangingPunct="1">
+              <a:lnSpc>
+                <a:spcPct val="100000"/>
+              </a:lnSpc>
+              <a:spcBef>
+                <a:spcPts val="0"/>
+              </a:spcBef>
+              <a:spcAft>
+                <a:spcPts val="0"/>
+              </a:spcAft>
+              <a:buClrTx/>
+              <a:buSzTx/>
+              <a:buFontTx/>
+              <a:buNone/>
+              <a:tabLst/>
+              <a:defRPr/>
+            </a:pPr>
+            <a:endParaRPr kumimoji="0" lang="en-US" sz="1800" b="0" i="0" u="none" strike="noStrike" kern="1200" cap="none" spc="0" normalizeH="0" baseline="0" noProof="0">
+              <a:ln>
+                <a:noFill/>
+              </a:ln>
+              <a:solidFill>
+                <a:prstClr val="white"/>
+              </a:solidFill>
+              <a:effectLst/>
+              <a:uLnTx/>
+              <a:uFillTx/>
+              <a:latin typeface="Calibri" panose="020F0502020204030204"/>
+              <a:ea typeface="+mn-ea"/>
+              <a:cs typeface="+mn-cs"/>
+            </a:endParaRPr>
+          </a:p>
+        </p:txBody>
+      </p:sp>
+      <p:sp>
+        <p:nvSpPr>
+          <p:cNvPr id="2" name="Title 1">
+            <a:extLst>
+              <a:ext uri="{FF2B5EF4-FFF2-40B4-BE49-F238E27FC236}">
+                <a16:creationId xmlns:a16="http://schemas.microsoft.com/office/drawing/2014/main" id="{3F8871BD-6F52-4CE9-15B8-31996D21B799}"/>
+              </a:ext>
+            </a:extLst>
+          </p:cNvPr>
+          <p:cNvSpPr>
+            <a:spLocks noGrp="1"/>
+          </p:cNvSpPr>
+          <p:nvPr>
+            <p:ph type="title"/>
+          </p:nvPr>
+        </p:nvSpPr>
+        <p:spPr>
+          <a:xfrm>
+            <a:off x="616893" y="1238250"/>
+            <a:ext cx="7003107" cy="4381500"/>
+          </a:xfrm>
+        </p:spPr>
+        <p:txBody>
+          <a:bodyPr vert="horz" lIns="91440" tIns="45720" rIns="91440" bIns="45720" rtlCol="0" anchor="ctr">
+            <a:normAutofit/>
+          </a:bodyPr>
+          <a:lstStyle/>
+          <a:p>
+            <a:pPr>
+              <a:defRPr sz="2800"/>
+            </a:pPr>
+            <a:r>
+              <a:rPr lang="en-US" sz="7200" dirty="0"/>
+              <a:t>Discussion</a:t>
+            </a:r>
+          </a:p>
+        </p:txBody>
+      </p:sp>
+      <p:sp>
+        <p:nvSpPr>
+          <p:cNvPr id="17" name="Rectangle 16">
+            <a:extLst>
+              <a:ext uri="{FF2B5EF4-FFF2-40B4-BE49-F238E27FC236}">
+                <a16:creationId xmlns:a16="http://schemas.microsoft.com/office/drawing/2014/main" id="{B0E4BB4F-99AB-4C4E-A763-C5AC5273DF5D}"/>
+              </a:ext>
+              <a:ext uri="{C183D7F6-B498-43B3-948B-1728B52AA6E4}">
+                <adec:decorative xmlns:adec="http://schemas.microsoft.com/office/drawing/2017/decorative" val="1"/>
+              </a:ext>
+            </a:extLst>
+          </p:cNvPr>
+          <p:cNvSpPr>
+            <a:spLocks noGrp="1" noRot="1" noChangeAspect="1" noMove="1" noResize="1" noEditPoints="1" noAdjustHandles="1" noChangeArrowheads="1" noChangeShapeType="1" noTextEdit="1"/>
+          </p:cNvSpPr>
+          <p:nvPr>
+            <p:extLst>
+              <p:ext uri="{386F3935-93C4-4BCD-93E2-E3B085C9AB24}">
+                <p16:designElem xmlns:p16="http://schemas.microsoft.com/office/powerpoint/2015/main" val="1"/>
+              </p:ext>
+            </p:extLst>
+          </p:nvPr>
+        </p:nvSpPr>
+        <p:spPr>
+          <a:xfrm>
+            <a:off x="0" y="2827916"/>
+            <a:ext cx="128016" cy="1188720"/>
+          </a:xfrm>
+          <a:prstGeom prst="rect">
+            <a:avLst/>
+          </a:prstGeom>
+          <a:solidFill>
+            <a:schemeClr val="accent1"/>
+          </a:solidFill>
+          <a:ln>
+            <a:noFill/>
+          </a:ln>
+        </p:spPr>
+        <p:style>
+          <a:lnRef idx="2">
+            <a:schemeClr val="accent1">
+              <a:shade val="50000"/>
+            </a:schemeClr>
+          </a:lnRef>
+          <a:fillRef idx="1">
+            <a:schemeClr val="accent1"/>
+          </a:fillRef>
+          <a:effectRef idx="0">
+            <a:schemeClr val="accent1"/>
+          </a:effectRef>
+          <a:fontRef idx="minor">
+            <a:schemeClr val="lt1"/>
+          </a:fontRef>
+        </p:style>
+        <p:txBody>
+          <a:bodyPr rtlCol="0" anchor="ctr"/>
+          <a:lstStyle/>
+          <a:p>
+            <a:pPr marL="0" marR="0" lvl="0" indent="0" algn="ctr" defTabSz="914400" rtl="0" eaLnBrk="1" fontAlgn="auto" latinLnBrk="0" hangingPunct="1">
+              <a:lnSpc>
+                <a:spcPct val="100000"/>
+              </a:lnSpc>
+              <a:spcBef>
+                <a:spcPts val="0"/>
+              </a:spcBef>
+              <a:spcAft>
+                <a:spcPts val="0"/>
+              </a:spcAft>
+              <a:buClrTx/>
+              <a:buSzTx/>
+              <a:buFontTx/>
+              <a:buNone/>
+              <a:tabLst/>
+              <a:defRPr/>
+            </a:pPr>
+            <a:endParaRPr kumimoji="0" lang="en-US" sz="1800" b="0" i="0" u="none" strike="noStrike" kern="1200" cap="none" spc="0" normalizeH="0" baseline="0" noProof="0">
+              <a:ln>
+                <a:noFill/>
+              </a:ln>
+              <a:solidFill>
+                <a:prstClr val="white"/>
+              </a:solidFill>
+              <a:effectLst/>
+              <a:uLnTx/>
+              <a:uFillTx/>
+              <a:latin typeface="Calibri" panose="020F0502020204030204"/>
+              <a:ea typeface="+mn-ea"/>
+              <a:cs typeface="+mn-cs"/>
+            </a:endParaRPr>
+          </a:p>
+        </p:txBody>
+      </p:sp>
+    </p:spTree>
+    <p:extLst>
+      <p:ext uri="{BB962C8B-B14F-4D97-AF65-F5344CB8AC3E}">
+        <p14:creationId xmlns:p14="http://schemas.microsoft.com/office/powerpoint/2010/main" val="4067189204"/>
+      </p:ext>
+    </p:extLst>
+  </p:cSld>
+  <p:clrMapOvr>
+    <a:masterClrMapping/>
+  </p:clrMapOvr>
+</p:sld>
+</file>
+
+<file path=ppt/slides/slide22.xml><?xml version="1.0" encoding="utf-8"?>
+<p:sld xmlns:a="http://schemas.openxmlformats.org/drawingml/2006/main" xmlns:r="http://schemas.openxmlformats.org/officeDocument/2006/relationships" xmlns:p="http://schemas.openxmlformats.org/presentationml/2006/main">
+  <p:cSld>
+    <p:bg>
+      <p:bgPr>
+        <a:solidFill>
+          <a:schemeClr val="bg1"/>
+        </a:solidFill>
+        <a:effectLst/>
+      </p:bgPr>
+    </p:bg>
+    <p:spTree>
+      <p:nvGrpSpPr>
+        <p:cNvPr id="1" name=""/>
+        <p:cNvGrpSpPr/>
+        <p:nvPr/>
+      </p:nvGrpSpPr>
+      <p:grpSpPr>
+        <a:xfrm>
+          <a:off x="0" y="0"/>
+          <a:ext cx="0" cy="0"/>
+          <a:chOff x="0" y="0"/>
+          <a:chExt cx="0" cy="0"/>
+        </a:xfrm>
+      </p:grpSpPr>
+      <p:sp>
+        <p:nvSpPr>
+          <p:cNvPr id="9" name="Rectangle 8">
+            <a:extLst>
+              <a:ext uri="{FF2B5EF4-FFF2-40B4-BE49-F238E27FC236}">
+                <a16:creationId xmlns:a16="http://schemas.microsoft.com/office/drawing/2014/main" id="{8D06CE56-3881-4ADA-8CEF-D18B02C242A3}"/>
+              </a:ext>
+              <a:ext uri="{C183D7F6-B498-43B3-948B-1728B52AA6E4}">
+                <adec:decorative xmlns:adec="http://schemas.microsoft.com/office/drawing/2017/decorative" val="1"/>
+              </a:ext>
+            </a:extLst>
+          </p:cNvPr>
+          <p:cNvSpPr>
+            <a:spLocks noGrp="1" noRot="1" noChangeAspect="1" noMove="1" noResize="1" noEditPoints="1" noAdjustHandles="1" noChangeArrowheads="1" noChangeShapeType="1" noTextEdit="1"/>
+          </p:cNvSpPr>
+          <p:nvPr>
+            <p:extLst>
+              <p:ext uri="{386F3935-93C4-4BCD-93E2-E3B085C9AB24}">
+                <p16:designElem xmlns:p16="http://schemas.microsoft.com/office/powerpoint/2015/main" val="1"/>
+              </p:ext>
+            </p:extLst>
+          </p:nvPr>
+        </p:nvSpPr>
+        <p:spPr>
+          <a:xfrm rot="5400000">
+            <a:off x="857544" y="346791"/>
+            <a:ext cx="146304" cy="704088"/>
+          </a:xfrm>
+          <a:prstGeom prst="rect">
+            <a:avLst/>
+          </a:prstGeom>
+          <a:solidFill>
+            <a:schemeClr val="accent1"/>
+          </a:solidFill>
+          <a:ln>
+            <a:noFill/>
+          </a:ln>
+        </p:spPr>
+        <p:style>
+          <a:lnRef idx="2">
+            <a:schemeClr val="accent1">
+              <a:shade val="50000"/>
+            </a:schemeClr>
+          </a:lnRef>
+          <a:fillRef idx="1">
+            <a:schemeClr val="accent1"/>
+          </a:fillRef>
+          <a:effectRef idx="0">
+            <a:schemeClr val="accent1"/>
+          </a:effectRef>
+          <a:fontRef idx="minor">
+            <a:schemeClr val="lt1"/>
+          </a:fontRef>
+        </p:style>
+        <p:txBody>
+          <a:bodyPr rtlCol="0" anchor="ctr"/>
+          <a:lstStyle/>
+          <a:p>
+            <a:pPr marL="0" marR="0" lvl="0" indent="0" algn="ctr" defTabSz="914400" rtl="0" eaLnBrk="1" fontAlgn="auto" latinLnBrk="0" hangingPunct="1">
+              <a:lnSpc>
+                <a:spcPct val="100000"/>
+              </a:lnSpc>
+              <a:spcBef>
+                <a:spcPts val="0"/>
+              </a:spcBef>
+              <a:spcAft>
+                <a:spcPts val="0"/>
+              </a:spcAft>
+              <a:buClrTx/>
+              <a:buSzTx/>
+              <a:buFontTx/>
+              <a:buNone/>
+              <a:tabLst/>
+              <a:defRPr/>
+            </a:pPr>
+            <a:endParaRPr kumimoji="0" lang="en-US" sz="1800" b="0" i="0" u="none" strike="noStrike" kern="1200" cap="none" spc="0" normalizeH="0" baseline="0" noProof="0">
+              <a:ln>
+                <a:noFill/>
+              </a:ln>
+              <a:solidFill>
+                <a:prstClr val="white"/>
+              </a:solidFill>
+              <a:effectLst/>
+              <a:uLnTx/>
+              <a:uFillTx/>
+              <a:latin typeface="Calibri" panose="020F0502020204030204"/>
+              <a:ea typeface="+mn-ea"/>
+              <a:cs typeface="+mn-cs"/>
+            </a:endParaRPr>
+          </a:p>
+        </p:txBody>
+      </p:sp>
+      <p:sp>
+        <p:nvSpPr>
+          <p:cNvPr id="11" name="Rectangle 10">
+            <a:extLst>
+              <a:ext uri="{FF2B5EF4-FFF2-40B4-BE49-F238E27FC236}">
+                <a16:creationId xmlns:a16="http://schemas.microsoft.com/office/drawing/2014/main" id="{79F3C543-62EC-4433-9C93-A2CD8764E9B4}"/>
+              </a:ext>
+              <a:ext uri="{C183D7F6-B498-43B3-948B-1728B52AA6E4}">
+                <adec:decorative xmlns:adec="http://schemas.microsoft.com/office/drawing/2017/decorative" val="1"/>
+              </a:ext>
+            </a:extLst>
+          </p:cNvPr>
+          <p:cNvSpPr>
+            <a:spLocks noGrp="1" noRot="1" noChangeAspect="1" noMove="1" noResize="1" noEditPoints="1" noAdjustHandles="1" noChangeArrowheads="1" noChangeShapeType="1" noTextEdit="1"/>
+          </p:cNvSpPr>
+          <p:nvPr>
+            <p:extLst>
+              <p:ext uri="{386F3935-93C4-4BCD-93E2-E3B085C9AB24}">
+                <p16:designElem xmlns:p16="http://schemas.microsoft.com/office/powerpoint/2015/main" val="1"/>
+              </p:ext>
+            </p:extLst>
+          </p:nvPr>
+        </p:nvSpPr>
+        <p:spPr>
+          <a:xfrm flipV="1">
+            <a:off x="578652" y="4501201"/>
+            <a:ext cx="11034696" cy="18288"/>
+          </a:xfrm>
+          <a:prstGeom prst="rect">
+            <a:avLst/>
+          </a:prstGeom>
+          <a:solidFill>
+            <a:schemeClr val="tx2">
+              <a:lumMod val="25000"/>
+              <a:lumOff val="75000"/>
+            </a:schemeClr>
+          </a:solidFill>
+          <a:ln w="3175">
+            <a:noFill/>
+          </a:ln>
+          <a:effectLst/>
+        </p:spPr>
+        <p:style>
+          <a:lnRef idx="2">
+            <a:schemeClr val="accent1">
+              <a:shade val="50000"/>
+            </a:schemeClr>
+          </a:lnRef>
+          <a:fillRef idx="1">
+            <a:schemeClr val="accent1"/>
+          </a:fillRef>
+          <a:effectRef idx="0">
+            <a:schemeClr val="accent1"/>
+          </a:effectRef>
+          <a:fontRef idx="minor">
+            <a:schemeClr val="lt1"/>
+          </a:fontRef>
+        </p:style>
+        <p:txBody>
+          <a:bodyPr rtlCol="0" anchor="ctr"/>
+          <a:lstStyle/>
+          <a:p>
+            <a:pPr marL="0" marR="0" lvl="0" indent="0" algn="ctr" defTabSz="914400" rtl="0" eaLnBrk="1" fontAlgn="auto" latinLnBrk="0" hangingPunct="1">
+              <a:lnSpc>
+                <a:spcPct val="100000"/>
+              </a:lnSpc>
+              <a:spcBef>
+                <a:spcPts val="0"/>
+              </a:spcBef>
+              <a:spcAft>
+                <a:spcPts val="0"/>
+              </a:spcAft>
+              <a:buClrTx/>
+              <a:buSzTx/>
+              <a:buFontTx/>
+              <a:buNone/>
+              <a:tabLst/>
+              <a:defRPr/>
+            </a:pPr>
+            <a:endParaRPr kumimoji="0" lang="en-US" sz="1800" b="0" i="0" u="none" strike="noStrike" kern="1200" cap="none" spc="0" normalizeH="0" baseline="0" noProof="0">
+              <a:ln>
+                <a:noFill/>
+              </a:ln>
+              <a:solidFill>
+                <a:prstClr val="white"/>
+              </a:solidFill>
+              <a:effectLst/>
+              <a:uLnTx/>
+              <a:uFillTx/>
+              <a:latin typeface="Calibri" panose="020F0502020204030204"/>
+              <a:ea typeface="+mn-ea"/>
+              <a:cs typeface="+mn-cs"/>
+            </a:endParaRPr>
+          </a:p>
+        </p:txBody>
+      </p:sp>
+      <p:sp useBgFill="1">
+        <p:nvSpPr>
+          <p:cNvPr id="13" name="Rectangle 12">
+            <a:extLst>
+              <a:ext uri="{FF2B5EF4-FFF2-40B4-BE49-F238E27FC236}">
+                <a16:creationId xmlns:a16="http://schemas.microsoft.com/office/drawing/2014/main" id="{8EE94D8D-BC47-413E-91AB-A2FCCE172B57}"/>
+              </a:ext>
+              <a:ext uri="{C183D7F6-B498-43B3-948B-1728B52AA6E4}">
+                <adec:decorative xmlns:adec="http://schemas.microsoft.com/office/drawing/2017/decorative" val="1"/>
+              </a:ext>
+            </a:extLst>
+          </p:cNvPr>
+          <p:cNvSpPr>
+            <a:spLocks noGrp="1" noRot="1" noChangeAspect="1" noMove="1" noResize="1" noEditPoints="1" noAdjustHandles="1" noChangeArrowheads="1" noChangeShapeType="1" noTextEdit="1"/>
+          </p:cNvSpPr>
+          <p:nvPr>
+            <p:extLst>
+              <p:ext uri="{386F3935-93C4-4BCD-93E2-E3B085C9AB24}">
+                <p16:designElem xmlns:p16="http://schemas.microsoft.com/office/powerpoint/2015/main" val="1"/>
+              </p:ext>
+            </p:extLst>
+          </p:nvPr>
+        </p:nvSpPr>
+        <p:spPr>
+          <a:xfrm>
+            <a:off x="0" y="0"/>
+            <a:ext cx="12192000" cy="6858000"/>
+          </a:xfrm>
+          <a:prstGeom prst="rect">
+            <a:avLst/>
+          </a:prstGeom>
+          <a:ln>
+            <a:noFill/>
+          </a:ln>
+        </p:spPr>
+        <p:style>
+          <a:lnRef idx="2">
+            <a:schemeClr val="accent1">
+              <a:shade val="50000"/>
+            </a:schemeClr>
+          </a:lnRef>
+          <a:fillRef idx="1">
+            <a:schemeClr val="accent1"/>
+          </a:fillRef>
+          <a:effectRef idx="0">
+            <a:schemeClr val="accent1"/>
+          </a:effectRef>
+          <a:fontRef idx="minor">
+            <a:schemeClr val="lt1"/>
+          </a:fontRef>
+        </p:style>
+        <p:txBody>
+          <a:bodyPr rtlCol="0" anchor="ctr"/>
+          <a:lstStyle/>
+          <a:p>
+            <a:pPr algn="ctr"/>
+            <a:endParaRPr lang="en-US"/>
+          </a:p>
+        </p:txBody>
+      </p:sp>
+      <p:sp>
+        <p:nvSpPr>
+          <p:cNvPr id="2" name="Title 1">
+            <a:extLst>
+              <a:ext uri="{FF2B5EF4-FFF2-40B4-BE49-F238E27FC236}">
+                <a16:creationId xmlns:a16="http://schemas.microsoft.com/office/drawing/2014/main" id="{EEA2F8CA-2FA1-00B7-9957-945302D7F193}"/>
+              </a:ext>
+            </a:extLst>
+          </p:cNvPr>
+          <p:cNvSpPr>
+            <a:spLocks noGrp="1"/>
+          </p:cNvSpPr>
+          <p:nvPr>
+            <p:ph type="title"/>
+          </p:nvPr>
+        </p:nvSpPr>
+        <p:spPr>
+          <a:xfrm>
+            <a:off x="838200" y="4271749"/>
+            <a:ext cx="10515600" cy="1092050"/>
+          </a:xfrm>
+        </p:spPr>
+        <p:txBody>
+          <a:bodyPr vert="horz" lIns="91440" tIns="45720" rIns="91440" bIns="45720" rtlCol="0" anchor="b">
+            <a:normAutofit/>
+          </a:bodyPr>
+          <a:lstStyle/>
+          <a:p>
+            <a:pPr algn="ctr"/>
+            <a:r>
+              <a:rPr lang="en-US" sz="2500" dirty="0"/>
+              <a:t>https://</a:t>
+            </a:r>
+            <a:r>
+              <a:rPr lang="en-US" sz="2500" dirty="0" err="1"/>
+              <a:t>www.biorxiv.org</a:t>
+            </a:r>
+            <a:r>
+              <a:rPr lang="en-US" sz="2500" dirty="0"/>
+              <a:t>/content/10.1101/2025.02.10.637566v3.full</a:t>
+            </a:r>
+          </a:p>
+        </p:txBody>
+      </p:sp>
+      <p:sp useBgFill="1">
+        <p:nvSpPr>
+          <p:cNvPr id="15" name="Rectangle 14">
+            <a:extLst>
+              <a:ext uri="{FF2B5EF4-FFF2-40B4-BE49-F238E27FC236}">
+                <a16:creationId xmlns:a16="http://schemas.microsoft.com/office/drawing/2014/main" id="{284A8429-F65A-490D-96E4-1158D3E8A026}"/>
+              </a:ext>
+              <a:ext uri="{C183D7F6-B498-43B3-948B-1728B52AA6E4}">
+                <adec:decorative xmlns:adec="http://schemas.microsoft.com/office/drawing/2017/decorative" val="1"/>
+              </a:ext>
+            </a:extLst>
+          </p:cNvPr>
+          <p:cNvSpPr>
+            <a:spLocks noGrp="1" noRot="1" noChangeAspect="1" noMove="1" noResize="1" noEditPoints="1" noAdjustHandles="1" noChangeArrowheads="1" noChangeShapeType="1" noTextEdit="1"/>
+          </p:cNvSpPr>
+          <p:nvPr>
+            <p:extLst>
+              <p:ext uri="{386F3935-93C4-4BCD-93E2-E3B085C9AB24}">
+                <p16:designElem xmlns:p16="http://schemas.microsoft.com/office/powerpoint/2015/main" val="1"/>
+              </p:ext>
+            </p:extLst>
+          </p:nvPr>
+        </p:nvSpPr>
+        <p:spPr>
+          <a:xfrm>
+            <a:off x="838199" y="5441771"/>
+            <a:ext cx="10515599" cy="822960"/>
+          </a:xfrm>
+          <a:prstGeom prst="rect">
+            <a:avLst/>
+          </a:prstGeom>
+          <a:ln w="12700">
+            <a:solidFill>
+              <a:schemeClr val="tx2">
+                <a:lumMod val="10000"/>
+                <a:lumOff val="90000"/>
+              </a:schemeClr>
+            </a:solidFill>
+          </a:ln>
+          <a:effectLst>
+            <a:outerShdw blurRad="50800" dist="38100" dir="2700000" algn="tl" rotWithShape="0">
+              <a:schemeClr val="bg1">
+                <a:lumMod val="85000"/>
+                <a:alpha val="30000"/>
+              </a:schemeClr>
+            </a:outerShdw>
+          </a:effectLst>
+        </p:spPr>
+        <p:style>
+          <a:lnRef idx="2">
+            <a:schemeClr val="accent1">
+              <a:shade val="50000"/>
+            </a:schemeClr>
+          </a:lnRef>
+          <a:fillRef idx="1">
+            <a:schemeClr val="accent1"/>
+          </a:fillRef>
+          <a:effectRef idx="0">
+            <a:schemeClr val="accent1"/>
+          </a:effectRef>
+          <a:fontRef idx="minor">
+            <a:schemeClr val="lt1"/>
+          </a:fontRef>
+        </p:style>
+        <p:txBody>
+          <a:bodyPr rtlCol="0" anchor="ctr"/>
+          <a:lstStyle/>
+          <a:p>
+            <a:pPr marL="0" marR="0" lvl="0" indent="0" algn="ctr" defTabSz="914400" rtl="0" eaLnBrk="1" fontAlgn="auto" latinLnBrk="0" hangingPunct="1">
+              <a:lnSpc>
+                <a:spcPct val="100000"/>
+              </a:lnSpc>
+              <a:spcBef>
+                <a:spcPts val="0"/>
+              </a:spcBef>
+              <a:spcAft>
+                <a:spcPts val="0"/>
+              </a:spcAft>
+              <a:buClrTx/>
+              <a:buSzTx/>
+              <a:buFontTx/>
+              <a:buNone/>
+              <a:tabLst/>
+              <a:defRPr/>
+            </a:pPr>
+            <a:endParaRPr kumimoji="0" lang="en-US" sz="1800" b="0" i="0" u="none" strike="noStrike" kern="1200" cap="none" spc="0" normalizeH="0" baseline="0" noProof="0" dirty="0">
+              <a:ln>
+                <a:noFill/>
+              </a:ln>
+              <a:solidFill>
+                <a:prstClr val="white"/>
+              </a:solidFill>
+              <a:effectLst/>
+              <a:uLnTx/>
+              <a:uFillTx/>
+              <a:latin typeface="Calibri" panose="020F0502020204030204"/>
+              <a:ea typeface="+mn-ea"/>
+              <a:cs typeface="+mn-cs"/>
+            </a:endParaRPr>
+          </a:p>
+        </p:txBody>
+      </p:sp>
+      <p:pic>
+        <p:nvPicPr>
+          <p:cNvPr id="4" name="Picture 3" descr="A screenshot of a cell growth test&#10;&#10;AI-generated content may be incorrect.">
+            <a:extLst>
+              <a:ext uri="{FF2B5EF4-FFF2-40B4-BE49-F238E27FC236}">
+                <a16:creationId xmlns:a16="http://schemas.microsoft.com/office/drawing/2014/main" id="{6AE22C06-8057-11EA-8D54-A535BC4A4F39}"/>
+              </a:ext>
+            </a:extLst>
+          </p:cNvPr>
+          <p:cNvPicPr>
+            <a:picLocks noChangeAspect="1"/>
+          </p:cNvPicPr>
+          <p:nvPr/>
+        </p:nvPicPr>
+        <p:blipFill>
+          <a:blip r:embed="rId2"/>
+          <a:stretch>
+            <a:fillRect/>
+          </a:stretch>
+        </p:blipFill>
+        <p:spPr>
+          <a:xfrm>
+            <a:off x="838199" y="872658"/>
+            <a:ext cx="10515599" cy="2707767"/>
+          </a:xfrm>
+          <a:prstGeom prst="rect">
+            <a:avLst/>
+          </a:prstGeom>
+        </p:spPr>
+      </p:pic>
+      <p:sp>
+        <p:nvSpPr>
+          <p:cNvPr id="17" name="Rectangle 16">
+            <a:extLst>
+              <a:ext uri="{FF2B5EF4-FFF2-40B4-BE49-F238E27FC236}">
+                <a16:creationId xmlns:a16="http://schemas.microsoft.com/office/drawing/2014/main" id="{0F022291-A82B-4D23-A1E0-5F9BD684669E}"/>
+              </a:ext>
+              <a:ext uri="{C183D7F6-B498-43B3-948B-1728B52AA6E4}">
+                <adec:decorative xmlns:adec="http://schemas.microsoft.com/office/drawing/2017/decorative" val="1"/>
+              </a:ext>
+            </a:extLst>
+          </p:cNvPr>
+          <p:cNvSpPr>
+            <a:spLocks noGrp="1" noRot="1" noChangeAspect="1" noMove="1" noResize="1" noEditPoints="1" noAdjustHandles="1" noChangeArrowheads="1" noChangeShapeType="1" noTextEdit="1"/>
+          </p:cNvSpPr>
+          <p:nvPr>
+            <p:extLst>
+              <p:ext uri="{386F3935-93C4-4BCD-93E2-E3B085C9AB24}">
+                <p16:designElem xmlns:p16="http://schemas.microsoft.com/office/powerpoint/2015/main" val="1"/>
+              </p:ext>
+            </p:extLst>
+          </p:nvPr>
+        </p:nvSpPr>
+        <p:spPr>
+          <a:xfrm rot="5400000">
+            <a:off x="6041136" y="5905709"/>
+            <a:ext cx="109728" cy="731520"/>
+          </a:xfrm>
+          <a:prstGeom prst="rect">
+            <a:avLst/>
+          </a:prstGeom>
+          <a:solidFill>
+            <a:schemeClr val="accent1"/>
+          </a:solidFill>
+          <a:ln>
+            <a:noFill/>
+          </a:ln>
+        </p:spPr>
+        <p:style>
+          <a:lnRef idx="2">
+            <a:schemeClr val="accent1">
+              <a:shade val="50000"/>
+            </a:schemeClr>
+          </a:lnRef>
+          <a:fillRef idx="1">
+            <a:schemeClr val="accent1"/>
+          </a:fillRef>
+          <a:effectRef idx="0">
+            <a:schemeClr val="accent1"/>
+          </a:effectRef>
+          <a:fontRef idx="minor">
+            <a:schemeClr val="lt1"/>
+          </a:fontRef>
+        </p:style>
+        <p:txBody>
+          <a:bodyPr rtlCol="0" anchor="ctr"/>
+          <a:lstStyle/>
+          <a:p>
+            <a:pPr marL="0" marR="0" lvl="0" indent="0" algn="ctr" defTabSz="914400" rtl="0" eaLnBrk="1" fontAlgn="auto" latinLnBrk="0" hangingPunct="1">
+              <a:lnSpc>
+                <a:spcPct val="100000"/>
+              </a:lnSpc>
+              <a:spcBef>
+                <a:spcPts val="0"/>
+              </a:spcBef>
+              <a:spcAft>
+                <a:spcPts val="0"/>
+              </a:spcAft>
+              <a:buClrTx/>
+              <a:buSzTx/>
+              <a:buFontTx/>
+              <a:buNone/>
+              <a:tabLst/>
+              <a:defRPr/>
+            </a:pPr>
+            <a:endParaRPr kumimoji="0" lang="en-US" sz="1800" b="0" i="0" u="none" strike="noStrike" kern="1200" cap="none" spc="0" normalizeH="0" baseline="0" noProof="0">
+              <a:ln>
+                <a:noFill/>
+              </a:ln>
+              <a:solidFill>
+                <a:prstClr val="white"/>
+              </a:solidFill>
+              <a:effectLst/>
+              <a:uLnTx/>
+              <a:uFillTx/>
+              <a:latin typeface="Calibri" panose="020F0502020204030204"/>
+              <a:ea typeface="+mn-ea"/>
+              <a:cs typeface="+mn-cs"/>
+            </a:endParaRPr>
+          </a:p>
+        </p:txBody>
+      </p:sp>
+    </p:spTree>
+    <p:extLst>
+      <p:ext uri="{BB962C8B-B14F-4D97-AF65-F5344CB8AC3E}">
+        <p14:creationId xmlns:p14="http://schemas.microsoft.com/office/powerpoint/2010/main" val="4134433114"/>
+      </p:ext>
+    </p:extLst>
+  </p:cSld>
+  <p:clrMapOvr>
+    <a:masterClrMapping/>
+  </p:clrMapOvr>
+</p:sld>
+</file>
+
+<file path=ppt/slides/slide23.xml><?xml version="1.0" encoding="utf-8"?>
+<p:sld xmlns:a="http://schemas.openxmlformats.org/drawingml/2006/main" xmlns:r="http://schemas.openxmlformats.org/officeDocument/2006/relationships" xmlns:p="http://schemas.openxmlformats.org/presentationml/2006/main">
+  <p:cSld>
+    <p:spTree>
+      <p:nvGrpSpPr>
+        <p:cNvPr id="1" name="">
+          <a:extLst>
+            <a:ext uri="{FF2B5EF4-FFF2-40B4-BE49-F238E27FC236}">
+              <a16:creationId xmlns:a16="http://schemas.microsoft.com/office/drawing/2014/main" id="{EA0AE2F8-B212-B5FE-B2E5-D3F7239D936D}"/>
+            </a:ext>
+          </a:extLst>
+        </p:cNvPr>
+        <p:cNvGrpSpPr/>
+        <p:nvPr/>
+      </p:nvGrpSpPr>
+      <p:grpSpPr>
+        <a:xfrm>
+          <a:off x="0" y="0"/>
+          <a:ext cx="0" cy="0"/>
+          <a:chOff x="0" y="0"/>
+          <a:chExt cx="0" cy="0"/>
+        </a:xfrm>
+      </p:grpSpPr>
+      <p:sp>
+        <p:nvSpPr>
+          <p:cNvPr id="2" name="Title 1">
+            <a:extLst>
+              <a:ext uri="{FF2B5EF4-FFF2-40B4-BE49-F238E27FC236}">
+                <a16:creationId xmlns:a16="http://schemas.microsoft.com/office/drawing/2014/main" id="{24683E63-E3D6-0C38-669F-3901C24F74A3}"/>
+              </a:ext>
+            </a:extLst>
+          </p:cNvPr>
+          <p:cNvSpPr>
+            <a:spLocks noGrp="1"/>
+          </p:cNvSpPr>
+          <p:nvPr>
+            <p:ph type="title"/>
+          </p:nvPr>
+        </p:nvSpPr>
+        <p:spPr>
+          <a:xfrm>
+            <a:off x="886604" y="147997"/>
+            <a:ext cx="10711658" cy="882017"/>
+          </a:xfrm>
+        </p:spPr>
+        <p:txBody>
+          <a:bodyPr vert="horz" lIns="91440" tIns="45720" rIns="91440" bIns="45720" rtlCol="0" anchor="ctr">
+            <a:normAutofit/>
+          </a:bodyPr>
+          <a:lstStyle/>
+          <a:p>
+            <a:pPr>
+              <a:defRPr sz="2800"/>
+            </a:pPr>
+            <a:r>
+              <a:rPr lang="en-US" sz="4400" dirty="0"/>
+              <a:t>Growth rate dependance </a:t>
+            </a:r>
+          </a:p>
+        </p:txBody>
+      </p:sp>
+      <p:pic>
+        <p:nvPicPr>
+          <p:cNvPr id="3" name="Picture 2" descr="A diagram of a cell growth&#10;&#10;AI-generated content may be incorrect.">
+            <a:extLst>
+              <a:ext uri="{FF2B5EF4-FFF2-40B4-BE49-F238E27FC236}">
+                <a16:creationId xmlns:a16="http://schemas.microsoft.com/office/drawing/2014/main" id="{948178EE-BE4F-0EF1-D2A3-C95600937E52}"/>
+              </a:ext>
+            </a:extLst>
+          </p:cNvPr>
+          <p:cNvPicPr>
+            <a:picLocks noChangeAspect="1"/>
+          </p:cNvPicPr>
+          <p:nvPr/>
+        </p:nvPicPr>
+        <p:blipFill>
+          <a:blip r:embed="rId2"/>
+          <a:stretch>
+            <a:fillRect/>
+          </a:stretch>
+        </p:blipFill>
+        <p:spPr>
+          <a:xfrm>
+            <a:off x="1494518" y="1050182"/>
+            <a:ext cx="9202963" cy="5659821"/>
+          </a:xfrm>
+          <a:prstGeom prst="rect">
+            <a:avLst/>
+          </a:prstGeom>
+        </p:spPr>
+      </p:pic>
+    </p:spTree>
+    <p:extLst>
+      <p:ext uri="{BB962C8B-B14F-4D97-AF65-F5344CB8AC3E}">
+        <p14:creationId xmlns:p14="http://schemas.microsoft.com/office/powerpoint/2010/main" val="1539061046"/>
       </p:ext>
     </p:extLst>
   </p:cSld>
@@ -11856,4 +17786,10 @@
     </a:ext>
   </a:extLst>
 </a:theme>
+</file>
+
+<file path=docMetadata/LabelInfo.xml><?xml version="1.0" encoding="utf-8"?>
+<clbl:labelList xmlns:clbl="http://schemas.microsoft.com/office/2020/mipLabelMetadata">
+  <clbl:label id="{7893ce20-a697-4fd6-a4da-14011f6a471d}" enabled="1" method="Standard" siteId="{a8eec281-aaa3-4dae-ac9b-9a398b9215e7}" contentBits="0" removed="0"/>
+</clbl:labelList>
 </file>